--- a/submission/CMP7200_Viva_Presentation.pptx
+++ b/submission/CMP7200_Viva_Presentation.pptx
@@ -527,7 +527,7 @@
           </a:p>
           <a:p>
             <a:r>
-              <a:t>and no explanation. Mine measures how much its own scores can be trusted, and</a:t>
+              <a:t>and no explanation. Mine measures how far its own scores can be trusted, and</a:t>
             </a:r>
           </a:p>
           <a:p>
@@ -602,7 +602,7 @@
           <a:lstStyle/>
           <a:p>
             <a:r>
-              <a:t>To finish. Four things.</a:t>
+              <a:t>Four things.</a:t>
             </a:r>
           </a:p>
           <a:p/>
@@ -613,23 +613,23 @@
           </a:p>
           <a:p>
             <a:r>
-              <a:t>interviews by voice or typing, and produces a report that shows its working.</a:t>
+              <a:t>interviews by speaking or typing, and produces a report that shows its working.</a:t>
             </a:r>
           </a:p>
           <a:p/>
           <a:p>
             <a:r>
-              <a:t>A clear measurement of how an AI marker behaves when it is actually deployed —</a:t>
-            </a:r>
-          </a:p>
-          <a:p>
-            <a:r>
-              <a:t>specifically, that it can rank answers well and still be badly calibrated. That</a:t>
-            </a:r>
-          </a:p>
-          <a:p>
-            <a:r>
-              <a:t>distinction is where both of my faults came from.</a:t>
+              <a:t>A clear measurement of how an AI marker behaves in practice — that it can rank</a:t>
+            </a:r>
+          </a:p>
+          <a:p>
+            <a:r>
+              <a:t>answers well and still be far too generous. That distinction is where both faults</a:t>
+            </a:r>
+          </a:p>
+          <a:p>
+            <a:r>
+              <a:t>came from.</a:t>
             </a:r>
           </a:p>
           <a:p/>
@@ -640,23 +640,18 @@
           </a:p>
           <a:p>
             <a:r>
-              <a:t>supplied its training answers does not tell you anything, and I have the evidence</a:t>
-            </a:r>
-          </a:p>
-          <a:p>
-            <a:r>
-              <a:t>for why.</a:t>
+              <a:t>supplied its training answers proves nothing, and I have the evidence.</a:t>
             </a:r>
           </a:p>
           <a:p/>
           <a:p>
             <a:r>
-              <a:t>And the whole test setup is in the submission, so every number I have shown you</a:t>
-            </a:r>
-          </a:p>
-          <a:p>
-            <a:r>
-              <a:t>can be produced again.</a:t>
+              <a:t>And the whole test setup is in the submission, so every number can be produced</a:t>
+            </a:r>
+          </a:p>
+          <a:p>
+            <a:r>
+              <a:t>again.</a:t>
             </a:r>
           </a:p>
           <a:p/>
@@ -672,12 +667,7 @@
           </a:p>
           <a:p>
             <a:r>
-              <a:t>second marker nobody has checked. Backup without independent checking looks like</a:t>
-            </a:r>
-          </a:p>
-          <a:p>
-            <a:r>
-              <a:t>safety without being it.</a:t>
+              <a:t>second marker nobody has checked.</a:t>
             </a:r>
           </a:p>
           <a:p/>
@@ -779,18 +769,13 @@
           </a:p>
           <a:p>
             <a:r>
-              <a:t>could manage. The appeal is obvious: it is fast, and it asks everyone the same</a:t>
-            </a:r>
-          </a:p>
-          <a:p>
-            <a:r>
-              <a:t>questions.</a:t>
+              <a:t>could manage. It is fast, and it asks everyone the same questions.</a:t>
             </a:r>
           </a:p>
           <a:p/>
           <a:p>
             <a:r>
-              <a:t>The trouble is what comes out. A number, and nothing else. No reason, and no way</a:t>
+              <a:t>The trouble is what comes out: a number, and nothing else. No reason, and no way</a:t>
             </a:r>
           </a:p>
           <a:p>
@@ -811,23 +796,18 @@
           </a:p>
           <a:p>
             <a:r>
-              <a:t>the deeper problem stayed: you still get a score with no explanation.</a:t>
+              <a:t>the deeper problem stayed.</a:t>
             </a:r>
           </a:p>
           <a:p/>
           <a:p>
             <a:r>
-              <a:t>It also costs companies money. Research shows candidates who think a process was</a:t>
-            </a:r>
-          </a:p>
-          <a:p>
-            <a:r>
-              <a:t>unfair are less likely to accept the job if offered, which cancels out the time</a:t>
-            </a:r>
-          </a:p>
-          <a:p>
-            <a:r>
-              <a:t>the company saved.</a:t>
+              <a:t>It also costs companies money. Candidates who think a process was unfair are</a:t>
+            </a:r>
+          </a:p>
+          <a:p>
+            <a:r>
+              <a:t>less likely to accept the job, which cancels out the time saved.</a:t>
             </a:r>
           </a:p>
           <a:p/>
@@ -838,17 +818,28 @@
           </a:p>
           <a:p>
             <a:r>
-              <a:t>risk. Notice what it actually asks for: not a perfect model, which nobody can</a:t>
-            </a:r>
-          </a:p>
-          <a:p>
-            <a:r>
-              <a:t>build, but that problems be tested for, written down, and checked by a person.</a:t>
-            </a:r>
-          </a:p>
-          <a:p>
-            <a:r>
-              <a:t>That is a list of requirements, and it is the one I built to.</a:t>
+              <a:t>risk. Notice what it asks for: not a perfect model, which nobody can build, but</a:t>
+            </a:r>
+          </a:p>
+          <a:p>
+            <a:r>
+              <a:t>that problems be tested for, written down, and checked by a person. That is a</a:t>
+            </a:r>
+          </a:p>
+          <a:p>
+            <a:r>
+              <a:t>list of requirements, and it is the one I built to.</a:t>
+            </a:r>
+          </a:p>
+          <a:p/>
+          <a:p>
+            <a:r>
+              <a:t>So my question is not whether AI can mark an answer. It plainly can. It is</a:t>
+            </a:r>
+          </a:p>
+          <a:p>
+            <a:r>
+              <a:t>whether it can be honest about how far each mark should be trusted.</a:t>
             </a:r>
           </a:p>
         </p:txBody>
@@ -918,85 +909,72 @@
           <a:lstStyle/>
           <a:p>
             <a:r>
-              <a:t>Being clear about the boundaries, because the limits are as important as the</a:t>
-            </a:r>
-          </a:p>
-          <a:p>
-            <a:r>
-              <a:t>features.</a:t>
+              <a:t>Here is the whole thing, left to right, in four stages.</a:t>
             </a:r>
           </a:p>
           <a:p/>
           <a:p>
             <a:r>
-              <a:t>What it does. It reads a CV and a job advert. It works out which required skills</a:t>
-            </a:r>
-          </a:p>
-          <a:p>
-            <a:r>
-              <a:t>the candidate has not shown. It writes an interview and asks about those missing</a:t>
-            </a:r>
-          </a:p>
-          <a:p>
-            <a:r>
-              <a:t>skills first. It runs that interview by voice or by typing. It marks every</a:t>
-            </a:r>
-          </a:p>
-          <a:p>
-            <a:r>
-              <a:t>answer and says how confident it is in each mark. And it produces a report where</a:t>
-            </a:r>
-          </a:p>
-          <a:p>
-            <a:r>
-              <a:t>every number can be traced back to something.</a:t>
+              <a:t>Prepare. A CV and a job advert go in. The system maps the skills onto ESCO, the</a:t>
+            </a:r>
+          </a:p>
+          <a:p>
+            <a:r>
+              <a:t>official EU skills list, so when it says a skill is missing, that skill is a real</a:t>
+            </a:r>
+          </a:p>
+          <a:p>
+            <a:r>
+              <a:t>published thing and not something the AI invented. It writes the interview and</a:t>
+            </a:r>
+          </a:p>
+          <a:p>
+            <a:r>
+              <a:t>puts the missing skills first, because every interview runs out of time and a</a:t>
+            </a:r>
+          </a:p>
+          <a:p>
+            <a:r>
+              <a:t>question at the end never gets asked.</a:t>
             </a:r>
           </a:p>
           <a:p/>
           <a:p>
             <a:r>
-              <a:t>What it does not do, on purpose. It does not hire anyone — it produces evidence,</a:t>
-            </a:r>
-          </a:p>
-          <a:p>
-            <a:r>
-              <a:t>a person decides. It knows nothing about who the candidate is: no age, no</a:t>
-            </a:r>
-          </a:p>
-          <a:p>
-            <a:r>
-              <a:t>gender, no name, no background. It does not predict how well someone would do</a:t>
-            </a:r>
-          </a:p>
-          <a:p>
-            <a:r>
-              <a:t>the job; it measures how well they answered, which is a different claim, and</a:t>
-            </a:r>
-          </a:p>
-          <a:p>
-            <a:r>
-              <a:t>proving the first would need years of follow-up data. And it is not a finished</a:t>
-            </a:r>
-          </a:p>
-          <a:p>
-            <a:r>
-              <a:t>product — one interview at a time, no login, no database. It is a research</a:t>
-            </a:r>
-          </a:p>
-          <a:p>
-            <a:r>
-              <a:t>prototype.</a:t>
+              <a:t>Interview. The candidate picks speaking or typing. Both produce exactly the same</a:t>
+            </a:r>
+          </a:p>
+          <a:p>
+            <a:r>
+              <a:t>transcript, so nothing after this point knows which one ran.</a:t>
             </a:r>
           </a:p>
           <a:p/>
           <a:p>
             <a:r>
-              <a:t>If you take one thing from this slide: every one of those limits is a decision I</a:t>
-            </a:r>
-          </a:p>
-          <a:p>
-            <a:r>
-              <a:t>can defend, not something I ran out of time for.</a:t>
+              <a:t>Mark. Greetings and goodbyes are thrown away so they cannot drag the average up.</a:t>
+            </a:r>
+          </a:p>
+          <a:p>
+            <a:r>
+              <a:t>Every real answer is marked twice. Timing and tab switches get checked.</a:t>
+            </a:r>
+          </a:p>
+          <a:p/>
+          <a:p>
+            <a:r>
+              <a:t>Report. Everything is combined into one score and a recommendation, with the</a:t>
+            </a:r>
+          </a:p>
+          <a:p>
+            <a:r>
+              <a:t>working shown.</a:t>
+            </a:r>
+          </a:p>
+          <a:p/>
+          <a:p>
+            <a:r>
+              <a:t>Thirteen parts do this, and the next four slides go through them.</a:t>
             </a:r>
           </a:p>
         </p:txBody>
@@ -1066,97 +1044,75 @@
           <a:lstStyle/>
           <a:p>
             <a:r>
-              <a:t>Here is the whole thing in one picture, left to right, in four stages.</a:t>
+              <a:t>The first four parts turn two documents into a plan.</a:t>
             </a:r>
           </a:p>
           <a:p/>
           <a:p>
             <a:r>
-              <a:t>Stage one, prepare. A CV and a job advert go in. The system reads both and maps</a:t>
-            </a:r>
-          </a:p>
-          <a:p>
-            <a:r>
-              <a:t>the skills onto ESCO — that is the official EU list of job skills, so when it</a:t>
-            </a:r>
-          </a:p>
-          <a:p>
-            <a:r>
-              <a:t>says a skill is missing, that skill is a real published thing and not something</a:t>
-            </a:r>
-          </a:p>
-          <a:p>
-            <a:r>
-              <a:t>the AI invented. It then writes the interview and puts the missing skills first,</a:t>
-            </a:r>
-          </a:p>
-          <a:p>
-            <a:r>
-              <a:t>because every interview runs out of time and a question at the end never gets</a:t>
-            </a:r>
-          </a:p>
-          <a:p>
-            <a:r>
-              <a:t>asked.</a:t>
+              <a:t>M1 and M2 read the CV and the job advert. Both use Gemini, asked to return a</a:t>
+            </a:r>
+          </a:p>
+          <a:p>
+            <a:r>
+              <a:t>fixed structure. Models sometimes return broken data, so the client repairs it</a:t>
+            </a:r>
+          </a:p>
+          <a:p>
+            <a:r>
+              <a:t>rather than failing the request — unglamorous, but it is the difference between</a:t>
+            </a:r>
+          </a:p>
+          <a:p>
+            <a:r>
+              <a:t>a demo that works and one that dies in front of you.</a:t>
             </a:r>
           </a:p>
           <a:p/>
           <a:p>
             <a:r>
-              <a:t>Stage two, the interview. The candidate picks voice or typing. Both produce</a:t>
-            </a:r>
-          </a:p>
-          <a:p>
-            <a:r>
-              <a:t>exactly the same transcript, so nothing after this point knows or cares which</a:t>
-            </a:r>
-          </a:p>
-          <a:p>
-            <a:r>
-              <a:t>one ran. While they answer, the browser watches attention and posture and tone</a:t>
-            </a:r>
-          </a:p>
-          <a:p>
-            <a:r>
-              <a:t>of voice — and none of that video or audio ever leaves their computer.</a:t>
+              <a:t>M3 is the core of the project. It maps both skill lists onto ESCO, the EU's</a:t>
+            </a:r>
+          </a:p>
+          <a:p>
+            <a:r>
+              <a:t>published skills taxonomy, using four matching steps that get gradually more</a:t>
+            </a:r>
+          </a:p>
+          <a:p>
+            <a:r>
+              <a:t>forgiving. This is deliberately not machine learning: ESCO is already a curated</a:t>
+            </a:r>
+          </a:p>
+          <a:p>
+            <a:r>
+              <a:t>hierarchy, and learning over it would add opacity while removing the one</a:t>
+            </a:r>
+          </a:p>
+          <a:p>
+            <a:r>
+              <a:t>property that makes it defensible — that every skill traces to a published</a:t>
+            </a:r>
+          </a:p>
+          <a:p>
+            <a:r>
+              <a:t>standard.</a:t>
             </a:r>
           </a:p>
           <a:p/>
           <a:p>
             <a:r>
-              <a:t>Stage three, marking. Greetings and goodbyes are thrown away so they cannot</a:t>
-            </a:r>
-          </a:p>
-          <a:p>
-            <a:r>
-              <a:t>drag the average up. Every real answer is marked twice. Timing and tab switches</a:t>
-            </a:r>
-          </a:p>
-          <a:p>
-            <a:r>
-              <a:t>get checked for anything odd.</a:t>
-            </a:r>
-          </a:p>
-          <a:p/>
-          <a:p>
-            <a:r>
-              <a:t>Stage four, the report. Everything is combined into one score and a</a:t>
-            </a:r>
-          </a:p>
-          <a:p>
-            <a:r>
-              <a:t>recommendation, with the working shown.</a:t>
-            </a:r>
-          </a:p>
-          <a:p/>
-          <a:p>
-            <a:r>
-              <a:t>The design point worth making: each part has one job and a clear input and</a:t>
-            </a:r>
-          </a:p>
-          <a:p>
-            <a:r>
-              <a:t>output, so any one of them could be replaced without disturbing the rest.</a:t>
+              <a:t>M4 writes the interview, then reorders it so the missing skills get asked first.</a:t>
+            </a:r>
+          </a:p>
+          <a:p>
+            <a:r>
+              <a:t>That reordering is Objective 2, and it matters because every interview has a</a:t>
+            </a:r>
+          </a:p>
+          <a:p>
+            <a:r>
+              <a:t>time budget and a question at the end never gets asked.</a:t>
             </a:r>
           </a:p>
         </p:txBody>
@@ -1226,76 +1182,76 @@
           <a:lstStyle/>
           <a:p>
             <a:r>
-              <a:t>Thirteen parts. I will not read them all out — the point is that each has one</a:t>
-            </a:r>
-          </a:p>
-          <a:p>
-            <a:r>
-              <a:t>job, and you can see where every piece of the system lives.</a:t>
+              <a:t>The interview itself.</a:t>
             </a:r>
           </a:p>
           <a:p/>
           <a:p>
             <a:r>
-              <a:t>The first four prepare the interview: read the CV, read the job advert, compare</a:t>
-            </a:r>
-          </a:p>
-          <a:p>
-            <a:r>
-              <a:t>them to find the gaps, and write the questions.</a:t>
+              <a:t>M5 is the talking interviewer. LiveKit carries the audio call, Deepgram turns</a:t>
+            </a:r>
+          </a:p>
+          <a:p>
+            <a:r>
+              <a:t>speech into text, and ElevenLabs is the voice — with Deepgram's own voice as a</a:t>
+            </a:r>
+          </a:p>
+          <a:p>
+            <a:r>
+              <a:t>backup if that runs out of credit. It shows each question on screen before</a:t>
+            </a:r>
+          </a:p>
+          <a:p>
+            <a:r>
+              <a:t>speaking it, so a candidate who mishears can read it.</a:t>
             </a:r>
           </a:p>
           <a:p/>
           <a:p>
             <a:r>
-              <a:t>The middle group runs and watches the interview: the talking interviewer, the</a:t>
-            </a:r>
-          </a:p>
-          <a:p>
-            <a:r>
-              <a:t>typed version, the tracker that remembers how each skill is going, and the three</a:t>
-            </a:r>
-          </a:p>
-          <a:p>
-            <a:r>
-              <a:t>that watch attention, posture and tone of voice through the browser.</a:t>
+              <a:t>Two things I got wrong here and had to fix. The system checks the voice provider</a:t>
+            </a:r>
+          </a:p>
+          <a:p>
+            <a:r>
+              <a:t>actually returns audio before starting, because an exhausted account accepts the</a:t>
+            </a:r>
+          </a:p>
+          <a:p>
+            <a:r>
+              <a:t>connection and returns silence, which looks exactly like success. And the</a:t>
+            </a:r>
+          </a:p>
+          <a:p>
+            <a:r>
+              <a:t>turn-taking timings had to be slowed right down: the defaults are tuned for</a:t>
+            </a:r>
+          </a:p>
+          <a:p>
+            <a:r>
+              <a:t>chat, and an interview answer contains long pauses for thought.</a:t>
             </a:r>
           </a:p>
           <a:p/>
           <a:p>
             <a:r>
-              <a:t>The last group does the marking: the judge that scores each answer, the cheating</a:t>
-            </a:r>
-          </a:p>
-          <a:p>
-            <a:r>
-              <a:t>check, the part that combines everything, and the part that writes the report.</a:t>
+              <a:t>M5t is the same interview, typed. It matters more than it sounds: it produces an</a:t>
+            </a:r>
+          </a:p>
+          <a:p>
+            <a:r>
+              <a:t>identical transcript, so every part after this point is shared. It also lets you</a:t>
+            </a:r>
+          </a:p>
+          <a:p>
+            <a:r>
+              <a:t>demonstrate the whole system without any audio hardware at all.</a:t>
             </a:r>
           </a:p>
           <a:p/>
           <a:p>
             <a:r>
-              <a:t>Two things worth noticing. Numbers five and five-T are the same module with a</a:t>
-            </a:r>
-          </a:p>
-          <a:p>
-            <a:r>
-              <a:t>different way of getting the answer in — speaking or typing — which is why the</a:t>
-            </a:r>
-          </a:p>
-          <a:p>
-            <a:r>
-              <a:t>count is thirteen and not fourteen. And numbers seven, eight and ten all run</a:t>
-            </a:r>
-          </a:p>
-          <a:p>
-            <a:r>
-              <a:t>inside the candidate's browser, which is how the privacy promise on the last</a:t>
-            </a:r>
-          </a:p>
-          <a:p>
-            <a:r>
-              <a:t>slide is actually kept.</a:t>
+              <a:t>M6a keeps the running verdict on each skill that decides whether to follow up.</a:t>
             </a:r>
           </a:p>
         </p:txBody>
@@ -1365,93 +1321,75 @@
           <a:lstStyle/>
           <a:p>
             <a:r>
-              <a:t>What I actually used, and where the AI is.</a:t>
+              <a:t>Three parts watch how the interview went rather than what was said.</a:t>
             </a:r>
           </a:p>
           <a:p/>
           <a:p>
             <a:r>
-              <a:t>Three jobs use a language model: reading the two documents, writing the</a:t>
-            </a:r>
-          </a:p>
-          <a:p>
-            <a:r>
-              <a:t>questions, and marking the answers. That is Google Gemini 3.6 Flash in every</a:t>
-            </a:r>
-          </a:p>
-          <a:p>
-            <a:r>
-              <a:t>case. One model, so the behaviour is consistent and there is one thing to test.</a:t>
+              <a:t>M7 finds 478 points on the face and works out where the head is pointing and</a:t>
+            </a:r>
+          </a:p>
+          <a:p>
+            <a:r>
+              <a:t>whether the eyes are on the screen. M8 finds 33 points on the upper body and</a:t>
+            </a:r>
+          </a:p>
+          <a:p>
+            <a:r>
+              <a:t>checks posture. M10 listens to the sound of the voice — pitch steadiness,</a:t>
+            </a:r>
+          </a:p>
+          <a:p>
+            <a:r>
+              <a:t>loudness, how much of the time is actual speech.</a:t>
             </a:r>
           </a:p>
           <a:p/>
           <a:p>
             <a:r>
-              <a:t>The spoken interview uses three services: LiveKit carries the audio call,</a:t>
-            </a:r>
-          </a:p>
-          <a:p>
-            <a:r>
-              <a:t>Deepgram turns speech into text, and ElevenLabs is the interviewer's voice, with</a:t>
-            </a:r>
-          </a:p>
-          <a:p>
-            <a:r>
-              <a:t>Deepgram's voice as a backup if that runs out of credit.</a:t>
+              <a:t>The line at the bottom is the one I would emphasise. All three run inside the</a:t>
+            </a:r>
+          </a:p>
+          <a:p>
+            <a:r>
+              <a:t>candidate's own browser using models downloaded once. The video and the audio</a:t>
+            </a:r>
+          </a:p>
+          <a:p>
+            <a:r>
+              <a:t>never leave their machine; only the resulting numbers are sent. That is what</a:t>
+            </a:r>
+          </a:p>
+          <a:p>
+            <a:r>
+              <a:t>makes the privacy claim real rather than a promise.</a:t>
             </a:r>
           </a:p>
           <a:p/>
           <a:p>
             <a:r>
-              <a:t>The skill matching uses no AI at all, and that is deliberate. ESCO is already a</a:t>
-            </a:r>
-          </a:p>
-          <a:p>
-            <a:r>
-              <a:t>carefully built list maintained as an EU standard. Learning something over the</a:t>
-            </a:r>
-          </a:p>
-          <a:p>
-            <a:r>
-              <a:t>top of it would make it harder to explain and would throw away the one property</a:t>
-            </a:r>
-          </a:p>
-          <a:p>
-            <a:r>
-              <a:t>that makes it defensible — that every skill traces back to a published standard.</a:t>
-            </a:r>
-          </a:p>
-          <a:p/>
-          <a:p>
-            <a:r>
-              <a:t>The camera and microphone work uses Google's MediaPipe, running inside the</a:t>
-            </a:r>
-          </a:p>
-          <a:p>
-            <a:r>
-              <a:t>browser. The cheating check uses a scikit-learn model that trains itself on</a:t>
-            </a:r>
-          </a:p>
-          <a:p>
-            <a:r>
-              <a:t>first run, because nobody can ethically collect real examples of cheating.</a:t>
-            </a:r>
-          </a:p>
-          <a:p/>
-          <a:p>
-            <a:r>
-              <a:t>And the app itself is a Python server with a React front end.</a:t>
-            </a:r>
-          </a:p>
-          <a:p/>
-          <a:p>
-            <a:r>
-              <a:t>The line at the bottom is the one to say out loud: video and audio never leave</a:t>
-            </a:r>
-          </a:p>
-          <a:p>
-            <a:r>
-              <a:t>the candidate's computer. Only the resulting numbers do.</a:t>
+              <a:t>Two limits I would state before you ask. None of this reads emotion — I removed</a:t>
+            </a:r>
+          </a:p>
+          <a:p>
+            <a:r>
+              <a:t>a facial emotion classifier precisely because it could not be explained, and my</a:t>
+            </a:r>
+          </a:p>
+          <a:p>
+            <a:r>
+              <a:t>Chapter 2 criticises HireVue for exactly that. And all three together are worth</a:t>
+            </a:r>
+          </a:p>
+          <a:p>
+            <a:r>
+              <a:t>fifteen points out of a hundred in the final score, against fifty for what the</a:t>
+            </a:r>
+          </a:p>
+          <a:p>
+            <a:r>
+              <a:t>candidate actually said. Nobody is marked on their face.</a:t>
             </a:r>
           </a:p>
         </p:txBody>
@@ -1521,77 +1459,81 @@
           <a:lstStyle/>
           <a:p>
             <a:r>
-              <a:t>This is the idea the whole project rests on, and it is simple.</a:t>
+              <a:t>The marking, and this is where the research contribution sits.</a:t>
             </a:r>
           </a:p>
           <a:p/>
           <a:p>
             <a:r>
-              <a:t>Research has shown that when you use an AI to mark work, changing the order you</a:t>
-            </a:r>
-          </a:p>
-          <a:p>
-            <a:r>
-              <a:t>show it the marking criteria changes the score it gives. Most people quote that</a:t>
-            </a:r>
-          </a:p>
-          <a:p>
-            <a:r>
-              <a:t>as a reason not to trust AI marking.</a:t>
+              <a:t>M6 is the important one. Research shows that if you change the order you present</a:t>
+            </a:r>
+          </a:p>
+          <a:p>
+            <a:r>
+              <a:t>the marking criteria in, an AI judge gives a different score. Most people cite</a:t>
+            </a:r>
+          </a:p>
+          <a:p>
+            <a:r>
+              <a:t>that as a reason not to trust AI marking. I read it as an instruction: mark every</a:t>
+            </a:r>
+          </a:p>
+          <a:p>
+            <a:r>
+              <a:t>answer twice, with the criteria in a different order each time.</a:t>
             </a:r>
           </a:p>
           <a:p/>
           <a:p>
             <a:r>
-              <a:t>I read it as an instruction. If the order changes the score, then mark every</a:t>
-            </a:r>
-          </a:p>
-          <a:p>
-            <a:r>
-              <a:t>answer twice, with the criteria in a different order each time. Averaging cancels</a:t>
-            </a:r>
-          </a:p>
-          <a:p>
-            <a:r>
-              <a:t>out the effect of the order.</a:t>
+              <a:t>Averaging cancels the effect of the order. But the average is not the interesting</a:t>
+            </a:r>
+          </a:p>
+          <a:p>
+            <a:r>
+              <a:t>part — the gap between the two marks is. Eighty-two then eighty-one means it is</a:t>
+            </a:r>
+          </a:p>
+          <a:p>
+            <a:r>
+              <a:t>sure. Seventy-one then forty-five means it is not, and the average of fifty-eight</a:t>
+            </a:r>
+          </a:p>
+          <a:p>
+            <a:r>
+              <a:t>hides that completely. So the gap is kept, and a big gap sends that answer to a</a:t>
+            </a:r>
+          </a:p>
+          <a:p>
+            <a:r>
+              <a:t>human instead of reporting a confident score.</a:t>
             </a:r>
           </a:p>
           <a:p/>
           <a:p>
             <a:r>
-              <a:t>But the average is not the interesting part. The gap between the two marks is.</a:t>
-            </a:r>
-          </a:p>
-          <a:p>
-            <a:r>
-              <a:t>If it says 82 and then 81, it is sure. If it says 71 and then 45, it is not —</a:t>
-            </a:r>
-          </a:p>
-          <a:p>
-            <a:r>
-              <a:t>and the average of 58 hides that completely.</a:t>
+              <a:t>M9 checks the session behaved normally. It trains its own model of normal on</a:t>
+            </a:r>
+          </a:p>
+          <a:p>
+            <a:r>
+              <a:t>first run, because labelled examples of cheating are not something anyone can</a:t>
+            </a:r>
+          </a:p>
+          <a:p>
+            <a:r>
+              <a:t>ethically collect. It always names the behaviour that caused a flag.</a:t>
             </a:r>
           </a:p>
           <a:p/>
           <a:p>
             <a:r>
-              <a:t>So I keep the gap. A big gap means the mark cannot be trusted, and that answer</a:t>
-            </a:r>
-          </a:p>
-          <a:p>
-            <a:r>
-              <a:t>goes to a human instead of being reported as a confident score.</a:t>
-            </a:r>
-          </a:p>
-          <a:p/>
-          <a:p>
-            <a:r>
-              <a:t>The claim is deliberately modest. I am not saying the AI is unbiased. I am</a:t>
-            </a:r>
-          </a:p>
-          <a:p>
-            <a:r>
-              <a:t>saying that when it is unsure, the system admits it.</a:t>
+              <a:t>M11 combines everything on fixed published weights — half the score is what the</a:t>
+            </a:r>
+          </a:p>
+          <a:p>
+            <a:r>
+              <a:t>candidate actually said. M12 writes it up with the working shown.</a:t>
             </a:r>
           </a:p>
         </p:txBody>
@@ -1661,128 +1603,97 @@
           <a:lstStyle/>
           <a:p>
             <a:r>
-              <a:t>I wrote 18 answers to a known quality — deliberately weak, deliberately average,</a:t>
-            </a:r>
-          </a:p>
-          <a:p>
-            <a:r>
-              <a:t>deliberately excellent — and ran five experiments. Here is what came back.</a:t>
+              <a:t>I wrote 18 answers to a known quality — deliberately weak, average and excellent</a:t>
+            </a:r>
+          </a:p>
+          <a:p>
+            <a:r>
+              <a:t>— and ran five experiments.</a:t>
             </a:r>
           </a:p>
           <a:p/>
           <a:p>
             <a:r>
-              <a:t>The good news first. It almost never puts a worse answer above a better one. The</a:t>
-            </a:r>
-          </a:p>
-          <a:p>
-            <a:r>
-              <a:t>agreement score is 0.92 out of 1. As a way of ranking candidates against each</a:t>
-            </a:r>
-          </a:p>
-          <a:p>
-            <a:r>
-              <a:t>other, it works.</a:t>
+              <a:t>The good news. It almost never puts a worse answer above a better one: 0.92 out</a:t>
+            </a:r>
+          </a:p>
+          <a:p>
+            <a:r>
+              <a:t>of 1. As a way of ranking candidates against each other, it works.</a:t>
             </a:r>
           </a:p>
           <a:p/>
           <a:p>
             <a:r>
-              <a:t>Now the first fault. Look at the averages. Deliberately weak answers get 53.</a:t>
-            </a:r>
-          </a:p>
-          <a:p>
-            <a:r>
-              <a:t>Deliberately average answers get 92.8. Excellent answers get 98.2. And the system</a:t>
-            </a:r>
-          </a:p>
-          <a:p>
-            <a:r>
-              <a:t>calls anything 70 or above a strong answer.</a:t>
+              <a:t>The first fault. Weak answers average 53. Deliberately average answers average</a:t>
+            </a:r>
+          </a:p>
+          <a:p>
+            <a:r>
+              <a:t>92.8. Excellent ones 98.2. And the system calls anything 70 or above strong. So</a:t>
+            </a:r>
+          </a:p>
+          <a:p>
+            <a:r>
+              <a:t>average and excellent get the same verdict. These marks are usable for comparing</a:t>
+            </a:r>
+          </a:p>
+          <a:p>
+            <a:r>
+              <a:t>two candidates; they are not usable for deciding whether one candidate is good</a:t>
+            </a:r>
+          </a:p>
+          <a:p>
+            <a:r>
+              <a:t>enough on their own. My report says exactly that.</a:t>
             </a:r>
           </a:p>
           <a:p/>
           <a:p>
             <a:r>
-              <a:t>So average and excellent get exactly the same verdict. The marks are useful for</a:t>
-            </a:r>
-          </a:p>
-          <a:p>
-            <a:r>
-              <a:t>comparing two candidates. They are not useful for deciding whether one candidate</a:t>
-            </a:r>
-          </a:p>
-          <a:p>
-            <a:r>
-              <a:t>is good enough on their own. My report says exactly that, and proposes setting</a:t>
-            </a:r>
-          </a:p>
-          <a:p>
-            <a:r>
-              <a:t>the thresholds from the scores actually observed instead of assuming the full</a:t>
-            </a:r>
-          </a:p>
-          <a:p>
-            <a:r>
-              <a:t>range gets used.</a:t>
+              <a:t>The second fault. I ask for four separate criteria. They move together at 0.85.</a:t>
+            </a:r>
+          </a:p>
+          <a:p>
+            <a:r>
+              <a:t>It forms one overall impression and spreads it across all four. Telling the model</a:t>
+            </a:r>
+          </a:p>
+          <a:p>
+            <a:r>
+              <a:t>not to do that did not stop it — and it weakens a claim I made in my own design</a:t>
+            </a:r>
+          </a:p>
+          <a:p>
+            <a:r>
+              <a:t>chapter, that the breakdown explains which part of an answer fell short.</a:t>
             </a:r>
           </a:p>
           <a:p/>
           <a:p>
             <a:r>
-              <a:t>The second fault. I ask it to mark four things separately — accuracy,</a:t>
-            </a:r>
-          </a:p>
-          <a:p>
-            <a:r>
-              <a:t>completeness, clarity, relevance. They move together at 0.85 out of 1. It forms</a:t>
-            </a:r>
-          </a:p>
-          <a:p>
-            <a:r>
-              <a:t>one overall impression and spreads it across all four. That is a well-known</a:t>
-            </a:r>
-          </a:p>
-          <a:p>
-            <a:r>
-              <a:t>effect in human marking too, and telling the model not to do it did not stop it.</a:t>
-            </a:r>
-          </a:p>
-          <a:p>
-            <a:r>
-              <a:t>This matters because I had defended that four-part breakdown as an explanation</a:t>
-            </a:r>
-          </a:p>
-          <a:p>
-            <a:r>
-              <a:t>for the candidate. It explains less than I claimed.</a:t>
+              <a:t>And an honest non-result: the safety net never fired, because the two marks were</a:t>
+            </a:r>
+          </a:p>
+          <a:p>
+            <a:r>
+              <a:t>only 2.2 points apart on average. I report that as a null result rather than</a:t>
+            </a:r>
+          </a:p>
+          <a:p>
+            <a:r>
+              <a:t>dressing it up.</a:t>
             </a:r>
           </a:p>
           <a:p/>
           <a:p>
             <a:r>
-              <a:t>And one honest non-result: the safety net for unreliable marks never actually</a:t>
-            </a:r>
-          </a:p>
-          <a:p>
-            <a:r>
-              <a:t>triggered, because the two marks were only 2.2 points apart on average. I report</a:t>
-            </a:r>
-          </a:p>
-          <a:p>
-            <a:r>
-              <a:t>that as a null result rather than dressing it up.</a:t>
-            </a:r>
-          </a:p>
-          <a:p/>
-          <a:p>
-            <a:r>
-              <a:t>The thing I would emphasise: both of these are faults in my own system, found by</a:t>
-            </a:r>
-          </a:p>
-          <a:p>
-            <a:r>
-              <a:t>my own testing. That is the whole argument for building it this way.</a:t>
+              <a:t>The impact line is the one to land. Both faults are in my own system and my own</a:t>
+            </a:r>
+          </a:p>
+          <a:p>
+            <a:r>
+              <a:t>testing found them. That is the entire argument for building it this way.</a:t>
             </a:r>
           </a:p>
         </p:txBody>
@@ -1852,113 +1763,97 @@
           <a:lstStyle/>
           <a:p>
             <a:r>
-              <a:t>Where I departed from my proposal, and I want to be direct about it.</a:t>
+              <a:t>Where I departed from my proposal.</a:t>
             </a:r>
           </a:p>
           <a:p/>
           <a:p>
             <a:r>
-              <a:t>My proposal's headline idea was a second marker: a trained model to check the AI</a:t>
-            </a:r>
-          </a:p>
-          <a:p>
-            <a:r>
-              <a:t>judge. I built it. Then I measured it, and removed it.</a:t>
+              <a:t>My proposal's headline idea was a second marker — a trained model to check the AI</a:t>
+            </a:r>
+          </a:p>
+          <a:p>
+            <a:r>
+              <a:t>judge. I built it, measured it, and removed it. Its training answers came from</a:t>
+            </a:r>
+          </a:p>
+          <a:p>
+            <a:r>
+              <a:t>the same AI it was meant to check, so the two agreeing tells you nothing. A test</a:t>
+            </a:r>
+          </a:p>
+          <a:p>
+            <a:r>
+              <a:t>showed it was really keying on answer length. And a second unchecked marker gives</a:t>
+            </a:r>
+          </a:p>
+          <a:p>
+            <a:r>
+              <a:t>the appearance of safety, not safety.</a:t>
             </a:r>
           </a:p>
           <a:p/>
           <a:p>
             <a:r>
-              <a:t>Three reasons. Its training answers came from the same AI it was supposed to be</a:t>
-            </a:r>
-          </a:p>
-          <a:p>
-            <a:r>
-              <a:t>checking, so the two agreeing tells you nothing about the world. A test showed it</a:t>
-            </a:r>
-          </a:p>
-          <a:p>
-            <a:r>
-              <a:t>was really keying on how long an answer was, not how good it was. And adding a</a:t>
-            </a:r>
-          </a:p>
-          <a:p>
-            <a:r>
-              <a:t>second unchecked marker gives the appearance of safety, not safety.</a:t>
+              <a:t>Removing it late felt like going backwards — it was the part that most looked</a:t>
+            </a:r>
+          </a:p>
+          <a:p>
+            <a:r>
+              <a:t>like machine learning research. What changed my mind was realising I could not</a:t>
+            </a:r>
+          </a:p>
+          <a:p>
+            <a:r>
+              <a:t>answer the obvious question: why does that agreement mean anything? Writing it up</a:t>
+            </a:r>
+          </a:p>
+          <a:p>
+            <a:r>
+              <a:t>as a finding turned the weakest part of the project into one I can defend.</a:t>
             </a:r>
           </a:p>
           <a:p/>
           <a:p>
             <a:r>
-              <a:t>Removing it late felt like going backwards — it was the part that most looked</a:t>
-            </a:r>
-          </a:p>
-          <a:p>
-            <a:r>
-              <a:t>like machine learning research. What changed my mind was realising I could not</a:t>
-            </a:r>
-          </a:p>
-          <a:p>
-            <a:r>
-              <a:t>answer the obvious question: why does that agreement mean anything? Writing it up</a:t>
-            </a:r>
-          </a:p>
-          <a:p>
-            <a:r>
-              <a:t>as a finding turned the weakest part of the project into one I can defend.</a:t>
+              <a:t>I also replaced a planned emotion detector with a measure of how someone speaks.</a:t>
+            </a:r>
+          </a:p>
+          <a:p>
+            <a:r>
+              <a:t>Every part of that can be inspected; an emotion label from a black box cannot.</a:t>
             </a:r>
           </a:p>
           <a:p/>
           <a:p>
             <a:r>
-              <a:t>I also replaced a planned emotion detector with a simpler measure of how someone</a:t>
-            </a:r>
-          </a:p>
-          <a:p>
-            <a:r>
-              <a:t>speaks — loudness, steadiness, pauses. Every part of that can be inspected. An</a:t>
-            </a:r>
-          </a:p>
-          <a:p>
-            <a:r>
-              <a:t>emotion label from a black box cannot. In a project about explaining itself, that</a:t>
-            </a:r>
-          </a:p>
-          <a:p>
-            <a:r>
-              <a:t>swap makes it more consistent, not less.</a:t>
+              <a:t>What I cannot claim. Eighteen answers is a small test set, and they were written</a:t>
+            </a:r>
+          </a:p>
+          <a:p>
+            <a:r>
+              <a:t>rather than spoken. No human markers to compare against. No bias testing across</a:t>
+            </a:r>
+          </a:p>
+          <a:p>
+            <a:r>
+              <a:t>groups, because that needs exactly the personal data I chose not to collect. And</a:t>
+            </a:r>
+          </a:p>
+          <a:p>
+            <a:r>
+              <a:t>it runs one interview at a time.</a:t>
             </a:r>
           </a:p>
           <a:p/>
           <a:p>
             <a:r>
-              <a:t>Now what I cannot claim. Eighteen answers is a small test set. They were written,</a:t>
-            </a:r>
-          </a:p>
-          <a:p>
-            <a:r>
-              <a:t>not spoken by real people. I have no human markers to compare against. I have not</a:t>
-            </a:r>
-          </a:p>
-          <a:p>
-            <a:r>
-              <a:t>tested for bias across different groups of people, because that needs exactly the</a:t>
-            </a:r>
-          </a:p>
-          <a:p>
-            <a:r>
-              <a:t>personal data I chose not to collect. And it runs one interview at a time.</a:t>
-            </a:r>
-          </a:p>
-          <a:p/>
-          <a:p>
-            <a:r>
-              <a:t>Measured against the EU AI Act: explaining itself and keeping a human in charge,</a:t>
-            </a:r>
-          </a:p>
-          <a:p>
-            <a:r>
-              <a:t>it does well. Record keeping and bias testing, it does not.</a:t>
+              <a:t>Against the EU AI Act: explaining itself and keeping a human in charge, it does</a:t>
+            </a:r>
+          </a:p>
+          <a:p>
+            <a:r>
+              <a:t>well. Record keeping and bias testing, it does not.</a:t>
             </a:r>
           </a:p>
         </p:txBody>
@@ -5497,7 +5392,7 @@
                 </a:solidFill>
                 <a:latin typeface="Calibri"/>
               </a:rPr>
-              <a:t>A working platform  that aims its questions using a published skills standard, interviews by voice or typing, and shows its working.</a:t>
+              <a:t>A working platform  that aims its questions using a published skills standard, interviews by speaking or typing, and shows its working.</a:t>
             </a:r>
           </a:p>
         </p:txBody>
@@ -6078,7 +5973,7 @@
         </p:nvSpPr>
         <p:spPr>
           <a:xfrm>
-            <a:off x="658368" y="2240280"/>
+            <a:off x="658368" y="2295144"/>
             <a:ext cx="182880" cy="54864"/>
           </a:xfrm>
           <a:prstGeom prst="rect">
@@ -6122,7 +6017,7 @@
         </p:nvSpPr>
         <p:spPr>
           <a:xfrm>
-            <a:off x="1042416" y="2084832"/>
+            <a:off x="1042416" y="2139696"/>
             <a:ext cx="10417759" cy="868680"/>
           </a:xfrm>
           <a:prstGeom prst="rect">
@@ -6148,7 +6043,7 @@
                 </a:solidFill>
                 <a:latin typeface="Calibri"/>
               </a:rPr>
-              <a:t>It has caused real trouble.  In 2019 a privacy group formally complained about HireVue scoring candidates from their faces. The feature was dropped in 2021. The deeper problem stayed.</a:t>
+              <a:t>It has caused real trouble.  In 2019 a privacy group complained about HireVue scoring candidates from their faces. The feature went in 2021. The problem stayed.</a:t>
             </a:r>
           </a:p>
         </p:txBody>
@@ -6161,7 +6056,7 @@
         </p:nvSpPr>
         <p:spPr>
           <a:xfrm>
-            <a:off x="658368" y="3264408"/>
+            <a:off x="658368" y="3346704"/>
             <a:ext cx="182880" cy="54864"/>
           </a:xfrm>
           <a:prstGeom prst="rect">
@@ -6205,7 +6100,7 @@
         </p:nvSpPr>
         <p:spPr>
           <a:xfrm>
-            <a:off x="1042416" y="3108960"/>
+            <a:off x="1042416" y="3191256"/>
             <a:ext cx="10417759" cy="868680"/>
           </a:xfrm>
           <a:prstGeom prst="rect">
@@ -6231,7 +6126,7 @@
                 </a:solidFill>
                 <a:latin typeface="Calibri"/>
               </a:rPr>
-              <a:t>It costs companies money.  Candidates who think a process was unfair are less likely to accept the job — which cancels out the time the company saved.</a:t>
+              <a:t>It costs companies money.  Candidates who think a process was unfair are less likely to accept the job — cancelling out the time saved.</a:t>
             </a:r>
           </a:p>
         </p:txBody>
@@ -6244,7 +6139,7 @@
         </p:nvSpPr>
         <p:spPr>
           <a:xfrm>
-            <a:off x="658368" y="4288536"/>
+            <a:off x="658368" y="4398264"/>
             <a:ext cx="182880" cy="54864"/>
           </a:xfrm>
           <a:prstGeom prst="rect">
@@ -6288,7 +6183,7 @@
         </p:nvSpPr>
         <p:spPr>
           <a:xfrm>
-            <a:off x="1042416" y="4133088"/>
+            <a:off x="1042416" y="4242816"/>
             <a:ext cx="10417759" cy="868680"/>
           </a:xfrm>
           <a:prstGeom prst="rect">
@@ -6314,7 +6209,7 @@
                 </a:solidFill>
                 <a:latin typeface="Calibri"/>
               </a:rPr>
-              <a:t>The law has caught up.  The EU AI Act now treats hiring software as high risk. It does not ask for a perfect model. It asks that problems be tested for, written down, and checked by a person.</a:t>
+              <a:t>The law has caught up.  The EU AI Act treats hiring software as high risk. It asks that problems be tested for, written down, and checked by a person.</a:t>
             </a:r>
           </a:p>
         </p:txBody>
@@ -6327,7 +6222,7 @@
         </p:nvSpPr>
         <p:spPr>
           <a:xfrm>
-            <a:off x="658368" y="5029200"/>
+            <a:off x="658368" y="5074920"/>
             <a:ext cx="10874959" cy="1097280"/>
           </a:xfrm>
           <a:prstGeom prst="roundRect">
@@ -6373,7 +6268,7 @@
         </p:nvSpPr>
         <p:spPr>
           <a:xfrm>
-            <a:off x="1069848" y="5248656"/>
+            <a:off x="1069848" y="5303520"/>
             <a:ext cx="10051999" cy="777240"/>
           </a:xfrm>
           <a:prstGeom prst="rect">
@@ -6399,7 +6294,7 @@
                 </a:solidFill>
                 <a:latin typeface="Calibri"/>
               </a:rPr>
-              <a:t>So my question is not “can AI mark an interview answer?” It clearly can.</a:t>
+              <a:t>The question is not “can AI mark an interview answer?” It clearly can.</a:t>
             </a:r>
           </a:p>
           <a:p>
@@ -6468,11 +6363,11 @@
             <a:r>
               <a:rPr sz="1200" b="1" i="0" spc="150">
                 <a:solidFill>
-                  <a:srgbClr val="1E6B4F"/>
-                </a:solidFill>
-                <a:latin typeface="Calibri"/>
-              </a:rPr>
-              <a:t>PROJECT SCOPE</a:t>
+                  <a:srgbClr val="1F4E79"/>
+                </a:solidFill>
+                <a:latin typeface="Calibri"/>
+              </a:rPr>
+              <a:t>THE SOLUTION</a:t>
             </a:r>
           </a:p>
         </p:txBody>
@@ -6511,7 +6406,7 @@
                 </a:solidFill>
                 <a:latin typeface="Calibri"/>
               </a:rPr>
-              <a:t>What it does, and what it deliberately does not do</a:t>
+              <a:t>How it works, start to finish</a:t>
             </a:r>
           </a:p>
         </p:txBody>
@@ -6531,7 +6426,7 @@
             <a:avLst/>
           </a:prstGeom>
           <a:solidFill>
-            <a:srgbClr val="1E6B4F"/>
+            <a:srgbClr val="1F4E79"/>
           </a:solidFill>
           <a:ln>
             <a:noFill/>
@@ -6599,16 +6494,40 @@
           </a:p>
         </p:txBody>
       </p:sp>
-      <p:sp>
-        <p:nvSpPr>
-          <p:cNvPr id="6" name="TextBox 5"/>
-          <p:cNvSpPr txBox="1"/>
-          <p:nvPr/>
-        </p:nvSpPr>
-        <p:spPr>
-          <a:xfrm>
-            <a:off x="658368" y="2011680"/>
-            <a:ext cx="5303520" cy="365760"/>
+      <p:pic>
+        <p:nvPicPr>
+          <p:cNvPr id="6" name="Picture 5" descr="fig01_architecture.png"/>
+          <p:cNvPicPr>
+            <a:picLocks noChangeAspect="1"/>
+          </p:cNvPicPr>
+          <p:nvPr/>
+        </p:nvPicPr>
+        <p:blipFill>
+          <a:blip r:embed="rId3"/>
+          <a:stretch>
+            <a:fillRect/>
+          </a:stretch>
+        </p:blipFill>
+        <p:spPr>
+          <a:xfrm>
+            <a:off x="4097856" y="2011680"/>
+            <a:ext cx="3995983" cy="3657600"/>
+          </a:xfrm>
+          <a:prstGeom prst="rect">
+            <a:avLst/>
+          </a:prstGeom>
+        </p:spPr>
+      </p:pic>
+      <p:sp>
+        <p:nvSpPr>
+          <p:cNvPr id="7" name="TextBox 6"/>
+          <p:cNvSpPr txBox="1"/>
+          <p:nvPr/>
+        </p:nvSpPr>
+        <p:spPr>
+          <a:xfrm>
+            <a:off x="658368" y="5468112"/>
+            <a:ext cx="1554480" cy="274320"/>
           </a:xfrm>
           <a:prstGeom prst="rect">
             <a:avLst/>
@@ -6627,27 +6546,144 @@
               </a:lnSpc>
             </a:pPr>
             <a:r>
-              <a:rPr sz="1900" b="1" i="0">
+              <a:rPr sz="1400" b="1" i="0">
+                <a:solidFill>
+                  <a:srgbClr val="1F4E79"/>
+                </a:solidFill>
+                <a:latin typeface="Calibri"/>
+              </a:rPr>
+              <a:t>1. Prepare  </a:t>
+            </a:r>
+          </a:p>
+        </p:txBody>
+      </p:sp>
+      <p:sp>
+        <p:nvSpPr>
+          <p:cNvPr id="8" name="TextBox 7"/>
+          <p:cNvSpPr txBox="1"/>
+          <p:nvPr/>
+        </p:nvSpPr>
+        <p:spPr>
+          <a:xfrm>
+            <a:off x="658368" y="5742432"/>
+            <a:ext cx="2490139" cy="731520"/>
+          </a:xfrm>
+          <a:prstGeom prst="rect">
+            <a:avLst/>
+          </a:prstGeom>
+          <a:noFill/>
+        </p:spPr>
+        <p:txBody>
+          <a:bodyPr wrap="square" lIns="0" rIns="0" tIns="0" bIns="0">
+            <a:spAutoFit/>
+          </a:bodyPr>
+          <a:lstStyle/>
+          <a:p>
+            <a:pPr algn="l">
+              <a:lnSpc>
+                <a:spcPct val="122000"/>
+              </a:lnSpc>
+            </a:pPr>
+            <a:r>
+              <a:rPr sz="1200" b="0" i="0">
+                <a:solidFill>
+                  <a:srgbClr val="5A6B7B"/>
+                </a:solidFill>
+                <a:latin typeface="Calibri"/>
+              </a:rPr>
+              <a:t>read both documents, find the missing skills, write the questions</a:t>
+            </a:r>
+          </a:p>
+        </p:txBody>
+      </p:sp>
+      <p:sp>
+        <p:nvSpPr>
+          <p:cNvPr id="9" name="TextBox 8"/>
+          <p:cNvSpPr txBox="1"/>
+          <p:nvPr/>
+        </p:nvSpPr>
+        <p:spPr>
+          <a:xfrm>
+            <a:off x="3377107" y="5468112"/>
+            <a:ext cx="1554480" cy="274320"/>
+          </a:xfrm>
+          <a:prstGeom prst="rect">
+            <a:avLst/>
+          </a:prstGeom>
+          <a:noFill/>
+        </p:spPr>
+        <p:txBody>
+          <a:bodyPr wrap="square" lIns="0" rIns="0" tIns="0" bIns="0">
+            <a:spAutoFit/>
+          </a:bodyPr>
+          <a:lstStyle/>
+          <a:p>
+            <a:pPr algn="l">
+              <a:lnSpc>
+                <a:spcPct val="125000"/>
+              </a:lnSpc>
+            </a:pPr>
+            <a:r>
+              <a:rPr sz="1400" b="1" i="0">
                 <a:solidFill>
                   <a:srgbClr val="1E6B4F"/>
                 </a:solidFill>
                 <a:latin typeface="Calibri"/>
               </a:rPr>
-              <a:t>What it does</a:t>
-            </a:r>
-          </a:p>
-        </p:txBody>
-      </p:sp>
-      <p:sp>
-        <p:nvSpPr>
-          <p:cNvPr id="7" name="TextBox 6"/>
-          <p:cNvSpPr txBox="1"/>
-          <p:nvPr/>
-        </p:nvSpPr>
-        <p:spPr>
-          <a:xfrm>
-            <a:off x="6601968" y="2011680"/>
-            <a:ext cx="5303520" cy="365760"/>
+              <a:t>2. Interview  </a:t>
+            </a:r>
+          </a:p>
+        </p:txBody>
+      </p:sp>
+      <p:sp>
+        <p:nvSpPr>
+          <p:cNvPr id="10" name="TextBox 9"/>
+          <p:cNvSpPr txBox="1"/>
+          <p:nvPr/>
+        </p:nvSpPr>
+        <p:spPr>
+          <a:xfrm>
+            <a:off x="3377107" y="5742432"/>
+            <a:ext cx="2490139" cy="731520"/>
+          </a:xfrm>
+          <a:prstGeom prst="rect">
+            <a:avLst/>
+          </a:prstGeom>
+          <a:noFill/>
+        </p:spPr>
+        <p:txBody>
+          <a:bodyPr wrap="square" lIns="0" rIns="0" tIns="0" bIns="0">
+            <a:spAutoFit/>
+          </a:bodyPr>
+          <a:lstStyle/>
+          <a:p>
+            <a:pPr algn="l">
+              <a:lnSpc>
+                <a:spcPct val="122000"/>
+              </a:lnSpc>
+            </a:pPr>
+            <a:r>
+              <a:rPr sz="1200" b="0" i="0">
+                <a:solidFill>
+                  <a:srgbClr val="5A6B7B"/>
+                </a:solidFill>
+                <a:latin typeface="Calibri"/>
+              </a:rPr>
+              <a:t>by speaking or typing — both give the same transcript</a:t>
+            </a:r>
+          </a:p>
+        </p:txBody>
+      </p:sp>
+      <p:sp>
+        <p:nvSpPr>
+          <p:cNvPr id="11" name="TextBox 10"/>
+          <p:cNvSpPr txBox="1"/>
+          <p:nvPr/>
+        </p:nvSpPr>
+        <p:spPr>
+          <a:xfrm>
+            <a:off x="6095847" y="5468112"/>
+            <a:ext cx="1554480" cy="274320"/>
           </a:xfrm>
           <a:prstGeom prst="rect">
             <a:avLst/>
@@ -6666,71 +6702,66 @@
               </a:lnSpc>
             </a:pPr>
             <a:r>
-              <a:rPr sz="1900" b="1" i="0">
+              <a:rPr sz="1400" b="1" i="0">
                 <a:solidFill>
                   <a:srgbClr val="9A4415"/>
                 </a:solidFill>
                 <a:latin typeface="Calibri"/>
               </a:rPr>
-              <a:t>What it deliberately does not do</a:t>
-            </a:r>
-          </a:p>
-        </p:txBody>
-      </p:sp>
-      <p:sp>
-        <p:nvSpPr>
-          <p:cNvPr id="8" name="Rectangle 7"/>
-          <p:cNvSpPr/>
-          <p:nvPr/>
-        </p:nvSpPr>
-        <p:spPr>
-          <a:xfrm>
-            <a:off x="658368" y="2660904"/>
-            <a:ext cx="146304" cy="50292"/>
-          </a:xfrm>
-          <a:prstGeom prst="rect">
-            <a:avLst/>
-          </a:prstGeom>
-          <a:solidFill>
-            <a:srgbClr val="1E6B4F"/>
-          </a:solidFill>
-          <a:ln>
-            <a:noFill/>
-          </a:ln>
-          <a:effectLst/>
-        </p:spPr>
-        <p:style>
-          <a:lnRef idx="1">
-            <a:schemeClr val="accent1"/>
-          </a:lnRef>
-          <a:fillRef idx="3">
-            <a:schemeClr val="accent1"/>
-          </a:fillRef>
-          <a:effectRef idx="2">
-            <a:schemeClr val="accent1"/>
-          </a:effectRef>
-          <a:fontRef idx="minor">
-            <a:schemeClr val="lt1"/>
-          </a:fontRef>
-        </p:style>
-        <p:txBody>
-          <a:bodyPr rtlCol="0" anchor="ctr"/>
-          <a:lstStyle/>
-          <a:p>
-            <a:pPr algn="ctr"/>
-          </a:p>
-        </p:txBody>
-      </p:sp>
-      <p:sp>
-        <p:nvSpPr>
-          <p:cNvPr id="9" name="TextBox 8"/>
-          <p:cNvSpPr txBox="1"/>
-          <p:nvPr/>
-        </p:nvSpPr>
-        <p:spPr>
-          <a:xfrm>
-            <a:off x="969264" y="2542032"/>
-            <a:ext cx="5029200" cy="457200"/>
+              <a:t>3. Mark  </a:t>
+            </a:r>
+          </a:p>
+        </p:txBody>
+      </p:sp>
+      <p:sp>
+        <p:nvSpPr>
+          <p:cNvPr id="12" name="TextBox 11"/>
+          <p:cNvSpPr txBox="1"/>
+          <p:nvPr/>
+        </p:nvSpPr>
+        <p:spPr>
+          <a:xfrm>
+            <a:off x="6095847" y="5742432"/>
+            <a:ext cx="2490139" cy="731520"/>
+          </a:xfrm>
+          <a:prstGeom prst="rect">
+            <a:avLst/>
+          </a:prstGeom>
+          <a:noFill/>
+        </p:spPr>
+        <p:txBody>
+          <a:bodyPr wrap="square" lIns="0" rIns="0" tIns="0" bIns="0">
+            <a:spAutoFit/>
+          </a:bodyPr>
+          <a:lstStyle/>
+          <a:p>
+            <a:pPr algn="l">
+              <a:lnSpc>
+                <a:spcPct val="122000"/>
+              </a:lnSpc>
+            </a:pPr>
+            <a:r>
+              <a:rPr sz="1200" b="0" i="0">
+                <a:solidFill>
+                  <a:srgbClr val="5A6B7B"/>
+                </a:solidFill>
+                <a:latin typeface="Calibri"/>
+              </a:rPr>
+              <a:t>score every answer twice, check the session looked normal</a:t>
+            </a:r>
+          </a:p>
+        </p:txBody>
+      </p:sp>
+      <p:sp>
+        <p:nvSpPr>
+          <p:cNvPr id="13" name="TextBox 12"/>
+          <p:cNvSpPr txBox="1"/>
+          <p:nvPr/>
+        </p:nvSpPr>
+        <p:spPr>
+          <a:xfrm>
+            <a:off x="8814587" y="5468112"/>
+            <a:ext cx="1554480" cy="274320"/>
           </a:xfrm>
           <a:prstGeom prst="rect">
             <a:avLst/>
@@ -6749,845 +6780,91 @@
               </a:lnSpc>
             </a:pPr>
             <a:r>
-              <a:rPr sz="1700" b="0" i="0">
+              <a:rPr sz="1400" b="1" i="0">
+                <a:solidFill>
+                  <a:srgbClr val="4C3A8C"/>
+                </a:solidFill>
+                <a:latin typeface="Calibri"/>
+              </a:rPr>
+              <a:t>4. Report  </a:t>
+            </a:r>
+          </a:p>
+        </p:txBody>
+      </p:sp>
+      <p:sp>
+        <p:nvSpPr>
+          <p:cNvPr id="14" name="TextBox 13"/>
+          <p:cNvSpPr txBox="1"/>
+          <p:nvPr/>
+        </p:nvSpPr>
+        <p:spPr>
+          <a:xfrm>
+            <a:off x="8814587" y="5742432"/>
+            <a:ext cx="2490139" cy="731520"/>
+          </a:xfrm>
+          <a:prstGeom prst="rect">
+            <a:avLst/>
+          </a:prstGeom>
+          <a:noFill/>
+        </p:spPr>
+        <p:txBody>
+          <a:bodyPr wrap="square" lIns="0" rIns="0" tIns="0" bIns="0">
+            <a:spAutoFit/>
+          </a:bodyPr>
+          <a:lstStyle/>
+          <a:p>
+            <a:pPr algn="l">
+              <a:lnSpc>
+                <a:spcPct val="122000"/>
+              </a:lnSpc>
+            </a:pPr>
+            <a:r>
+              <a:rPr sz="1200" b="0" i="0">
+                <a:solidFill>
+                  <a:srgbClr val="5A6B7B"/>
+                </a:solidFill>
+                <a:latin typeface="Calibri"/>
+              </a:rPr>
+              <a:t>combine into a recommendation, and show the working</a:t>
+            </a:r>
+          </a:p>
+        </p:txBody>
+      </p:sp>
+      <p:sp>
+        <p:nvSpPr>
+          <p:cNvPr id="15" name="TextBox 14"/>
+          <p:cNvSpPr txBox="1"/>
+          <p:nvPr/>
+        </p:nvSpPr>
+        <p:spPr>
+          <a:xfrm>
+            <a:off x="658368" y="6382512"/>
+            <a:ext cx="10874959" cy="310896"/>
+          </a:xfrm>
+          <a:prstGeom prst="rect">
+            <a:avLst/>
+          </a:prstGeom>
+          <a:noFill/>
+        </p:spPr>
+        <p:txBody>
+          <a:bodyPr wrap="square" lIns="0" rIns="0" tIns="0" bIns="0">
+            <a:spAutoFit/>
+          </a:bodyPr>
+          <a:lstStyle/>
+          <a:p>
+            <a:pPr algn="l">
+              <a:lnSpc>
+                <a:spcPct val="125000"/>
+              </a:lnSpc>
+            </a:pPr>
+            <a:r>
+              <a:rPr sz="1500" b="1" i="0">
                 <a:solidFill>
                   <a:srgbClr val="1B2733"/>
                 </a:solidFill>
                 <a:latin typeface="Calibri"/>
               </a:rPr>
-              <a:t>Reads a CV and a job advert</a:t>
-            </a:r>
-          </a:p>
-        </p:txBody>
-      </p:sp>
-      <p:sp>
-        <p:nvSpPr>
-          <p:cNvPr id="10" name="Rectangle 9"/>
-          <p:cNvSpPr/>
-          <p:nvPr/>
-        </p:nvSpPr>
-        <p:spPr>
-          <a:xfrm>
-            <a:off x="658368" y="3227832"/>
-            <a:ext cx="146304" cy="50292"/>
-          </a:xfrm>
-          <a:prstGeom prst="rect">
-            <a:avLst/>
-          </a:prstGeom>
-          <a:solidFill>
-            <a:srgbClr val="1E6B4F"/>
-          </a:solidFill>
-          <a:ln>
-            <a:noFill/>
-          </a:ln>
-          <a:effectLst/>
-        </p:spPr>
-        <p:style>
-          <a:lnRef idx="1">
-            <a:schemeClr val="accent1"/>
-          </a:lnRef>
-          <a:fillRef idx="3">
-            <a:schemeClr val="accent1"/>
-          </a:fillRef>
-          <a:effectRef idx="2">
-            <a:schemeClr val="accent1"/>
-          </a:effectRef>
-          <a:fontRef idx="minor">
-            <a:schemeClr val="lt1"/>
-          </a:fontRef>
-        </p:style>
-        <p:txBody>
-          <a:bodyPr rtlCol="0" anchor="ctr"/>
-          <a:lstStyle/>
-          <a:p>
-            <a:pPr algn="ctr"/>
-          </a:p>
-        </p:txBody>
-      </p:sp>
-      <p:sp>
-        <p:nvSpPr>
-          <p:cNvPr id="11" name="TextBox 10"/>
-          <p:cNvSpPr txBox="1"/>
-          <p:nvPr/>
-        </p:nvSpPr>
-        <p:spPr>
-          <a:xfrm>
-            <a:off x="969264" y="3108960"/>
-            <a:ext cx="5029200" cy="457200"/>
-          </a:xfrm>
-          <a:prstGeom prst="rect">
-            <a:avLst/>
-          </a:prstGeom>
-          <a:noFill/>
-        </p:spPr>
-        <p:txBody>
-          <a:bodyPr wrap="square" lIns="0" rIns="0" tIns="0" bIns="0">
-            <a:spAutoFit/>
-          </a:bodyPr>
-          <a:lstStyle/>
-          <a:p>
-            <a:pPr algn="l">
-              <a:lnSpc>
-                <a:spcPct val="125000"/>
-              </a:lnSpc>
-            </a:pPr>
-            <a:r>
-              <a:rPr sz="1700" b="0" i="0">
-                <a:solidFill>
-                  <a:srgbClr val="1B2733"/>
-                </a:solidFill>
-                <a:latin typeface="Calibri"/>
-              </a:rPr>
-              <a:t>Works out which required skills are missing</a:t>
-            </a:r>
-          </a:p>
-        </p:txBody>
-      </p:sp>
-      <p:sp>
-        <p:nvSpPr>
-          <p:cNvPr id="12" name="Rectangle 11"/>
-          <p:cNvSpPr/>
-          <p:nvPr/>
-        </p:nvSpPr>
-        <p:spPr>
-          <a:xfrm>
-            <a:off x="658368" y="3794760"/>
-            <a:ext cx="146304" cy="50292"/>
-          </a:xfrm>
-          <a:prstGeom prst="rect">
-            <a:avLst/>
-          </a:prstGeom>
-          <a:solidFill>
-            <a:srgbClr val="1E6B4F"/>
-          </a:solidFill>
-          <a:ln>
-            <a:noFill/>
-          </a:ln>
-          <a:effectLst/>
-        </p:spPr>
-        <p:style>
-          <a:lnRef idx="1">
-            <a:schemeClr val="accent1"/>
-          </a:lnRef>
-          <a:fillRef idx="3">
-            <a:schemeClr val="accent1"/>
-          </a:fillRef>
-          <a:effectRef idx="2">
-            <a:schemeClr val="accent1"/>
-          </a:effectRef>
-          <a:fontRef idx="minor">
-            <a:schemeClr val="lt1"/>
-          </a:fontRef>
-        </p:style>
-        <p:txBody>
-          <a:bodyPr rtlCol="0" anchor="ctr"/>
-          <a:lstStyle/>
-          <a:p>
-            <a:pPr algn="ctr"/>
-          </a:p>
-        </p:txBody>
-      </p:sp>
-      <p:sp>
-        <p:nvSpPr>
-          <p:cNvPr id="13" name="TextBox 12"/>
-          <p:cNvSpPr txBox="1"/>
-          <p:nvPr/>
-        </p:nvSpPr>
-        <p:spPr>
-          <a:xfrm>
-            <a:off x="969264" y="3675888"/>
-            <a:ext cx="5029200" cy="457200"/>
-          </a:xfrm>
-          <a:prstGeom prst="rect">
-            <a:avLst/>
-          </a:prstGeom>
-          <a:noFill/>
-        </p:spPr>
-        <p:txBody>
-          <a:bodyPr wrap="square" lIns="0" rIns="0" tIns="0" bIns="0">
-            <a:spAutoFit/>
-          </a:bodyPr>
-          <a:lstStyle/>
-          <a:p>
-            <a:pPr algn="l">
-              <a:lnSpc>
-                <a:spcPct val="125000"/>
-              </a:lnSpc>
-            </a:pPr>
-            <a:r>
-              <a:rPr sz="1700" b="0" i="0">
-                <a:solidFill>
-                  <a:srgbClr val="1B2733"/>
-                </a:solidFill>
-                <a:latin typeface="Calibri"/>
-              </a:rPr>
-              <a:t>Writes the interview — missing skills asked first</a:t>
-            </a:r>
-          </a:p>
-        </p:txBody>
-      </p:sp>
-      <p:sp>
-        <p:nvSpPr>
-          <p:cNvPr id="14" name="Rectangle 13"/>
-          <p:cNvSpPr/>
-          <p:nvPr/>
-        </p:nvSpPr>
-        <p:spPr>
-          <a:xfrm>
-            <a:off x="658368" y="4361688"/>
-            <a:ext cx="146304" cy="50292"/>
-          </a:xfrm>
-          <a:prstGeom prst="rect">
-            <a:avLst/>
-          </a:prstGeom>
-          <a:solidFill>
-            <a:srgbClr val="1E6B4F"/>
-          </a:solidFill>
-          <a:ln>
-            <a:noFill/>
-          </a:ln>
-          <a:effectLst/>
-        </p:spPr>
-        <p:style>
-          <a:lnRef idx="1">
-            <a:schemeClr val="accent1"/>
-          </a:lnRef>
-          <a:fillRef idx="3">
-            <a:schemeClr val="accent1"/>
-          </a:fillRef>
-          <a:effectRef idx="2">
-            <a:schemeClr val="accent1"/>
-          </a:effectRef>
-          <a:fontRef idx="minor">
-            <a:schemeClr val="lt1"/>
-          </a:fontRef>
-        </p:style>
-        <p:txBody>
-          <a:bodyPr rtlCol="0" anchor="ctr"/>
-          <a:lstStyle/>
-          <a:p>
-            <a:pPr algn="ctr"/>
-          </a:p>
-        </p:txBody>
-      </p:sp>
-      <p:sp>
-        <p:nvSpPr>
-          <p:cNvPr id="15" name="TextBox 14"/>
-          <p:cNvSpPr txBox="1"/>
-          <p:nvPr/>
-        </p:nvSpPr>
-        <p:spPr>
-          <a:xfrm>
-            <a:off x="969264" y="4242816"/>
-            <a:ext cx="5029200" cy="457200"/>
-          </a:xfrm>
-          <a:prstGeom prst="rect">
-            <a:avLst/>
-          </a:prstGeom>
-          <a:noFill/>
-        </p:spPr>
-        <p:txBody>
-          <a:bodyPr wrap="square" lIns="0" rIns="0" tIns="0" bIns="0">
-            <a:spAutoFit/>
-          </a:bodyPr>
-          <a:lstStyle/>
-          <a:p>
-            <a:pPr algn="l">
-              <a:lnSpc>
-                <a:spcPct val="125000"/>
-              </a:lnSpc>
-            </a:pPr>
-            <a:r>
-              <a:rPr sz="1700" b="0" i="0">
-                <a:solidFill>
-                  <a:srgbClr val="1B2733"/>
-                </a:solidFill>
-                <a:latin typeface="Calibri"/>
-              </a:rPr>
-              <a:t>Runs it by voice, or by typing</a:t>
-            </a:r>
-          </a:p>
-        </p:txBody>
-      </p:sp>
-      <p:sp>
-        <p:nvSpPr>
-          <p:cNvPr id="16" name="Rectangle 15"/>
-          <p:cNvSpPr/>
-          <p:nvPr/>
-        </p:nvSpPr>
-        <p:spPr>
-          <a:xfrm>
-            <a:off x="658368" y="4928616"/>
-            <a:ext cx="146304" cy="50292"/>
-          </a:xfrm>
-          <a:prstGeom prst="rect">
-            <a:avLst/>
-          </a:prstGeom>
-          <a:solidFill>
-            <a:srgbClr val="1E6B4F"/>
-          </a:solidFill>
-          <a:ln>
-            <a:noFill/>
-          </a:ln>
-          <a:effectLst/>
-        </p:spPr>
-        <p:style>
-          <a:lnRef idx="1">
-            <a:schemeClr val="accent1"/>
-          </a:lnRef>
-          <a:fillRef idx="3">
-            <a:schemeClr val="accent1"/>
-          </a:fillRef>
-          <a:effectRef idx="2">
-            <a:schemeClr val="accent1"/>
-          </a:effectRef>
-          <a:fontRef idx="minor">
-            <a:schemeClr val="lt1"/>
-          </a:fontRef>
-        </p:style>
-        <p:txBody>
-          <a:bodyPr rtlCol="0" anchor="ctr"/>
-          <a:lstStyle/>
-          <a:p>
-            <a:pPr algn="ctr"/>
-          </a:p>
-        </p:txBody>
-      </p:sp>
-      <p:sp>
-        <p:nvSpPr>
-          <p:cNvPr id="17" name="TextBox 16"/>
-          <p:cNvSpPr txBox="1"/>
-          <p:nvPr/>
-        </p:nvSpPr>
-        <p:spPr>
-          <a:xfrm>
-            <a:off x="969264" y="4809744"/>
-            <a:ext cx="5029200" cy="457200"/>
-          </a:xfrm>
-          <a:prstGeom prst="rect">
-            <a:avLst/>
-          </a:prstGeom>
-          <a:noFill/>
-        </p:spPr>
-        <p:txBody>
-          <a:bodyPr wrap="square" lIns="0" rIns="0" tIns="0" bIns="0">
-            <a:spAutoFit/>
-          </a:bodyPr>
-          <a:lstStyle/>
-          <a:p>
-            <a:pPr algn="l">
-              <a:lnSpc>
-                <a:spcPct val="125000"/>
-              </a:lnSpc>
-            </a:pPr>
-            <a:r>
-              <a:rPr sz="1700" b="0" i="0">
-                <a:solidFill>
-                  <a:srgbClr val="1B2733"/>
-                </a:solidFill>
-                <a:latin typeface="Calibri"/>
-              </a:rPr>
-              <a:t>Marks every answer, and says how sure it is</a:t>
-            </a:r>
-          </a:p>
-        </p:txBody>
-      </p:sp>
-      <p:sp>
-        <p:nvSpPr>
-          <p:cNvPr id="18" name="Rectangle 17"/>
-          <p:cNvSpPr/>
-          <p:nvPr/>
-        </p:nvSpPr>
-        <p:spPr>
-          <a:xfrm>
-            <a:off x="658368" y="5495544"/>
-            <a:ext cx="146304" cy="50292"/>
-          </a:xfrm>
-          <a:prstGeom prst="rect">
-            <a:avLst/>
-          </a:prstGeom>
-          <a:solidFill>
-            <a:srgbClr val="1E6B4F"/>
-          </a:solidFill>
-          <a:ln>
-            <a:noFill/>
-          </a:ln>
-          <a:effectLst/>
-        </p:spPr>
-        <p:style>
-          <a:lnRef idx="1">
-            <a:schemeClr val="accent1"/>
-          </a:lnRef>
-          <a:fillRef idx="3">
-            <a:schemeClr val="accent1"/>
-          </a:fillRef>
-          <a:effectRef idx="2">
-            <a:schemeClr val="accent1"/>
-          </a:effectRef>
-          <a:fontRef idx="minor">
-            <a:schemeClr val="lt1"/>
-          </a:fontRef>
-        </p:style>
-        <p:txBody>
-          <a:bodyPr rtlCol="0" anchor="ctr"/>
-          <a:lstStyle/>
-          <a:p>
-            <a:pPr algn="ctr"/>
-          </a:p>
-        </p:txBody>
-      </p:sp>
-      <p:sp>
-        <p:nvSpPr>
-          <p:cNvPr id="19" name="TextBox 18"/>
-          <p:cNvSpPr txBox="1"/>
-          <p:nvPr/>
-        </p:nvSpPr>
-        <p:spPr>
-          <a:xfrm>
-            <a:off x="969264" y="5376672"/>
-            <a:ext cx="5029200" cy="457200"/>
-          </a:xfrm>
-          <a:prstGeom prst="rect">
-            <a:avLst/>
-          </a:prstGeom>
-          <a:noFill/>
-        </p:spPr>
-        <p:txBody>
-          <a:bodyPr wrap="square" lIns="0" rIns="0" tIns="0" bIns="0">
-            <a:spAutoFit/>
-          </a:bodyPr>
-          <a:lstStyle/>
-          <a:p>
-            <a:pPr algn="l">
-              <a:lnSpc>
-                <a:spcPct val="125000"/>
-              </a:lnSpc>
-            </a:pPr>
-            <a:r>
-              <a:rPr sz="1700" b="0" i="0">
-                <a:solidFill>
-                  <a:srgbClr val="1B2733"/>
-                </a:solidFill>
-                <a:latin typeface="Calibri"/>
-              </a:rPr>
-              <a:t>Produces a report where every number can be traced</a:t>
-            </a:r>
-          </a:p>
-        </p:txBody>
-      </p:sp>
-      <p:sp>
-        <p:nvSpPr>
-          <p:cNvPr id="20" name="Rectangle 19"/>
-          <p:cNvSpPr/>
-          <p:nvPr/>
-        </p:nvSpPr>
-        <p:spPr>
-          <a:xfrm>
-            <a:off x="6601968" y="2660904"/>
-            <a:ext cx="146304" cy="50292"/>
-          </a:xfrm>
-          <a:prstGeom prst="rect">
-            <a:avLst/>
-          </a:prstGeom>
-          <a:solidFill>
-            <a:srgbClr val="9A4415"/>
-          </a:solidFill>
-          <a:ln>
-            <a:noFill/>
-          </a:ln>
-          <a:effectLst/>
-        </p:spPr>
-        <p:style>
-          <a:lnRef idx="1">
-            <a:schemeClr val="accent1"/>
-          </a:lnRef>
-          <a:fillRef idx="3">
-            <a:schemeClr val="accent1"/>
-          </a:fillRef>
-          <a:effectRef idx="2">
-            <a:schemeClr val="accent1"/>
-          </a:effectRef>
-          <a:fontRef idx="minor">
-            <a:schemeClr val="lt1"/>
-          </a:fontRef>
-        </p:style>
-        <p:txBody>
-          <a:bodyPr rtlCol="0" anchor="ctr"/>
-          <a:lstStyle/>
-          <a:p>
-            <a:pPr algn="ctr"/>
-          </a:p>
-        </p:txBody>
-      </p:sp>
-      <p:sp>
-        <p:nvSpPr>
-          <p:cNvPr id="21" name="TextBox 20"/>
-          <p:cNvSpPr txBox="1"/>
-          <p:nvPr/>
-        </p:nvSpPr>
-        <p:spPr>
-          <a:xfrm>
-            <a:off x="6912864" y="2542032"/>
-            <a:ext cx="4754880" cy="731520"/>
-          </a:xfrm>
-          <a:prstGeom prst="rect">
-            <a:avLst/>
-          </a:prstGeom>
-          <a:noFill/>
-        </p:spPr>
-        <p:txBody>
-          <a:bodyPr wrap="square" lIns="0" rIns="0" tIns="0" bIns="0">
-            <a:spAutoFit/>
-          </a:bodyPr>
-          <a:lstStyle/>
-          <a:p>
-            <a:pPr algn="l">
-              <a:lnSpc>
-                <a:spcPct val="125000"/>
-              </a:lnSpc>
-            </a:pPr>
-            <a:r>
-              <a:rPr sz="1700" b="0" i="0">
-                <a:solidFill>
-                  <a:srgbClr val="1B2733"/>
-                </a:solidFill>
-                <a:latin typeface="Calibri"/>
-              </a:rPr>
-              <a:t>Does not hire anyone. It gives evidence. A person decides.</a:t>
-            </a:r>
-          </a:p>
-        </p:txBody>
-      </p:sp>
-      <p:sp>
-        <p:nvSpPr>
-          <p:cNvPr id="22" name="Rectangle 21"/>
-          <p:cNvSpPr/>
-          <p:nvPr/>
-        </p:nvSpPr>
-        <p:spPr>
-          <a:xfrm>
-            <a:off x="6601968" y="3483864"/>
-            <a:ext cx="146304" cy="50292"/>
-          </a:xfrm>
-          <a:prstGeom prst="rect">
-            <a:avLst/>
-          </a:prstGeom>
-          <a:solidFill>
-            <a:srgbClr val="9A4415"/>
-          </a:solidFill>
-          <a:ln>
-            <a:noFill/>
-          </a:ln>
-          <a:effectLst/>
-        </p:spPr>
-        <p:style>
-          <a:lnRef idx="1">
-            <a:schemeClr val="accent1"/>
-          </a:lnRef>
-          <a:fillRef idx="3">
-            <a:schemeClr val="accent1"/>
-          </a:fillRef>
-          <a:effectRef idx="2">
-            <a:schemeClr val="accent1"/>
-          </a:effectRef>
-          <a:fontRef idx="minor">
-            <a:schemeClr val="lt1"/>
-          </a:fontRef>
-        </p:style>
-        <p:txBody>
-          <a:bodyPr rtlCol="0" anchor="ctr"/>
-          <a:lstStyle/>
-          <a:p>
-            <a:pPr algn="ctr"/>
-          </a:p>
-        </p:txBody>
-      </p:sp>
-      <p:sp>
-        <p:nvSpPr>
-          <p:cNvPr id="23" name="TextBox 22"/>
-          <p:cNvSpPr txBox="1"/>
-          <p:nvPr/>
-        </p:nvSpPr>
-        <p:spPr>
-          <a:xfrm>
-            <a:off x="6912864" y="3364992"/>
-            <a:ext cx="4754880" cy="731520"/>
-          </a:xfrm>
-          <a:prstGeom prst="rect">
-            <a:avLst/>
-          </a:prstGeom>
-          <a:noFill/>
-        </p:spPr>
-        <p:txBody>
-          <a:bodyPr wrap="square" lIns="0" rIns="0" tIns="0" bIns="0">
-            <a:spAutoFit/>
-          </a:bodyPr>
-          <a:lstStyle/>
-          <a:p>
-            <a:pPr algn="l">
-              <a:lnSpc>
-                <a:spcPct val="125000"/>
-              </a:lnSpc>
-            </a:pPr>
-            <a:r>
-              <a:rPr sz="1700" b="0" i="0">
-                <a:solidFill>
-                  <a:srgbClr val="1B2733"/>
-                </a:solidFill>
-                <a:latin typeface="Calibri"/>
-              </a:rPr>
-              <a:t>Knows nothing about the person. No age, gender, name or background.</a:t>
-            </a:r>
-          </a:p>
-        </p:txBody>
-      </p:sp>
-      <p:sp>
-        <p:nvSpPr>
-          <p:cNvPr id="24" name="Rectangle 23"/>
-          <p:cNvSpPr/>
-          <p:nvPr/>
-        </p:nvSpPr>
-        <p:spPr>
-          <a:xfrm>
-            <a:off x="6601968" y="4306824"/>
-            <a:ext cx="146304" cy="50292"/>
-          </a:xfrm>
-          <a:prstGeom prst="rect">
-            <a:avLst/>
-          </a:prstGeom>
-          <a:solidFill>
-            <a:srgbClr val="9A4415"/>
-          </a:solidFill>
-          <a:ln>
-            <a:noFill/>
-          </a:ln>
-          <a:effectLst/>
-        </p:spPr>
-        <p:style>
-          <a:lnRef idx="1">
-            <a:schemeClr val="accent1"/>
-          </a:lnRef>
-          <a:fillRef idx="3">
-            <a:schemeClr val="accent1"/>
-          </a:fillRef>
-          <a:effectRef idx="2">
-            <a:schemeClr val="accent1"/>
-          </a:effectRef>
-          <a:fontRef idx="minor">
-            <a:schemeClr val="lt1"/>
-          </a:fontRef>
-        </p:style>
-        <p:txBody>
-          <a:bodyPr rtlCol="0" anchor="ctr"/>
-          <a:lstStyle/>
-          <a:p>
-            <a:pPr algn="ctr"/>
-          </a:p>
-        </p:txBody>
-      </p:sp>
-      <p:sp>
-        <p:nvSpPr>
-          <p:cNvPr id="25" name="TextBox 24"/>
-          <p:cNvSpPr txBox="1"/>
-          <p:nvPr/>
-        </p:nvSpPr>
-        <p:spPr>
-          <a:xfrm>
-            <a:off x="6912864" y="4187952"/>
-            <a:ext cx="4754880" cy="731520"/>
-          </a:xfrm>
-          <a:prstGeom prst="rect">
-            <a:avLst/>
-          </a:prstGeom>
-          <a:noFill/>
-        </p:spPr>
-        <p:txBody>
-          <a:bodyPr wrap="square" lIns="0" rIns="0" tIns="0" bIns="0">
-            <a:spAutoFit/>
-          </a:bodyPr>
-          <a:lstStyle/>
-          <a:p>
-            <a:pPr algn="l">
-              <a:lnSpc>
-                <a:spcPct val="125000"/>
-              </a:lnSpc>
-            </a:pPr>
-            <a:r>
-              <a:rPr sz="1700" b="0" i="0">
-                <a:solidFill>
-                  <a:srgbClr val="1B2733"/>
-                </a:solidFill>
-                <a:latin typeface="Calibri"/>
-              </a:rPr>
-              <a:t>Does not predict job performance. It measures the answer, not the future.</a:t>
-            </a:r>
-          </a:p>
-        </p:txBody>
-      </p:sp>
-      <p:sp>
-        <p:nvSpPr>
-          <p:cNvPr id="26" name="Rectangle 25"/>
-          <p:cNvSpPr/>
-          <p:nvPr/>
-        </p:nvSpPr>
-        <p:spPr>
-          <a:xfrm>
-            <a:off x="6601968" y="5129784"/>
-            <a:ext cx="146304" cy="50292"/>
-          </a:xfrm>
-          <a:prstGeom prst="rect">
-            <a:avLst/>
-          </a:prstGeom>
-          <a:solidFill>
-            <a:srgbClr val="9A4415"/>
-          </a:solidFill>
-          <a:ln>
-            <a:noFill/>
-          </a:ln>
-          <a:effectLst/>
-        </p:spPr>
-        <p:style>
-          <a:lnRef idx="1">
-            <a:schemeClr val="accent1"/>
-          </a:lnRef>
-          <a:fillRef idx="3">
-            <a:schemeClr val="accent1"/>
-          </a:fillRef>
-          <a:effectRef idx="2">
-            <a:schemeClr val="accent1"/>
-          </a:effectRef>
-          <a:fontRef idx="minor">
-            <a:schemeClr val="lt1"/>
-          </a:fontRef>
-        </p:style>
-        <p:txBody>
-          <a:bodyPr rtlCol="0" anchor="ctr"/>
-          <a:lstStyle/>
-          <a:p>
-            <a:pPr algn="ctr"/>
-          </a:p>
-        </p:txBody>
-      </p:sp>
-      <p:sp>
-        <p:nvSpPr>
-          <p:cNvPr id="27" name="TextBox 26"/>
-          <p:cNvSpPr txBox="1"/>
-          <p:nvPr/>
-        </p:nvSpPr>
-        <p:spPr>
-          <a:xfrm>
-            <a:off x="6912864" y="5010912"/>
-            <a:ext cx="4754880" cy="731520"/>
-          </a:xfrm>
-          <a:prstGeom prst="rect">
-            <a:avLst/>
-          </a:prstGeom>
-          <a:noFill/>
-        </p:spPr>
-        <p:txBody>
-          <a:bodyPr wrap="square" lIns="0" rIns="0" tIns="0" bIns="0">
-            <a:spAutoFit/>
-          </a:bodyPr>
-          <a:lstStyle/>
-          <a:p>
-            <a:pPr algn="l">
-              <a:lnSpc>
-                <a:spcPct val="125000"/>
-              </a:lnSpc>
-            </a:pPr>
-            <a:r>
-              <a:rPr sz="1700" b="0" i="0">
-                <a:solidFill>
-                  <a:srgbClr val="1B2733"/>
-                </a:solidFill>
-                <a:latin typeface="Calibri"/>
-              </a:rPr>
-              <a:t>Not a finished product. One interview at a time. A research prototype.</a:t>
-            </a:r>
-          </a:p>
-        </p:txBody>
-      </p:sp>
-      <p:sp>
-        <p:nvSpPr>
-          <p:cNvPr id="28" name="Rounded Rectangle 27"/>
-          <p:cNvSpPr/>
-          <p:nvPr/>
-        </p:nvSpPr>
-        <p:spPr>
-          <a:xfrm>
-            <a:off x="6601968" y="5532120"/>
-            <a:ext cx="5074920" cy="658368"/>
-          </a:xfrm>
-          <a:prstGeom prst="roundRect">
-            <a:avLst>
-              <a:gd name="adj" fmla="val 6000"/>
-            </a:avLst>
-          </a:prstGeom>
-          <a:solidFill>
-            <a:srgbClr val="F4F7FA"/>
-          </a:solidFill>
-          <a:ln>
-            <a:noFill/>
-          </a:ln>
-          <a:effectLst/>
-        </p:spPr>
-        <p:style>
-          <a:lnRef idx="1">
-            <a:schemeClr val="accent1"/>
-          </a:lnRef>
-          <a:fillRef idx="3">
-            <a:schemeClr val="accent1"/>
-          </a:fillRef>
-          <a:effectRef idx="2">
-            <a:schemeClr val="accent1"/>
-          </a:effectRef>
-          <a:fontRef idx="minor">
-            <a:schemeClr val="lt1"/>
-          </a:fontRef>
-        </p:style>
-        <p:txBody>
-          <a:bodyPr rtlCol="0" anchor="ctr"/>
-          <a:lstStyle/>
-          <a:p>
-            <a:pPr algn="ctr"/>
-          </a:p>
-        </p:txBody>
-      </p:sp>
-      <p:sp>
-        <p:nvSpPr>
-          <p:cNvPr id="29" name="TextBox 28"/>
-          <p:cNvSpPr txBox="1"/>
-          <p:nvPr/>
-        </p:nvSpPr>
-        <p:spPr>
-          <a:xfrm>
-            <a:off x="6922008" y="5715000"/>
-            <a:ext cx="4572000" cy="365760"/>
-          </a:xfrm>
-          <a:prstGeom prst="rect">
-            <a:avLst/>
-          </a:prstGeom>
-          <a:noFill/>
-        </p:spPr>
-        <p:txBody>
-          <a:bodyPr wrap="square" lIns="0" rIns="0" tIns="0" bIns="0">
-            <a:spAutoFit/>
-          </a:bodyPr>
-          <a:lstStyle/>
-          <a:p>
-            <a:pPr algn="l">
-              <a:lnSpc>
-                <a:spcPct val="125000"/>
-              </a:lnSpc>
-            </a:pPr>
-            <a:r>
-              <a:rPr sz="1600" b="1" i="0">
-                <a:solidFill>
-                  <a:srgbClr val="1B2733"/>
-                </a:solidFill>
-                <a:latin typeface="Calibri"/>
-              </a:rPr>
-              <a:t>Every limit here is a decision I can defend.</a:t>
+              <a:t>Thirteen parts, four stages — the next four slides go through them.</a:t>
             </a:r>
           </a:p>
         </p:txBody>
@@ -7644,7 +6921,7 @@
                 </a:solidFill>
                 <a:latin typeface="Calibri"/>
               </a:rPr>
-              <a:t>THE SOLUTION</a:t>
+              <a:t>MODULES 1 TO 4</a:t>
             </a:r>
           </a:p>
         </p:txBody>
@@ -7683,7 +6960,7 @@
                 </a:solidFill>
                 <a:latin typeface="Calibri"/>
               </a:rPr>
-              <a:t>How it works, start to finish</a:t>
+              <a:t>Preparing the interview</a:t>
             </a:r>
           </a:p>
         </p:txBody>
@@ -7771,30 +7048,45 @@
           </a:p>
         </p:txBody>
       </p:sp>
-      <p:pic>
-        <p:nvPicPr>
-          <p:cNvPr id="6" name="Picture 5" descr="fig01_architecture.png"/>
-          <p:cNvPicPr>
-            <a:picLocks noChangeAspect="1"/>
-          </p:cNvPicPr>
-          <p:nvPr/>
-        </p:nvPicPr>
-        <p:blipFill>
-          <a:blip r:embed="rId3"/>
-          <a:stretch>
-            <a:fillRect/>
-          </a:stretch>
-        </p:blipFill>
-        <p:spPr>
-          <a:xfrm>
-            <a:off x="4072881" y="2011680"/>
-            <a:ext cx="4045933" cy="3703320"/>
-          </a:xfrm>
-          <a:prstGeom prst="rect">
-            <a:avLst/>
-          </a:prstGeom>
-        </p:spPr>
-      </p:pic>
+      <p:sp>
+        <p:nvSpPr>
+          <p:cNvPr id="6" name="TextBox 5"/>
+          <p:cNvSpPr txBox="1"/>
+          <p:nvPr/>
+        </p:nvSpPr>
+        <p:spPr>
+          <a:xfrm>
+            <a:off x="658368" y="2066544"/>
+            <a:ext cx="1097280" cy="237744"/>
+          </a:xfrm>
+          <a:prstGeom prst="rect">
+            <a:avLst/>
+          </a:prstGeom>
+          <a:noFill/>
+        </p:spPr>
+        <p:txBody>
+          <a:bodyPr wrap="square" lIns="0" rIns="0" tIns="0" bIns="0">
+            <a:spAutoFit/>
+          </a:bodyPr>
+          <a:lstStyle/>
+          <a:p>
+            <a:pPr algn="l">
+              <a:lnSpc>
+                <a:spcPct val="125000"/>
+              </a:lnSpc>
+            </a:pPr>
+            <a:r>
+              <a:rPr sz="1100" b="1" i="0" spc="120">
+                <a:solidFill>
+                  <a:srgbClr val="5A6B7B"/>
+                </a:solidFill>
+                <a:latin typeface="Calibri"/>
+              </a:rPr>
+              <a:t>MODULE</a:t>
+            </a:r>
+          </a:p>
+        </p:txBody>
+      </p:sp>
       <p:sp>
         <p:nvSpPr>
           <p:cNvPr id="7" name="TextBox 6"/>
@@ -7803,8 +7095,8 @@
         </p:nvSpPr>
         <p:spPr>
           <a:xfrm>
-            <a:off x="658368" y="5504688"/>
-            <a:ext cx="1554480" cy="274320"/>
+            <a:off x="2029968" y="2066544"/>
+            <a:ext cx="4572000" cy="237744"/>
           </a:xfrm>
           <a:prstGeom prst="rect">
             <a:avLst/>
@@ -7823,66 +7115,298 @@
               </a:lnSpc>
             </a:pPr>
             <a:r>
-              <a:rPr sz="1400" b="1" i="0">
+              <a:rPr sz="1100" b="1" i="0" spc="120">
+                <a:solidFill>
+                  <a:srgbClr val="5A6B7B"/>
+                </a:solidFill>
+                <a:latin typeface="Calibri"/>
+              </a:rPr>
+              <a:t>WHAT IT DOES</a:t>
+            </a:r>
+          </a:p>
+        </p:txBody>
+      </p:sp>
+      <p:sp>
+        <p:nvSpPr>
+          <p:cNvPr id="8" name="TextBox 7"/>
+          <p:cNvSpPr txBox="1"/>
+          <p:nvPr/>
+        </p:nvSpPr>
+        <p:spPr>
+          <a:xfrm>
+            <a:off x="8339328" y="2066544"/>
+            <a:ext cx="3108960" cy="237744"/>
+          </a:xfrm>
+          <a:prstGeom prst="rect">
+            <a:avLst/>
+          </a:prstGeom>
+          <a:noFill/>
+        </p:spPr>
+        <p:txBody>
+          <a:bodyPr wrap="square" lIns="0" rIns="0" tIns="0" bIns="0">
+            <a:spAutoFit/>
+          </a:bodyPr>
+          <a:lstStyle/>
+          <a:p>
+            <a:pPr algn="l">
+              <a:lnSpc>
+                <a:spcPct val="125000"/>
+              </a:lnSpc>
+            </a:pPr>
+            <a:r>
+              <a:rPr sz="1100" b="1" i="0" spc="120">
+                <a:solidFill>
+                  <a:srgbClr val="5A6B7B"/>
+                </a:solidFill>
+                <a:latin typeface="Calibri"/>
+              </a:rPr>
+              <a:t>BUILT WITH</a:t>
+            </a:r>
+          </a:p>
+        </p:txBody>
+      </p:sp>
+      <p:sp>
+        <p:nvSpPr>
+          <p:cNvPr id="9" name="Rectangle 8"/>
+          <p:cNvSpPr/>
+          <p:nvPr/>
+        </p:nvSpPr>
+        <p:spPr>
+          <a:xfrm>
+            <a:off x="658368" y="2377440"/>
+            <a:ext cx="10874959" cy="12801"/>
+          </a:xfrm>
+          <a:prstGeom prst="rect">
+            <a:avLst/>
+          </a:prstGeom>
+          <a:solidFill>
+            <a:srgbClr val="F4F7FA"/>
+          </a:solidFill>
+          <a:ln>
+            <a:noFill/>
+          </a:ln>
+          <a:effectLst/>
+        </p:spPr>
+        <p:style>
+          <a:lnRef idx="1">
+            <a:schemeClr val="accent1"/>
+          </a:lnRef>
+          <a:fillRef idx="3">
+            <a:schemeClr val="accent1"/>
+          </a:fillRef>
+          <a:effectRef idx="2">
+            <a:schemeClr val="accent1"/>
+          </a:effectRef>
+          <a:fontRef idx="minor">
+            <a:schemeClr val="lt1"/>
+          </a:fontRef>
+        </p:style>
+        <p:txBody>
+          <a:bodyPr rtlCol="0" anchor="ctr"/>
+          <a:lstStyle/>
+          <a:p>
+            <a:pPr algn="ctr"/>
+          </a:p>
+        </p:txBody>
+      </p:sp>
+      <p:sp>
+        <p:nvSpPr>
+          <p:cNvPr id="10" name="TextBox 9"/>
+          <p:cNvSpPr txBox="1"/>
+          <p:nvPr/>
+        </p:nvSpPr>
+        <p:spPr>
+          <a:xfrm>
+            <a:off x="658368" y="2450592"/>
+            <a:ext cx="1188720" cy="310896"/>
+          </a:xfrm>
+          <a:prstGeom prst="rect">
+            <a:avLst/>
+          </a:prstGeom>
+          <a:noFill/>
+        </p:spPr>
+        <p:txBody>
+          <a:bodyPr wrap="square" lIns="0" rIns="0" tIns="0" bIns="0">
+            <a:spAutoFit/>
+          </a:bodyPr>
+          <a:lstStyle/>
+          <a:p>
+            <a:pPr algn="l">
+              <a:lnSpc>
+                <a:spcPct val="125000"/>
+              </a:lnSpc>
+            </a:pPr>
+            <a:r>
+              <a:rPr sz="1900" b="1" i="0">
                 <a:solidFill>
                   <a:srgbClr val="1F4E79"/>
                 </a:solidFill>
                 <a:latin typeface="Calibri"/>
               </a:rPr>
-              <a:t>1. Prepare  </a:t>
-            </a:r>
-          </a:p>
-        </p:txBody>
-      </p:sp>
-      <p:sp>
-        <p:nvSpPr>
-          <p:cNvPr id="8" name="TextBox 7"/>
-          <p:cNvSpPr txBox="1"/>
-          <p:nvPr/>
-        </p:nvSpPr>
-        <p:spPr>
-          <a:xfrm>
-            <a:off x="658368" y="5779008"/>
-            <a:ext cx="2490139" cy="731520"/>
-          </a:xfrm>
-          <a:prstGeom prst="rect">
-            <a:avLst/>
-          </a:prstGeom>
-          <a:noFill/>
-        </p:spPr>
-        <p:txBody>
-          <a:bodyPr wrap="square" lIns="0" rIns="0" tIns="0" bIns="0">
-            <a:spAutoFit/>
-          </a:bodyPr>
-          <a:lstStyle/>
-          <a:p>
-            <a:pPr algn="l">
-              <a:lnSpc>
-                <a:spcPct val="122000"/>
-              </a:lnSpc>
-            </a:pPr>
-            <a:r>
-              <a:rPr sz="1200" b="0" i="0">
+              <a:t>M1</a:t>
+            </a:r>
+          </a:p>
+        </p:txBody>
+      </p:sp>
+      <p:sp>
+        <p:nvSpPr>
+          <p:cNvPr id="11" name="TextBox 10"/>
+          <p:cNvSpPr txBox="1"/>
+          <p:nvPr/>
+        </p:nvSpPr>
+        <p:spPr>
+          <a:xfrm>
+            <a:off x="2029968" y="2450592"/>
+            <a:ext cx="6035040" cy="292608"/>
+          </a:xfrm>
+          <a:prstGeom prst="rect">
+            <a:avLst/>
+          </a:prstGeom>
+          <a:noFill/>
+        </p:spPr>
+        <p:txBody>
+          <a:bodyPr wrap="square" lIns="0" rIns="0" tIns="0" bIns="0">
+            <a:spAutoFit/>
+          </a:bodyPr>
+          <a:lstStyle/>
+          <a:p>
+            <a:pPr algn="l">
+              <a:lnSpc>
+                <a:spcPct val="125000"/>
+              </a:lnSpc>
+            </a:pPr>
+            <a:r>
+              <a:rPr sz="1700" b="1" i="0">
+                <a:solidFill>
+                  <a:srgbClr val="1B2733"/>
+                </a:solidFill>
+                <a:latin typeface="Calibri"/>
+              </a:rPr>
+              <a:t>Reads the CV</a:t>
+            </a:r>
+          </a:p>
+        </p:txBody>
+      </p:sp>
+      <p:sp>
+        <p:nvSpPr>
+          <p:cNvPr id="12" name="TextBox 11"/>
+          <p:cNvSpPr txBox="1"/>
+          <p:nvPr/>
+        </p:nvSpPr>
+        <p:spPr>
+          <a:xfrm>
+            <a:off x="2029968" y="2761488"/>
+            <a:ext cx="6035040" cy="566928"/>
+          </a:xfrm>
+          <a:prstGeom prst="rect">
+            <a:avLst/>
+          </a:prstGeom>
+          <a:noFill/>
+        </p:spPr>
+        <p:txBody>
+          <a:bodyPr wrap="square" lIns="0" rIns="0" tIns="0" bIns="0">
+            <a:spAutoFit/>
+          </a:bodyPr>
+          <a:lstStyle/>
+          <a:p>
+            <a:pPr algn="l">
+              <a:lnSpc>
+                <a:spcPct val="126000"/>
+              </a:lnSpc>
+            </a:pPr>
+            <a:r>
+              <a:rPr sz="1450" b="0" i="0">
                 <a:solidFill>
                   <a:srgbClr val="5A6B7B"/>
                 </a:solidFill>
                 <a:latin typeface="Calibri"/>
               </a:rPr>
-              <a:t>read both documents, find the missing skills, write the questions</a:t>
-            </a:r>
-          </a:p>
-        </p:txBody>
-      </p:sp>
-      <p:sp>
-        <p:nvSpPr>
-          <p:cNvPr id="9" name="TextBox 8"/>
-          <p:cNvSpPr txBox="1"/>
-          <p:nvPr/>
-        </p:nvSpPr>
-        <p:spPr>
-          <a:xfrm>
-            <a:off x="3377107" y="5504688"/>
-            <a:ext cx="1554480" cy="274320"/>
+              <a:t>Pulls out skills, jobs, education and projects from an uploaded PDF or pasted text. Repairs broken replies rather than failing.</a:t>
+            </a:r>
+          </a:p>
+        </p:txBody>
+      </p:sp>
+      <p:sp>
+        <p:nvSpPr>
+          <p:cNvPr id="13" name="TextBox 12"/>
+          <p:cNvSpPr txBox="1"/>
+          <p:nvPr/>
+        </p:nvSpPr>
+        <p:spPr>
+          <a:xfrm>
+            <a:off x="8339328" y="2468880"/>
+            <a:ext cx="3200400" cy="731520"/>
+          </a:xfrm>
+          <a:prstGeom prst="rect">
+            <a:avLst/>
+          </a:prstGeom>
+          <a:noFill/>
+        </p:spPr>
+        <p:txBody>
+          <a:bodyPr wrap="square" lIns="0" rIns="0" tIns="0" bIns="0">
+            <a:spAutoFit/>
+          </a:bodyPr>
+          <a:lstStyle/>
+          <a:p>
+            <a:pPr algn="l">
+              <a:lnSpc>
+                <a:spcPct val="126000"/>
+              </a:lnSpc>
+            </a:pPr>
+            <a:r>
+              <a:rPr sz="1450" b="1" i="0">
+                <a:solidFill>
+                  <a:srgbClr val="1F4E79"/>
+                </a:solidFill>
+                <a:latin typeface="Calibri"/>
+              </a:rPr>
+              <a:t>Google Gemini</a:t>
+            </a:r>
+          </a:p>
+          <a:p>
+            <a:pPr algn="l">
+              <a:lnSpc>
+                <a:spcPct val="126000"/>
+              </a:lnSpc>
+            </a:pPr>
+            <a:r>
+              <a:rPr sz="1450" b="1" i="0">
+                <a:solidFill>
+                  <a:srgbClr val="1F4E79"/>
+                </a:solidFill>
+                <a:latin typeface="Calibri"/>
+              </a:rPr>
+              <a:t>3.6 Flash</a:t>
+            </a:r>
+          </a:p>
+          <a:p>
+            <a:pPr algn="l">
+              <a:lnSpc>
+                <a:spcPct val="126000"/>
+              </a:lnSpc>
+            </a:pPr>
+            <a:r>
+              <a:rPr sz="1450" b="1" i="0">
+                <a:solidFill>
+                  <a:srgbClr val="1F4E79"/>
+                </a:solidFill>
+                <a:latin typeface="Calibri"/>
+              </a:rPr>
+              <a:t>+ PyMuPDF</a:t>
+            </a:r>
+          </a:p>
+        </p:txBody>
+      </p:sp>
+      <p:sp>
+        <p:nvSpPr>
+          <p:cNvPr id="14" name="TextBox 13"/>
+          <p:cNvSpPr txBox="1"/>
+          <p:nvPr/>
+        </p:nvSpPr>
+        <p:spPr>
+          <a:xfrm>
+            <a:off x="658368" y="3419856"/>
+            <a:ext cx="1188720" cy="310896"/>
           </a:xfrm>
           <a:prstGeom prst="rect">
             <a:avLst/>
@@ -7901,66 +7425,160 @@
               </a:lnSpc>
             </a:pPr>
             <a:r>
-              <a:rPr sz="1400" b="1" i="0">
-                <a:solidFill>
-                  <a:srgbClr val="1E6B4F"/>
-                </a:solidFill>
-                <a:latin typeface="Calibri"/>
-              </a:rPr>
-              <a:t>2. Interview  </a:t>
-            </a:r>
-          </a:p>
-        </p:txBody>
-      </p:sp>
-      <p:sp>
-        <p:nvSpPr>
-          <p:cNvPr id="10" name="TextBox 9"/>
-          <p:cNvSpPr txBox="1"/>
-          <p:nvPr/>
-        </p:nvSpPr>
-        <p:spPr>
-          <a:xfrm>
-            <a:off x="3377107" y="5779008"/>
-            <a:ext cx="2490139" cy="731520"/>
-          </a:xfrm>
-          <a:prstGeom prst="rect">
-            <a:avLst/>
-          </a:prstGeom>
-          <a:noFill/>
-        </p:spPr>
-        <p:txBody>
-          <a:bodyPr wrap="square" lIns="0" rIns="0" tIns="0" bIns="0">
-            <a:spAutoFit/>
-          </a:bodyPr>
-          <a:lstStyle/>
-          <a:p>
-            <a:pPr algn="l">
-              <a:lnSpc>
-                <a:spcPct val="122000"/>
-              </a:lnSpc>
-            </a:pPr>
-            <a:r>
-              <a:rPr sz="1200" b="0" i="0">
+              <a:rPr sz="1900" b="1" i="0">
+                <a:solidFill>
+                  <a:srgbClr val="1F4E79"/>
+                </a:solidFill>
+                <a:latin typeface="Calibri"/>
+              </a:rPr>
+              <a:t>M2</a:t>
+            </a:r>
+          </a:p>
+        </p:txBody>
+      </p:sp>
+      <p:sp>
+        <p:nvSpPr>
+          <p:cNvPr id="15" name="TextBox 14"/>
+          <p:cNvSpPr txBox="1"/>
+          <p:nvPr/>
+        </p:nvSpPr>
+        <p:spPr>
+          <a:xfrm>
+            <a:off x="2029968" y="3419856"/>
+            <a:ext cx="6035040" cy="292608"/>
+          </a:xfrm>
+          <a:prstGeom prst="rect">
+            <a:avLst/>
+          </a:prstGeom>
+          <a:noFill/>
+        </p:spPr>
+        <p:txBody>
+          <a:bodyPr wrap="square" lIns="0" rIns="0" tIns="0" bIns="0">
+            <a:spAutoFit/>
+          </a:bodyPr>
+          <a:lstStyle/>
+          <a:p>
+            <a:pPr algn="l">
+              <a:lnSpc>
+                <a:spcPct val="125000"/>
+              </a:lnSpc>
+            </a:pPr>
+            <a:r>
+              <a:rPr sz="1700" b="1" i="0">
+                <a:solidFill>
+                  <a:srgbClr val="1B2733"/>
+                </a:solidFill>
+                <a:latin typeface="Calibri"/>
+              </a:rPr>
+              <a:t>Reads the job advert</a:t>
+            </a:r>
+          </a:p>
+        </p:txBody>
+      </p:sp>
+      <p:sp>
+        <p:nvSpPr>
+          <p:cNvPr id="16" name="TextBox 15"/>
+          <p:cNvSpPr txBox="1"/>
+          <p:nvPr/>
+        </p:nvSpPr>
+        <p:spPr>
+          <a:xfrm>
+            <a:off x="2029968" y="3730752"/>
+            <a:ext cx="6035040" cy="566928"/>
+          </a:xfrm>
+          <a:prstGeom prst="rect">
+            <a:avLst/>
+          </a:prstGeom>
+          <a:noFill/>
+        </p:spPr>
+        <p:txBody>
+          <a:bodyPr wrap="square" lIns="0" rIns="0" tIns="0" bIns="0">
+            <a:spAutoFit/>
+          </a:bodyPr>
+          <a:lstStyle/>
+          <a:p>
+            <a:pPr algn="l">
+              <a:lnSpc>
+                <a:spcPct val="126000"/>
+              </a:lnSpc>
+            </a:pPr>
+            <a:r>
+              <a:rPr sz="1450" b="0" i="0">
                 <a:solidFill>
                   <a:srgbClr val="5A6B7B"/>
                 </a:solidFill>
                 <a:latin typeface="Calibri"/>
               </a:rPr>
-              <a:t>by voice or by typing — both give the same transcript</a:t>
-            </a:r>
-          </a:p>
-        </p:txBody>
-      </p:sp>
-      <p:sp>
-        <p:nvSpPr>
-          <p:cNvPr id="11" name="TextBox 10"/>
-          <p:cNvSpPr txBox="1"/>
-          <p:nvPr/>
-        </p:nvSpPr>
-        <p:spPr>
-          <a:xfrm>
-            <a:off x="6095847" y="5504688"/>
-            <a:ext cx="1554480" cy="274320"/>
+              <a:t>Same treatment for the role: required skills, nice-to-have skills, seniority and domain.</a:t>
+            </a:r>
+          </a:p>
+        </p:txBody>
+      </p:sp>
+      <p:sp>
+        <p:nvSpPr>
+          <p:cNvPr id="17" name="TextBox 16"/>
+          <p:cNvSpPr txBox="1"/>
+          <p:nvPr/>
+        </p:nvSpPr>
+        <p:spPr>
+          <a:xfrm>
+            <a:off x="8339328" y="3438144"/>
+            <a:ext cx="3200400" cy="731520"/>
+          </a:xfrm>
+          <a:prstGeom prst="rect">
+            <a:avLst/>
+          </a:prstGeom>
+          <a:noFill/>
+        </p:spPr>
+        <p:txBody>
+          <a:bodyPr wrap="square" lIns="0" rIns="0" tIns="0" bIns="0">
+            <a:spAutoFit/>
+          </a:bodyPr>
+          <a:lstStyle/>
+          <a:p>
+            <a:pPr algn="l">
+              <a:lnSpc>
+                <a:spcPct val="126000"/>
+              </a:lnSpc>
+            </a:pPr>
+            <a:r>
+              <a:rPr sz="1450" b="1" i="0">
+                <a:solidFill>
+                  <a:srgbClr val="1F4E79"/>
+                </a:solidFill>
+                <a:latin typeface="Calibri"/>
+              </a:rPr>
+              <a:t>Google Gemini</a:t>
+            </a:r>
+          </a:p>
+          <a:p>
+            <a:pPr algn="l">
+              <a:lnSpc>
+                <a:spcPct val="126000"/>
+              </a:lnSpc>
+            </a:pPr>
+            <a:r>
+              <a:rPr sz="1450" b="1" i="0">
+                <a:solidFill>
+                  <a:srgbClr val="1F4E79"/>
+                </a:solidFill>
+                <a:latin typeface="Calibri"/>
+              </a:rPr>
+              <a:t>3.6 Flash</a:t>
+            </a:r>
+          </a:p>
+        </p:txBody>
+      </p:sp>
+      <p:sp>
+        <p:nvSpPr>
+          <p:cNvPr id="18" name="TextBox 17"/>
+          <p:cNvSpPr txBox="1"/>
+          <p:nvPr/>
+        </p:nvSpPr>
+        <p:spPr>
+          <a:xfrm>
+            <a:off x="658368" y="4389120"/>
+            <a:ext cx="1188720" cy="310896"/>
           </a:xfrm>
           <a:prstGeom prst="rect">
             <a:avLst/>
@@ -7979,66 +7597,176 @@
               </a:lnSpc>
             </a:pPr>
             <a:r>
-              <a:rPr sz="1400" b="1" i="0">
-                <a:solidFill>
-                  <a:srgbClr val="9A4415"/>
-                </a:solidFill>
-                <a:latin typeface="Calibri"/>
-              </a:rPr>
-              <a:t>3. Mark  </a:t>
-            </a:r>
-          </a:p>
-        </p:txBody>
-      </p:sp>
-      <p:sp>
-        <p:nvSpPr>
-          <p:cNvPr id="12" name="TextBox 11"/>
-          <p:cNvSpPr txBox="1"/>
-          <p:nvPr/>
-        </p:nvSpPr>
-        <p:spPr>
-          <a:xfrm>
-            <a:off x="6095847" y="5779008"/>
-            <a:ext cx="2490139" cy="731520"/>
-          </a:xfrm>
-          <a:prstGeom prst="rect">
-            <a:avLst/>
-          </a:prstGeom>
-          <a:noFill/>
-        </p:spPr>
-        <p:txBody>
-          <a:bodyPr wrap="square" lIns="0" rIns="0" tIns="0" bIns="0">
-            <a:spAutoFit/>
-          </a:bodyPr>
-          <a:lstStyle/>
-          <a:p>
-            <a:pPr algn="l">
-              <a:lnSpc>
-                <a:spcPct val="122000"/>
-              </a:lnSpc>
-            </a:pPr>
-            <a:r>
-              <a:rPr sz="1200" b="0" i="0">
+              <a:rPr sz="1900" b="1" i="0">
+                <a:solidFill>
+                  <a:srgbClr val="1F4E79"/>
+                </a:solidFill>
+                <a:latin typeface="Calibri"/>
+              </a:rPr>
+              <a:t>M3</a:t>
+            </a:r>
+          </a:p>
+        </p:txBody>
+      </p:sp>
+      <p:sp>
+        <p:nvSpPr>
+          <p:cNvPr id="19" name="TextBox 18"/>
+          <p:cNvSpPr txBox="1"/>
+          <p:nvPr/>
+        </p:nvSpPr>
+        <p:spPr>
+          <a:xfrm>
+            <a:off x="2029968" y="4389120"/>
+            <a:ext cx="6035040" cy="292608"/>
+          </a:xfrm>
+          <a:prstGeom prst="rect">
+            <a:avLst/>
+          </a:prstGeom>
+          <a:noFill/>
+        </p:spPr>
+        <p:txBody>
+          <a:bodyPr wrap="square" lIns="0" rIns="0" tIns="0" bIns="0">
+            <a:spAutoFit/>
+          </a:bodyPr>
+          <a:lstStyle/>
+          <a:p>
+            <a:pPr algn="l">
+              <a:lnSpc>
+                <a:spcPct val="125000"/>
+              </a:lnSpc>
+            </a:pPr>
+            <a:r>
+              <a:rPr sz="1700" b="1" i="0">
+                <a:solidFill>
+                  <a:srgbClr val="1B2733"/>
+                </a:solidFill>
+                <a:latin typeface="Calibri"/>
+              </a:rPr>
+              <a:t>Compares them and finds the gaps</a:t>
+            </a:r>
+          </a:p>
+        </p:txBody>
+      </p:sp>
+      <p:sp>
+        <p:nvSpPr>
+          <p:cNvPr id="20" name="TextBox 19"/>
+          <p:cNvSpPr txBox="1"/>
+          <p:nvPr/>
+        </p:nvSpPr>
+        <p:spPr>
+          <a:xfrm>
+            <a:off x="2029968" y="4700016"/>
+            <a:ext cx="6035040" cy="566928"/>
+          </a:xfrm>
+          <a:prstGeom prst="rect">
+            <a:avLst/>
+          </a:prstGeom>
+          <a:noFill/>
+        </p:spPr>
+        <p:txBody>
+          <a:bodyPr wrap="square" lIns="0" rIns="0" tIns="0" bIns="0">
+            <a:spAutoFit/>
+          </a:bodyPr>
+          <a:lstStyle/>
+          <a:p>
+            <a:pPr algn="l">
+              <a:lnSpc>
+                <a:spcPct val="126000"/>
+              </a:lnSpc>
+            </a:pPr>
+            <a:r>
+              <a:rPr sz="1450" b="0" i="0">
                 <a:solidFill>
                   <a:srgbClr val="5A6B7B"/>
                 </a:solidFill>
                 <a:latin typeface="Calibri"/>
               </a:rPr>
-              <a:t>score every answer twice, check the session looked normal</a:t>
-            </a:r>
-          </a:p>
-        </p:txBody>
-      </p:sp>
-      <p:sp>
-        <p:nvSpPr>
-          <p:cNvPr id="13" name="TextBox 12"/>
-          <p:cNvSpPr txBox="1"/>
-          <p:nvPr/>
-        </p:nvSpPr>
-        <p:spPr>
-          <a:xfrm>
-            <a:off x="8814587" y="5504688"/>
-            <a:ext cx="1554480" cy="274320"/>
+              <a:t>Maps both lists onto ESCO, the EU skills standard, through four increasingly forgiving matching steps, then reports what is missing.</a:t>
+            </a:r>
+          </a:p>
+        </p:txBody>
+      </p:sp>
+      <p:sp>
+        <p:nvSpPr>
+          <p:cNvPr id="21" name="TextBox 20"/>
+          <p:cNvSpPr txBox="1"/>
+          <p:nvPr/>
+        </p:nvSpPr>
+        <p:spPr>
+          <a:xfrm>
+            <a:off x="8339328" y="4407408"/>
+            <a:ext cx="3200400" cy="731520"/>
+          </a:xfrm>
+          <a:prstGeom prst="rect">
+            <a:avLst/>
+          </a:prstGeom>
+          <a:noFill/>
+        </p:spPr>
+        <p:txBody>
+          <a:bodyPr wrap="square" lIns="0" rIns="0" tIns="0" bIns="0">
+            <a:spAutoFit/>
+          </a:bodyPr>
+          <a:lstStyle/>
+          <a:p>
+            <a:pPr algn="l">
+              <a:lnSpc>
+                <a:spcPct val="126000"/>
+              </a:lnSpc>
+            </a:pPr>
+            <a:r>
+              <a:rPr sz="1450" b="1" i="0">
+                <a:solidFill>
+                  <a:srgbClr val="1F4E79"/>
+                </a:solidFill>
+                <a:latin typeface="Calibri"/>
+              </a:rPr>
+              <a:t>NetworkX</a:t>
+            </a:r>
+          </a:p>
+          <a:p>
+            <a:pPr algn="l">
+              <a:lnSpc>
+                <a:spcPct val="126000"/>
+              </a:lnSpc>
+            </a:pPr>
+            <a:r>
+              <a:rPr sz="1450" b="1" i="0">
+                <a:solidFill>
+                  <a:srgbClr val="1F4E79"/>
+                </a:solidFill>
+                <a:latin typeface="Calibri"/>
+              </a:rPr>
+              <a:t>+ ESCO v1.1.1</a:t>
+            </a:r>
+          </a:p>
+          <a:p>
+            <a:pPr algn="l">
+              <a:lnSpc>
+                <a:spcPct val="126000"/>
+              </a:lnSpc>
+            </a:pPr>
+            <a:r>
+              <a:rPr sz="1450" b="1" i="0">
+                <a:solidFill>
+                  <a:srgbClr val="1F4E79"/>
+                </a:solidFill>
+                <a:latin typeface="Calibri"/>
+              </a:rPr>
+              <a:t>(1,201 skills)</a:t>
+            </a:r>
+          </a:p>
+        </p:txBody>
+      </p:sp>
+      <p:sp>
+        <p:nvSpPr>
+          <p:cNvPr id="22" name="TextBox 21"/>
+          <p:cNvSpPr txBox="1"/>
+          <p:nvPr/>
+        </p:nvSpPr>
+        <p:spPr>
+          <a:xfrm>
+            <a:off x="658368" y="5358384"/>
+            <a:ext cx="1188720" cy="310896"/>
           </a:xfrm>
           <a:prstGeom prst="rect">
             <a:avLst/>
@@ -8057,52 +7785,231 @@
               </a:lnSpc>
             </a:pPr>
             <a:r>
-              <a:rPr sz="1400" b="1" i="0">
-                <a:solidFill>
-                  <a:srgbClr val="4C3A8C"/>
-                </a:solidFill>
-                <a:latin typeface="Calibri"/>
-              </a:rPr>
-              <a:t>4. Report  </a:t>
-            </a:r>
-          </a:p>
-        </p:txBody>
-      </p:sp>
-      <p:sp>
-        <p:nvSpPr>
-          <p:cNvPr id="14" name="TextBox 13"/>
-          <p:cNvSpPr txBox="1"/>
-          <p:nvPr/>
-        </p:nvSpPr>
-        <p:spPr>
-          <a:xfrm>
-            <a:off x="8814587" y="5779008"/>
-            <a:ext cx="2490139" cy="731520"/>
-          </a:xfrm>
-          <a:prstGeom prst="rect">
-            <a:avLst/>
-          </a:prstGeom>
-          <a:noFill/>
-        </p:spPr>
-        <p:txBody>
-          <a:bodyPr wrap="square" lIns="0" rIns="0" tIns="0" bIns="0">
-            <a:spAutoFit/>
-          </a:bodyPr>
-          <a:lstStyle/>
-          <a:p>
-            <a:pPr algn="l">
-              <a:lnSpc>
-                <a:spcPct val="122000"/>
-              </a:lnSpc>
-            </a:pPr>
-            <a:r>
-              <a:rPr sz="1200" b="0" i="0">
+              <a:rPr sz="1900" b="1" i="0">
+                <a:solidFill>
+                  <a:srgbClr val="1F4E79"/>
+                </a:solidFill>
+                <a:latin typeface="Calibri"/>
+              </a:rPr>
+              <a:t>M4</a:t>
+            </a:r>
+          </a:p>
+        </p:txBody>
+      </p:sp>
+      <p:sp>
+        <p:nvSpPr>
+          <p:cNvPr id="23" name="TextBox 22"/>
+          <p:cNvSpPr txBox="1"/>
+          <p:nvPr/>
+        </p:nvSpPr>
+        <p:spPr>
+          <a:xfrm>
+            <a:off x="2029968" y="5358384"/>
+            <a:ext cx="6035040" cy="292608"/>
+          </a:xfrm>
+          <a:prstGeom prst="rect">
+            <a:avLst/>
+          </a:prstGeom>
+          <a:noFill/>
+        </p:spPr>
+        <p:txBody>
+          <a:bodyPr wrap="square" lIns="0" rIns="0" tIns="0" bIns="0">
+            <a:spAutoFit/>
+          </a:bodyPr>
+          <a:lstStyle/>
+          <a:p>
+            <a:pPr algn="l">
+              <a:lnSpc>
+                <a:spcPct val="125000"/>
+              </a:lnSpc>
+            </a:pPr>
+            <a:r>
+              <a:rPr sz="1700" b="1" i="0">
+                <a:solidFill>
+                  <a:srgbClr val="1B2733"/>
+                </a:solidFill>
+                <a:latin typeface="Calibri"/>
+              </a:rPr>
+              <a:t>Writes the questions</a:t>
+            </a:r>
+          </a:p>
+        </p:txBody>
+      </p:sp>
+      <p:sp>
+        <p:nvSpPr>
+          <p:cNvPr id="24" name="TextBox 23"/>
+          <p:cNvSpPr txBox="1"/>
+          <p:nvPr/>
+        </p:nvSpPr>
+        <p:spPr>
+          <a:xfrm>
+            <a:off x="2029968" y="5669280"/>
+            <a:ext cx="6035040" cy="566928"/>
+          </a:xfrm>
+          <a:prstGeom prst="rect">
+            <a:avLst/>
+          </a:prstGeom>
+          <a:noFill/>
+        </p:spPr>
+        <p:txBody>
+          <a:bodyPr wrap="square" lIns="0" rIns="0" tIns="0" bIns="0">
+            <a:spAutoFit/>
+          </a:bodyPr>
+          <a:lstStyle/>
+          <a:p>
+            <a:pPr algn="l">
+              <a:lnSpc>
+                <a:spcPct val="126000"/>
+              </a:lnSpc>
+            </a:pPr>
+            <a:r>
+              <a:rPr sz="1450" b="0" i="0">
                 <a:solidFill>
                   <a:srgbClr val="5A6B7B"/>
                 </a:solidFill>
                 <a:latin typeface="Calibri"/>
               </a:rPr>
-              <a:t>combine into a recommendation, and show the working</a:t>
+              <a:t>Produces openers, technical questions per skill, behavioural questions and closers — then reorders so missing skills come first.</a:t>
+            </a:r>
+          </a:p>
+        </p:txBody>
+      </p:sp>
+      <p:sp>
+        <p:nvSpPr>
+          <p:cNvPr id="25" name="TextBox 24"/>
+          <p:cNvSpPr txBox="1"/>
+          <p:nvPr/>
+        </p:nvSpPr>
+        <p:spPr>
+          <a:xfrm>
+            <a:off x="8339328" y="5376672"/>
+            <a:ext cx="3200400" cy="731520"/>
+          </a:xfrm>
+          <a:prstGeom prst="rect">
+            <a:avLst/>
+          </a:prstGeom>
+          <a:noFill/>
+        </p:spPr>
+        <p:txBody>
+          <a:bodyPr wrap="square" lIns="0" rIns="0" tIns="0" bIns="0">
+            <a:spAutoFit/>
+          </a:bodyPr>
+          <a:lstStyle/>
+          <a:p>
+            <a:pPr algn="l">
+              <a:lnSpc>
+                <a:spcPct val="126000"/>
+              </a:lnSpc>
+            </a:pPr>
+            <a:r>
+              <a:rPr sz="1450" b="1" i="0">
+                <a:solidFill>
+                  <a:srgbClr val="1F4E79"/>
+                </a:solidFill>
+                <a:latin typeface="Calibri"/>
+              </a:rPr>
+              <a:t>Google Gemini</a:t>
+            </a:r>
+          </a:p>
+          <a:p>
+            <a:pPr algn="l">
+              <a:lnSpc>
+                <a:spcPct val="126000"/>
+              </a:lnSpc>
+            </a:pPr>
+            <a:r>
+              <a:rPr sz="1450" b="1" i="0">
+                <a:solidFill>
+                  <a:srgbClr val="1F4E79"/>
+                </a:solidFill>
+                <a:latin typeface="Calibri"/>
+              </a:rPr>
+              <a:t>3.6 Flash</a:t>
+            </a:r>
+          </a:p>
+        </p:txBody>
+      </p:sp>
+      <p:sp>
+        <p:nvSpPr>
+          <p:cNvPr id="26" name="Rounded Rectangle 25"/>
+          <p:cNvSpPr/>
+          <p:nvPr/>
+        </p:nvSpPr>
+        <p:spPr>
+          <a:xfrm>
+            <a:off x="658368" y="5596128"/>
+            <a:ext cx="10874959" cy="640080"/>
+          </a:xfrm>
+          <a:prstGeom prst="roundRect">
+            <a:avLst>
+              <a:gd name="adj" fmla="val 6000"/>
+            </a:avLst>
+          </a:prstGeom>
+          <a:solidFill>
+            <a:srgbClr val="F4F7FA"/>
+          </a:solidFill>
+          <a:ln>
+            <a:noFill/>
+          </a:ln>
+          <a:effectLst/>
+        </p:spPr>
+        <p:style>
+          <a:lnRef idx="1">
+            <a:schemeClr val="accent1"/>
+          </a:lnRef>
+          <a:fillRef idx="3">
+            <a:schemeClr val="accent1"/>
+          </a:fillRef>
+          <a:effectRef idx="2">
+            <a:schemeClr val="accent1"/>
+          </a:effectRef>
+          <a:fontRef idx="minor">
+            <a:schemeClr val="lt1"/>
+          </a:fontRef>
+        </p:style>
+        <p:txBody>
+          <a:bodyPr rtlCol="0" anchor="ctr"/>
+          <a:lstStyle/>
+          <a:p>
+            <a:pPr algn="ctr"/>
+          </a:p>
+        </p:txBody>
+      </p:sp>
+      <p:sp>
+        <p:nvSpPr>
+          <p:cNvPr id="27" name="TextBox 26"/>
+          <p:cNvSpPr txBox="1"/>
+          <p:nvPr/>
+        </p:nvSpPr>
+        <p:spPr>
+          <a:xfrm>
+            <a:off x="1042416" y="5769864"/>
+            <a:ext cx="10106863" cy="402336"/>
+          </a:xfrm>
+          <a:prstGeom prst="rect">
+            <a:avLst/>
+          </a:prstGeom>
+          <a:noFill/>
+        </p:spPr>
+        <p:txBody>
+          <a:bodyPr wrap="square" lIns="0" rIns="0" tIns="0" bIns="0">
+            <a:spAutoFit/>
+          </a:bodyPr>
+          <a:lstStyle/>
+          <a:p>
+            <a:pPr algn="l">
+              <a:lnSpc>
+                <a:spcPct val="125000"/>
+              </a:lnSpc>
+            </a:pPr>
+            <a:r>
+              <a:rPr sz="1600" b="1" i="0">
+                <a:solidFill>
+                  <a:srgbClr val="1B2733"/>
+                </a:solidFill>
+                <a:latin typeface="Calibri"/>
+              </a:rPr>
+              <a:t>Because ESCO is a published standard, “this skill is missing” means something a candidate could check.</a:t>
             </a:r>
           </a:p>
         </p:txBody>
@@ -8155,11 +8062,11 @@
             <a:r>
               <a:rPr sz="1200" b="1" i="0" spc="150">
                 <a:solidFill>
-                  <a:srgbClr val="1F4E79"/>
-                </a:solidFill>
-                <a:latin typeface="Calibri"/>
-              </a:rPr>
-              <a:t>THE MODULES</a:t>
+                  <a:srgbClr val="1E6B4F"/>
+                </a:solidFill>
+                <a:latin typeface="Calibri"/>
+              </a:rPr>
+              <a:t>MODULES 5, 5T AND 6A</a:t>
             </a:r>
           </a:p>
         </p:txBody>
@@ -8198,7 +8105,7 @@
                 </a:solidFill>
                 <a:latin typeface="Calibri"/>
               </a:rPr>
-              <a:t>Thirteen parts, each with one job</a:t>
+              <a:t>Running the interview</a:t>
             </a:r>
           </a:p>
         </p:txBody>
@@ -8218,7 +8125,7 @@
             <a:avLst/>
           </a:prstGeom>
           <a:solidFill>
-            <a:srgbClr val="1F4E79"/>
+            <a:srgbClr val="1E6B4F"/>
           </a:solidFill>
           <a:ln>
             <a:noFill/>
@@ -8294,8 +8201,8 @@
         </p:nvSpPr>
         <p:spPr>
           <a:xfrm>
-            <a:off x="658368" y="2029968"/>
-            <a:ext cx="822960" cy="329184"/>
+            <a:off x="658368" y="2066544"/>
+            <a:ext cx="1097280" cy="237744"/>
           </a:xfrm>
           <a:prstGeom prst="rect">
             <a:avLst/>
@@ -8314,13 +8221,13 @@
               </a:lnSpc>
             </a:pPr>
             <a:r>
-              <a:rPr sz="1700" b="1" i="0">
-                <a:solidFill>
-                  <a:srgbClr val="1F4E79"/>
-                </a:solidFill>
-                <a:latin typeface="Calibri"/>
-              </a:rPr>
-              <a:t>M1</a:t>
+              <a:rPr sz="1100" b="1" i="0" spc="120">
+                <a:solidFill>
+                  <a:srgbClr val="5A6B7B"/>
+                </a:solidFill>
+                <a:latin typeface="Calibri"/>
+              </a:rPr>
+              <a:t>MODULE</a:t>
             </a:r>
           </a:p>
         </p:txBody>
@@ -8333,8 +8240,8 @@
         </p:nvSpPr>
         <p:spPr>
           <a:xfrm>
-            <a:off x="1527048" y="2029968"/>
-            <a:ext cx="4434840" cy="329184"/>
+            <a:off x="2029968" y="2066544"/>
+            <a:ext cx="4572000" cy="237744"/>
           </a:xfrm>
           <a:prstGeom prst="rect">
             <a:avLst/>
@@ -8353,13 +8260,13 @@
               </a:lnSpc>
             </a:pPr>
             <a:r>
-              <a:rPr sz="1700" b="0" i="0">
-                <a:solidFill>
-                  <a:srgbClr val="1B2733"/>
-                </a:solidFill>
-                <a:latin typeface="Calibri"/>
-              </a:rPr>
-              <a:t>Reads the CV</a:t>
+              <a:rPr sz="1100" b="1" i="0" spc="120">
+                <a:solidFill>
+                  <a:srgbClr val="5A6B7B"/>
+                </a:solidFill>
+                <a:latin typeface="Calibri"/>
+              </a:rPr>
+              <a:t>WHAT IT DOES</a:t>
             </a:r>
           </a:p>
         </p:txBody>
@@ -8372,8 +8279,8 @@
         </p:nvSpPr>
         <p:spPr>
           <a:xfrm>
-            <a:off x="658368" y="2578608"/>
-            <a:ext cx="822960" cy="329184"/>
+            <a:off x="8339328" y="2066544"/>
+            <a:ext cx="3108960" cy="237744"/>
           </a:xfrm>
           <a:prstGeom prst="rect">
             <a:avLst/>
@@ -8392,1007 +8299,30 @@
               </a:lnSpc>
             </a:pPr>
             <a:r>
-              <a:rPr sz="1700" b="1" i="0">
-                <a:solidFill>
-                  <a:srgbClr val="1F4E79"/>
-                </a:solidFill>
-                <a:latin typeface="Calibri"/>
-              </a:rPr>
-              <a:t>M2</a:t>
-            </a:r>
-          </a:p>
-        </p:txBody>
-      </p:sp>
-      <p:sp>
-        <p:nvSpPr>
-          <p:cNvPr id="9" name="TextBox 8"/>
-          <p:cNvSpPr txBox="1"/>
-          <p:nvPr/>
-        </p:nvSpPr>
-        <p:spPr>
-          <a:xfrm>
-            <a:off x="1527048" y="2578608"/>
-            <a:ext cx="4434840" cy="329184"/>
-          </a:xfrm>
-          <a:prstGeom prst="rect">
-            <a:avLst/>
-          </a:prstGeom>
-          <a:noFill/>
-        </p:spPr>
-        <p:txBody>
-          <a:bodyPr wrap="square" lIns="0" rIns="0" tIns="0" bIns="0">
-            <a:spAutoFit/>
-          </a:bodyPr>
-          <a:lstStyle/>
-          <a:p>
-            <a:pPr algn="l">
-              <a:lnSpc>
-                <a:spcPct val="125000"/>
-              </a:lnSpc>
-            </a:pPr>
-            <a:r>
-              <a:rPr sz="1700" b="0" i="0">
-                <a:solidFill>
-                  <a:srgbClr val="1B2733"/>
-                </a:solidFill>
-                <a:latin typeface="Calibri"/>
-              </a:rPr>
-              <a:t>Reads the job advert</a:t>
-            </a:r>
-          </a:p>
-        </p:txBody>
-      </p:sp>
-      <p:sp>
-        <p:nvSpPr>
-          <p:cNvPr id="10" name="TextBox 9"/>
-          <p:cNvSpPr txBox="1"/>
-          <p:nvPr/>
-        </p:nvSpPr>
-        <p:spPr>
-          <a:xfrm>
-            <a:off x="658368" y="3127248"/>
-            <a:ext cx="822960" cy="329184"/>
-          </a:xfrm>
-          <a:prstGeom prst="rect">
-            <a:avLst/>
-          </a:prstGeom>
-          <a:noFill/>
-        </p:spPr>
-        <p:txBody>
-          <a:bodyPr wrap="square" lIns="0" rIns="0" tIns="0" bIns="0">
-            <a:spAutoFit/>
-          </a:bodyPr>
-          <a:lstStyle/>
-          <a:p>
-            <a:pPr algn="l">
-              <a:lnSpc>
-                <a:spcPct val="125000"/>
-              </a:lnSpc>
-            </a:pPr>
-            <a:r>
-              <a:rPr sz="1700" b="1" i="0">
-                <a:solidFill>
-                  <a:srgbClr val="1F4E79"/>
-                </a:solidFill>
-                <a:latin typeface="Calibri"/>
-              </a:rPr>
-              <a:t>M3</a:t>
-            </a:r>
-          </a:p>
-        </p:txBody>
-      </p:sp>
-      <p:sp>
-        <p:nvSpPr>
-          <p:cNvPr id="11" name="TextBox 10"/>
-          <p:cNvSpPr txBox="1"/>
-          <p:nvPr/>
-        </p:nvSpPr>
-        <p:spPr>
-          <a:xfrm>
-            <a:off x="1527048" y="3127248"/>
-            <a:ext cx="4434840" cy="329184"/>
-          </a:xfrm>
-          <a:prstGeom prst="rect">
-            <a:avLst/>
-          </a:prstGeom>
-          <a:noFill/>
-        </p:spPr>
-        <p:txBody>
-          <a:bodyPr wrap="square" lIns="0" rIns="0" tIns="0" bIns="0">
-            <a:spAutoFit/>
-          </a:bodyPr>
-          <a:lstStyle/>
-          <a:p>
-            <a:pPr algn="l">
-              <a:lnSpc>
-                <a:spcPct val="125000"/>
-              </a:lnSpc>
-            </a:pPr>
-            <a:r>
-              <a:rPr sz="1700" b="0" i="0">
-                <a:solidFill>
-                  <a:srgbClr val="1B2733"/>
-                </a:solidFill>
-                <a:latin typeface="Calibri"/>
-              </a:rPr>
-              <a:t>Compares them, finds the missing skills</a:t>
-            </a:r>
-          </a:p>
-        </p:txBody>
-      </p:sp>
-      <p:sp>
-        <p:nvSpPr>
-          <p:cNvPr id="12" name="TextBox 11"/>
-          <p:cNvSpPr txBox="1"/>
-          <p:nvPr/>
-        </p:nvSpPr>
-        <p:spPr>
-          <a:xfrm>
-            <a:off x="658368" y="3675888"/>
-            <a:ext cx="822960" cy="329184"/>
-          </a:xfrm>
-          <a:prstGeom prst="rect">
-            <a:avLst/>
-          </a:prstGeom>
-          <a:noFill/>
-        </p:spPr>
-        <p:txBody>
-          <a:bodyPr wrap="square" lIns="0" rIns="0" tIns="0" bIns="0">
-            <a:spAutoFit/>
-          </a:bodyPr>
-          <a:lstStyle/>
-          <a:p>
-            <a:pPr algn="l">
-              <a:lnSpc>
-                <a:spcPct val="125000"/>
-              </a:lnSpc>
-            </a:pPr>
-            <a:r>
-              <a:rPr sz="1700" b="1" i="0">
-                <a:solidFill>
-                  <a:srgbClr val="1F4E79"/>
-                </a:solidFill>
-                <a:latin typeface="Calibri"/>
-              </a:rPr>
-              <a:t>M4</a:t>
-            </a:r>
-          </a:p>
-        </p:txBody>
-      </p:sp>
-      <p:sp>
-        <p:nvSpPr>
-          <p:cNvPr id="13" name="TextBox 12"/>
-          <p:cNvSpPr txBox="1"/>
-          <p:nvPr/>
-        </p:nvSpPr>
-        <p:spPr>
-          <a:xfrm>
-            <a:off x="1527048" y="3675888"/>
-            <a:ext cx="4434840" cy="329184"/>
-          </a:xfrm>
-          <a:prstGeom prst="rect">
-            <a:avLst/>
-          </a:prstGeom>
-          <a:noFill/>
-        </p:spPr>
-        <p:txBody>
-          <a:bodyPr wrap="square" lIns="0" rIns="0" tIns="0" bIns="0">
-            <a:spAutoFit/>
-          </a:bodyPr>
-          <a:lstStyle/>
-          <a:p>
-            <a:pPr algn="l">
-              <a:lnSpc>
-                <a:spcPct val="125000"/>
-              </a:lnSpc>
-            </a:pPr>
-            <a:r>
-              <a:rPr sz="1700" b="0" i="0">
-                <a:solidFill>
-                  <a:srgbClr val="1B2733"/>
-                </a:solidFill>
-                <a:latin typeface="Calibri"/>
-              </a:rPr>
-              <a:t>Writes the questions, gaps first</a:t>
-            </a:r>
-          </a:p>
-        </p:txBody>
-      </p:sp>
-      <p:sp>
-        <p:nvSpPr>
-          <p:cNvPr id="14" name="TextBox 13"/>
-          <p:cNvSpPr txBox="1"/>
-          <p:nvPr/>
-        </p:nvSpPr>
-        <p:spPr>
-          <a:xfrm>
-            <a:off x="658368" y="4224528"/>
-            <a:ext cx="822960" cy="329184"/>
-          </a:xfrm>
-          <a:prstGeom prst="rect">
-            <a:avLst/>
-          </a:prstGeom>
-          <a:noFill/>
-        </p:spPr>
-        <p:txBody>
-          <a:bodyPr wrap="square" lIns="0" rIns="0" tIns="0" bIns="0">
-            <a:spAutoFit/>
-          </a:bodyPr>
-          <a:lstStyle/>
-          <a:p>
-            <a:pPr algn="l">
-              <a:lnSpc>
-                <a:spcPct val="125000"/>
-              </a:lnSpc>
-            </a:pPr>
-            <a:r>
-              <a:rPr sz="1700" b="1" i="0">
-                <a:solidFill>
-                  <a:srgbClr val="1E6B4F"/>
-                </a:solidFill>
-                <a:latin typeface="Calibri"/>
-              </a:rPr>
-              <a:t>M5</a:t>
-            </a:r>
-          </a:p>
-        </p:txBody>
-      </p:sp>
-      <p:sp>
-        <p:nvSpPr>
-          <p:cNvPr id="15" name="TextBox 14"/>
-          <p:cNvSpPr txBox="1"/>
-          <p:nvPr/>
-        </p:nvSpPr>
-        <p:spPr>
-          <a:xfrm>
-            <a:off x="1527048" y="4224528"/>
-            <a:ext cx="4434840" cy="329184"/>
-          </a:xfrm>
-          <a:prstGeom prst="rect">
-            <a:avLst/>
-          </a:prstGeom>
-          <a:noFill/>
-        </p:spPr>
-        <p:txBody>
-          <a:bodyPr wrap="square" lIns="0" rIns="0" tIns="0" bIns="0">
-            <a:spAutoFit/>
-          </a:bodyPr>
-          <a:lstStyle/>
-          <a:p>
-            <a:pPr algn="l">
-              <a:lnSpc>
-                <a:spcPct val="125000"/>
-              </a:lnSpc>
-            </a:pPr>
-            <a:r>
-              <a:rPr sz="1700" b="0" i="0">
-                <a:solidFill>
-                  <a:srgbClr val="1B2733"/>
-                </a:solidFill>
-                <a:latin typeface="Calibri"/>
-              </a:rPr>
-              <a:t>Runs the spoken interview</a:t>
-            </a:r>
-          </a:p>
-        </p:txBody>
-      </p:sp>
-      <p:sp>
-        <p:nvSpPr>
-          <p:cNvPr id="16" name="TextBox 15"/>
-          <p:cNvSpPr txBox="1"/>
-          <p:nvPr/>
-        </p:nvSpPr>
-        <p:spPr>
-          <a:xfrm>
-            <a:off x="658368" y="4773168"/>
-            <a:ext cx="822960" cy="329184"/>
-          </a:xfrm>
-          <a:prstGeom prst="rect">
-            <a:avLst/>
-          </a:prstGeom>
-          <a:noFill/>
-        </p:spPr>
-        <p:txBody>
-          <a:bodyPr wrap="square" lIns="0" rIns="0" tIns="0" bIns="0">
-            <a:spAutoFit/>
-          </a:bodyPr>
-          <a:lstStyle/>
-          <a:p>
-            <a:pPr algn="l">
-              <a:lnSpc>
-                <a:spcPct val="125000"/>
-              </a:lnSpc>
-            </a:pPr>
-            <a:r>
-              <a:rPr sz="1700" b="1" i="0">
-                <a:solidFill>
-                  <a:srgbClr val="1E6B4F"/>
-                </a:solidFill>
-                <a:latin typeface="Calibri"/>
-              </a:rPr>
-              <a:t>M5t</a:t>
-            </a:r>
-          </a:p>
-        </p:txBody>
-      </p:sp>
-      <p:sp>
-        <p:nvSpPr>
-          <p:cNvPr id="17" name="TextBox 16"/>
-          <p:cNvSpPr txBox="1"/>
-          <p:nvPr/>
-        </p:nvSpPr>
-        <p:spPr>
-          <a:xfrm>
-            <a:off x="1527048" y="4773168"/>
-            <a:ext cx="4434840" cy="329184"/>
-          </a:xfrm>
-          <a:prstGeom prst="rect">
-            <a:avLst/>
-          </a:prstGeom>
-          <a:noFill/>
-        </p:spPr>
-        <p:txBody>
-          <a:bodyPr wrap="square" lIns="0" rIns="0" tIns="0" bIns="0">
-            <a:spAutoFit/>
-          </a:bodyPr>
-          <a:lstStyle/>
-          <a:p>
-            <a:pPr algn="l">
-              <a:lnSpc>
-                <a:spcPct val="125000"/>
-              </a:lnSpc>
-            </a:pPr>
-            <a:r>
-              <a:rPr sz="1700" b="0" i="0">
-                <a:solidFill>
-                  <a:srgbClr val="1B2733"/>
-                </a:solidFill>
-                <a:latin typeface="Calibri"/>
-              </a:rPr>
-              <a:t>Runs the typed interview</a:t>
-            </a:r>
-          </a:p>
-        </p:txBody>
-      </p:sp>
-      <p:sp>
-        <p:nvSpPr>
-          <p:cNvPr id="18" name="TextBox 17"/>
-          <p:cNvSpPr txBox="1"/>
-          <p:nvPr/>
-        </p:nvSpPr>
-        <p:spPr>
-          <a:xfrm>
-            <a:off x="658368" y="5321808"/>
-            <a:ext cx="822960" cy="329184"/>
-          </a:xfrm>
-          <a:prstGeom prst="rect">
-            <a:avLst/>
-          </a:prstGeom>
-          <a:noFill/>
-        </p:spPr>
-        <p:txBody>
-          <a:bodyPr wrap="square" lIns="0" rIns="0" tIns="0" bIns="0">
-            <a:spAutoFit/>
-          </a:bodyPr>
-          <a:lstStyle/>
-          <a:p>
-            <a:pPr algn="l">
-              <a:lnSpc>
-                <a:spcPct val="125000"/>
-              </a:lnSpc>
-            </a:pPr>
-            <a:r>
-              <a:rPr sz="1700" b="1" i="0">
-                <a:solidFill>
-                  <a:srgbClr val="1E6B4F"/>
-                </a:solidFill>
-                <a:latin typeface="Calibri"/>
-              </a:rPr>
-              <a:t>M6a</a:t>
-            </a:r>
-          </a:p>
-        </p:txBody>
-      </p:sp>
-      <p:sp>
-        <p:nvSpPr>
-          <p:cNvPr id="19" name="TextBox 18"/>
-          <p:cNvSpPr txBox="1"/>
-          <p:nvPr/>
-        </p:nvSpPr>
-        <p:spPr>
-          <a:xfrm>
-            <a:off x="1527048" y="5321808"/>
-            <a:ext cx="4434840" cy="329184"/>
-          </a:xfrm>
-          <a:prstGeom prst="rect">
-            <a:avLst/>
-          </a:prstGeom>
-          <a:noFill/>
-        </p:spPr>
-        <p:txBody>
-          <a:bodyPr wrap="square" lIns="0" rIns="0" tIns="0" bIns="0">
-            <a:spAutoFit/>
-          </a:bodyPr>
-          <a:lstStyle/>
-          <a:p>
-            <a:pPr algn="l">
-              <a:lnSpc>
-                <a:spcPct val="125000"/>
-              </a:lnSpc>
-            </a:pPr>
-            <a:r>
-              <a:rPr sz="1700" b="0" i="0">
-                <a:solidFill>
-                  <a:srgbClr val="1B2733"/>
-                </a:solidFill>
-                <a:latin typeface="Calibri"/>
-              </a:rPr>
-              <a:t>Tracks how each skill is going</a:t>
-            </a:r>
-          </a:p>
-        </p:txBody>
-      </p:sp>
-      <p:sp>
-        <p:nvSpPr>
-          <p:cNvPr id="20" name="TextBox 19"/>
-          <p:cNvSpPr txBox="1"/>
-          <p:nvPr/>
-        </p:nvSpPr>
-        <p:spPr>
-          <a:xfrm>
-            <a:off x="6419088" y="2029968"/>
-            <a:ext cx="822960" cy="329184"/>
-          </a:xfrm>
-          <a:prstGeom prst="rect">
-            <a:avLst/>
-          </a:prstGeom>
-          <a:noFill/>
-        </p:spPr>
-        <p:txBody>
-          <a:bodyPr wrap="square" lIns="0" rIns="0" tIns="0" bIns="0">
-            <a:spAutoFit/>
-          </a:bodyPr>
-          <a:lstStyle/>
-          <a:p>
-            <a:pPr algn="l">
-              <a:lnSpc>
-                <a:spcPct val="125000"/>
-              </a:lnSpc>
-            </a:pPr>
-            <a:r>
-              <a:rPr sz="1700" b="1" i="0">
-                <a:solidFill>
-                  <a:srgbClr val="1E6B4F"/>
-                </a:solidFill>
-                <a:latin typeface="Calibri"/>
-              </a:rPr>
-              <a:t>M7</a:t>
-            </a:r>
-          </a:p>
-        </p:txBody>
-      </p:sp>
-      <p:sp>
-        <p:nvSpPr>
-          <p:cNvPr id="21" name="TextBox 20"/>
-          <p:cNvSpPr txBox="1"/>
-          <p:nvPr/>
-        </p:nvSpPr>
-        <p:spPr>
-          <a:xfrm>
-            <a:off x="7287768" y="2029968"/>
-            <a:ext cx="4434840" cy="329184"/>
-          </a:xfrm>
-          <a:prstGeom prst="rect">
-            <a:avLst/>
-          </a:prstGeom>
-          <a:noFill/>
-        </p:spPr>
-        <p:txBody>
-          <a:bodyPr wrap="square" lIns="0" rIns="0" tIns="0" bIns="0">
-            <a:spAutoFit/>
-          </a:bodyPr>
-          <a:lstStyle/>
-          <a:p>
-            <a:pPr algn="l">
-              <a:lnSpc>
-                <a:spcPct val="125000"/>
-              </a:lnSpc>
-            </a:pPr>
-            <a:r>
-              <a:rPr sz="1700" b="0" i="0">
-                <a:solidFill>
-                  <a:srgbClr val="1B2733"/>
-                </a:solidFill>
-                <a:latin typeface="Calibri"/>
-              </a:rPr>
-              <a:t>Watches attention (face)</a:t>
-            </a:r>
-          </a:p>
-        </p:txBody>
-      </p:sp>
-      <p:sp>
-        <p:nvSpPr>
-          <p:cNvPr id="22" name="TextBox 21"/>
-          <p:cNvSpPr txBox="1"/>
-          <p:nvPr/>
-        </p:nvSpPr>
-        <p:spPr>
-          <a:xfrm>
-            <a:off x="6419088" y="2578608"/>
-            <a:ext cx="822960" cy="329184"/>
-          </a:xfrm>
-          <a:prstGeom prst="rect">
-            <a:avLst/>
-          </a:prstGeom>
-          <a:noFill/>
-        </p:spPr>
-        <p:txBody>
-          <a:bodyPr wrap="square" lIns="0" rIns="0" tIns="0" bIns="0">
-            <a:spAutoFit/>
-          </a:bodyPr>
-          <a:lstStyle/>
-          <a:p>
-            <a:pPr algn="l">
-              <a:lnSpc>
-                <a:spcPct val="125000"/>
-              </a:lnSpc>
-            </a:pPr>
-            <a:r>
-              <a:rPr sz="1700" b="1" i="0">
-                <a:solidFill>
-                  <a:srgbClr val="1E6B4F"/>
-                </a:solidFill>
-                <a:latin typeface="Calibri"/>
-              </a:rPr>
-              <a:t>M8</a:t>
-            </a:r>
-          </a:p>
-        </p:txBody>
-      </p:sp>
-      <p:sp>
-        <p:nvSpPr>
-          <p:cNvPr id="23" name="TextBox 22"/>
-          <p:cNvSpPr txBox="1"/>
-          <p:nvPr/>
-        </p:nvSpPr>
-        <p:spPr>
-          <a:xfrm>
-            <a:off x="7287768" y="2578608"/>
-            <a:ext cx="4434840" cy="329184"/>
-          </a:xfrm>
-          <a:prstGeom prst="rect">
-            <a:avLst/>
-          </a:prstGeom>
-          <a:noFill/>
-        </p:spPr>
-        <p:txBody>
-          <a:bodyPr wrap="square" lIns="0" rIns="0" tIns="0" bIns="0">
-            <a:spAutoFit/>
-          </a:bodyPr>
-          <a:lstStyle/>
-          <a:p>
-            <a:pPr algn="l">
-              <a:lnSpc>
-                <a:spcPct val="125000"/>
-              </a:lnSpc>
-            </a:pPr>
-            <a:r>
-              <a:rPr sz="1700" b="0" i="0">
-                <a:solidFill>
-                  <a:srgbClr val="1B2733"/>
-                </a:solidFill>
-                <a:latin typeface="Calibri"/>
-              </a:rPr>
-              <a:t>Watches posture (body)</a:t>
-            </a:r>
-          </a:p>
-        </p:txBody>
-      </p:sp>
-      <p:sp>
-        <p:nvSpPr>
-          <p:cNvPr id="24" name="TextBox 23"/>
-          <p:cNvSpPr txBox="1"/>
-          <p:nvPr/>
-        </p:nvSpPr>
-        <p:spPr>
-          <a:xfrm>
-            <a:off x="6419088" y="3127248"/>
-            <a:ext cx="822960" cy="329184"/>
-          </a:xfrm>
-          <a:prstGeom prst="rect">
-            <a:avLst/>
-          </a:prstGeom>
-          <a:noFill/>
-        </p:spPr>
-        <p:txBody>
-          <a:bodyPr wrap="square" lIns="0" rIns="0" tIns="0" bIns="0">
-            <a:spAutoFit/>
-          </a:bodyPr>
-          <a:lstStyle/>
-          <a:p>
-            <a:pPr algn="l">
-              <a:lnSpc>
-                <a:spcPct val="125000"/>
-              </a:lnSpc>
-            </a:pPr>
-            <a:r>
-              <a:rPr sz="1700" b="1" i="0">
-                <a:solidFill>
-                  <a:srgbClr val="1E6B4F"/>
-                </a:solidFill>
-                <a:latin typeface="Calibri"/>
-              </a:rPr>
-              <a:t>M10</a:t>
-            </a:r>
-          </a:p>
-        </p:txBody>
-      </p:sp>
-      <p:sp>
-        <p:nvSpPr>
-          <p:cNvPr id="25" name="TextBox 24"/>
-          <p:cNvSpPr txBox="1"/>
-          <p:nvPr/>
-        </p:nvSpPr>
-        <p:spPr>
-          <a:xfrm>
-            <a:off x="7287768" y="3127248"/>
-            <a:ext cx="4434840" cy="329184"/>
-          </a:xfrm>
-          <a:prstGeom prst="rect">
-            <a:avLst/>
-          </a:prstGeom>
-          <a:noFill/>
-        </p:spPr>
-        <p:txBody>
-          <a:bodyPr wrap="square" lIns="0" rIns="0" tIns="0" bIns="0">
-            <a:spAutoFit/>
-          </a:bodyPr>
-          <a:lstStyle/>
-          <a:p>
-            <a:pPr algn="l">
-              <a:lnSpc>
-                <a:spcPct val="125000"/>
-              </a:lnSpc>
-            </a:pPr>
-            <a:r>
-              <a:rPr sz="1700" b="0" i="0">
-                <a:solidFill>
-                  <a:srgbClr val="1B2733"/>
-                </a:solidFill>
-                <a:latin typeface="Calibri"/>
-              </a:rPr>
-              <a:t>Listens to tone of voice</a:t>
-            </a:r>
-          </a:p>
-        </p:txBody>
-      </p:sp>
-      <p:sp>
-        <p:nvSpPr>
-          <p:cNvPr id="26" name="TextBox 25"/>
-          <p:cNvSpPr txBox="1"/>
-          <p:nvPr/>
-        </p:nvSpPr>
-        <p:spPr>
-          <a:xfrm>
-            <a:off x="6419088" y="3675888"/>
-            <a:ext cx="822960" cy="329184"/>
-          </a:xfrm>
-          <a:prstGeom prst="rect">
-            <a:avLst/>
-          </a:prstGeom>
-          <a:noFill/>
-        </p:spPr>
-        <p:txBody>
-          <a:bodyPr wrap="square" lIns="0" rIns="0" tIns="0" bIns="0">
-            <a:spAutoFit/>
-          </a:bodyPr>
-          <a:lstStyle/>
-          <a:p>
-            <a:pPr algn="l">
-              <a:lnSpc>
-                <a:spcPct val="125000"/>
-              </a:lnSpc>
-            </a:pPr>
-            <a:r>
-              <a:rPr sz="1700" b="1" i="0">
-                <a:solidFill>
-                  <a:srgbClr val="9A4415"/>
-                </a:solidFill>
-                <a:latin typeface="Calibri"/>
-              </a:rPr>
-              <a:t>M6</a:t>
-            </a:r>
-          </a:p>
-        </p:txBody>
-      </p:sp>
-      <p:sp>
-        <p:nvSpPr>
-          <p:cNvPr id="27" name="TextBox 26"/>
-          <p:cNvSpPr txBox="1"/>
-          <p:nvPr/>
-        </p:nvSpPr>
-        <p:spPr>
-          <a:xfrm>
-            <a:off x="7287768" y="3675888"/>
-            <a:ext cx="4434840" cy="329184"/>
-          </a:xfrm>
-          <a:prstGeom prst="rect">
-            <a:avLst/>
-          </a:prstGeom>
-          <a:noFill/>
-        </p:spPr>
-        <p:txBody>
-          <a:bodyPr wrap="square" lIns="0" rIns="0" tIns="0" bIns="0">
-            <a:spAutoFit/>
-          </a:bodyPr>
-          <a:lstStyle/>
-          <a:p>
-            <a:pPr algn="l">
-              <a:lnSpc>
-                <a:spcPct val="125000"/>
-              </a:lnSpc>
-            </a:pPr>
-            <a:r>
-              <a:rPr sz="1700" b="0" i="0">
-                <a:solidFill>
-                  <a:srgbClr val="1B2733"/>
-                </a:solidFill>
-                <a:latin typeface="Calibri"/>
-              </a:rPr>
-              <a:t>Marks each answer, twice</a:t>
-            </a:r>
-          </a:p>
-        </p:txBody>
-      </p:sp>
-      <p:sp>
-        <p:nvSpPr>
-          <p:cNvPr id="28" name="TextBox 27"/>
-          <p:cNvSpPr txBox="1"/>
-          <p:nvPr/>
-        </p:nvSpPr>
-        <p:spPr>
-          <a:xfrm>
-            <a:off x="6419088" y="4224528"/>
-            <a:ext cx="822960" cy="329184"/>
-          </a:xfrm>
-          <a:prstGeom prst="rect">
-            <a:avLst/>
-          </a:prstGeom>
-          <a:noFill/>
-        </p:spPr>
-        <p:txBody>
-          <a:bodyPr wrap="square" lIns="0" rIns="0" tIns="0" bIns="0">
-            <a:spAutoFit/>
-          </a:bodyPr>
-          <a:lstStyle/>
-          <a:p>
-            <a:pPr algn="l">
-              <a:lnSpc>
-                <a:spcPct val="125000"/>
-              </a:lnSpc>
-            </a:pPr>
-            <a:r>
-              <a:rPr sz="1700" b="1" i="0">
-                <a:solidFill>
-                  <a:srgbClr val="9A4415"/>
-                </a:solidFill>
-                <a:latin typeface="Calibri"/>
-              </a:rPr>
-              <a:t>M9</a:t>
-            </a:r>
-          </a:p>
-        </p:txBody>
-      </p:sp>
-      <p:sp>
-        <p:nvSpPr>
-          <p:cNvPr id="29" name="TextBox 28"/>
-          <p:cNvSpPr txBox="1"/>
-          <p:nvPr/>
-        </p:nvSpPr>
-        <p:spPr>
-          <a:xfrm>
-            <a:off x="7287768" y="4224528"/>
-            <a:ext cx="4434840" cy="329184"/>
-          </a:xfrm>
-          <a:prstGeom prst="rect">
-            <a:avLst/>
-          </a:prstGeom>
-          <a:noFill/>
-        </p:spPr>
-        <p:txBody>
-          <a:bodyPr wrap="square" lIns="0" rIns="0" tIns="0" bIns="0">
-            <a:spAutoFit/>
-          </a:bodyPr>
-          <a:lstStyle/>
-          <a:p>
-            <a:pPr algn="l">
-              <a:lnSpc>
-                <a:spcPct val="125000"/>
-              </a:lnSpc>
-            </a:pPr>
-            <a:r>
-              <a:rPr sz="1700" b="0" i="0">
-                <a:solidFill>
-                  <a:srgbClr val="1B2733"/>
-                </a:solidFill>
-                <a:latin typeface="Calibri"/>
-              </a:rPr>
-              <a:t>Checks for cheating</a:t>
-            </a:r>
-          </a:p>
-        </p:txBody>
-      </p:sp>
-      <p:sp>
-        <p:nvSpPr>
-          <p:cNvPr id="30" name="TextBox 29"/>
-          <p:cNvSpPr txBox="1"/>
-          <p:nvPr/>
-        </p:nvSpPr>
-        <p:spPr>
-          <a:xfrm>
-            <a:off x="6419088" y="4773168"/>
-            <a:ext cx="822960" cy="329184"/>
-          </a:xfrm>
-          <a:prstGeom prst="rect">
-            <a:avLst/>
-          </a:prstGeom>
-          <a:noFill/>
-        </p:spPr>
-        <p:txBody>
-          <a:bodyPr wrap="square" lIns="0" rIns="0" tIns="0" bIns="0">
-            <a:spAutoFit/>
-          </a:bodyPr>
-          <a:lstStyle/>
-          <a:p>
-            <a:pPr algn="l">
-              <a:lnSpc>
-                <a:spcPct val="125000"/>
-              </a:lnSpc>
-            </a:pPr>
-            <a:r>
-              <a:rPr sz="1700" b="1" i="0">
-                <a:solidFill>
-                  <a:srgbClr val="4C3A8C"/>
-                </a:solidFill>
-                <a:latin typeface="Calibri"/>
-              </a:rPr>
-              <a:t>M11</a:t>
-            </a:r>
-          </a:p>
-        </p:txBody>
-      </p:sp>
-      <p:sp>
-        <p:nvSpPr>
-          <p:cNvPr id="31" name="TextBox 30"/>
-          <p:cNvSpPr txBox="1"/>
-          <p:nvPr/>
-        </p:nvSpPr>
-        <p:spPr>
-          <a:xfrm>
-            <a:off x="7287768" y="4773168"/>
-            <a:ext cx="4434840" cy="329184"/>
-          </a:xfrm>
-          <a:prstGeom prst="rect">
-            <a:avLst/>
-          </a:prstGeom>
-          <a:noFill/>
-        </p:spPr>
-        <p:txBody>
-          <a:bodyPr wrap="square" lIns="0" rIns="0" tIns="0" bIns="0">
-            <a:spAutoFit/>
-          </a:bodyPr>
-          <a:lstStyle/>
-          <a:p>
-            <a:pPr algn="l">
-              <a:lnSpc>
-                <a:spcPct val="125000"/>
-              </a:lnSpc>
-            </a:pPr>
-            <a:r>
-              <a:rPr sz="1700" b="0" i="0">
-                <a:solidFill>
-                  <a:srgbClr val="1B2733"/>
-                </a:solidFill>
-                <a:latin typeface="Calibri"/>
-              </a:rPr>
-              <a:t>Adds everything up</a:t>
-            </a:r>
-          </a:p>
-        </p:txBody>
-      </p:sp>
-      <p:sp>
-        <p:nvSpPr>
-          <p:cNvPr id="32" name="TextBox 31"/>
-          <p:cNvSpPr txBox="1"/>
-          <p:nvPr/>
-        </p:nvSpPr>
-        <p:spPr>
-          <a:xfrm>
-            <a:off x="6419088" y="5321808"/>
-            <a:ext cx="822960" cy="329184"/>
-          </a:xfrm>
-          <a:prstGeom prst="rect">
-            <a:avLst/>
-          </a:prstGeom>
-          <a:noFill/>
-        </p:spPr>
-        <p:txBody>
-          <a:bodyPr wrap="square" lIns="0" rIns="0" tIns="0" bIns="0">
-            <a:spAutoFit/>
-          </a:bodyPr>
-          <a:lstStyle/>
-          <a:p>
-            <a:pPr algn="l">
-              <a:lnSpc>
-                <a:spcPct val="125000"/>
-              </a:lnSpc>
-            </a:pPr>
-            <a:r>
-              <a:rPr sz="1700" b="1" i="0">
-                <a:solidFill>
-                  <a:srgbClr val="4C3A8C"/>
-                </a:solidFill>
-                <a:latin typeface="Calibri"/>
-              </a:rPr>
-              <a:t>M12</a:t>
-            </a:r>
-          </a:p>
-        </p:txBody>
-      </p:sp>
-      <p:sp>
-        <p:nvSpPr>
-          <p:cNvPr id="33" name="TextBox 32"/>
-          <p:cNvSpPr txBox="1"/>
-          <p:nvPr/>
-        </p:nvSpPr>
-        <p:spPr>
-          <a:xfrm>
-            <a:off x="7287768" y="5321808"/>
-            <a:ext cx="4434840" cy="329184"/>
-          </a:xfrm>
-          <a:prstGeom prst="rect">
-            <a:avLst/>
-          </a:prstGeom>
-          <a:noFill/>
-        </p:spPr>
-        <p:txBody>
-          <a:bodyPr wrap="square" lIns="0" rIns="0" tIns="0" bIns="0">
-            <a:spAutoFit/>
-          </a:bodyPr>
-          <a:lstStyle/>
-          <a:p>
-            <a:pPr algn="l">
-              <a:lnSpc>
-                <a:spcPct val="125000"/>
-              </a:lnSpc>
-            </a:pPr>
-            <a:r>
-              <a:rPr sz="1700" b="0" i="0">
-                <a:solidFill>
-                  <a:srgbClr val="1B2733"/>
-                </a:solidFill>
-                <a:latin typeface="Calibri"/>
-              </a:rPr>
-              <a:t>Writes the final report</a:t>
-            </a:r>
-          </a:p>
-        </p:txBody>
-      </p:sp>
-      <p:sp>
-        <p:nvSpPr>
-          <p:cNvPr id="34" name="Rounded Rectangle 33"/>
+              <a:rPr sz="1100" b="1" i="0" spc="120">
+                <a:solidFill>
+                  <a:srgbClr val="5A6B7B"/>
+                </a:solidFill>
+                <a:latin typeface="Calibri"/>
+              </a:rPr>
+              <a:t>BUILT WITH</a:t>
+            </a:r>
+          </a:p>
+        </p:txBody>
+      </p:sp>
+      <p:sp>
+        <p:nvSpPr>
+          <p:cNvPr id="9" name="Rectangle 8"/>
           <p:cNvSpPr/>
           <p:nvPr/>
         </p:nvSpPr>
         <p:spPr>
           <a:xfrm>
-            <a:off x="658368" y="5532120"/>
-            <a:ext cx="10874959" cy="685800"/>
-          </a:xfrm>
-          <a:prstGeom prst="roundRect">
-            <a:avLst>
-              <a:gd name="adj" fmla="val 6000"/>
-            </a:avLst>
+            <a:off x="658368" y="2377440"/>
+            <a:ext cx="10874959" cy="12801"/>
+          </a:xfrm>
+          <a:prstGeom prst="rect">
+            <a:avLst/>
           </a:prstGeom>
           <a:solidFill>
             <a:srgbClr val="F4F7FA"/>
@@ -9426,14 +8356,576 @@
       </p:sp>
       <p:sp>
         <p:nvSpPr>
-          <p:cNvPr id="35" name="TextBox 34"/>
-          <p:cNvSpPr txBox="1"/>
-          <p:nvPr/>
-        </p:nvSpPr>
-        <p:spPr>
-          <a:xfrm>
-            <a:off x="1042416" y="5724144"/>
-            <a:ext cx="10106863" cy="411480"/>
+          <p:cNvPr id="10" name="TextBox 9"/>
+          <p:cNvSpPr txBox="1"/>
+          <p:nvPr/>
+        </p:nvSpPr>
+        <p:spPr>
+          <a:xfrm>
+            <a:off x="658368" y="2450592"/>
+            <a:ext cx="1188720" cy="310896"/>
+          </a:xfrm>
+          <a:prstGeom prst="rect">
+            <a:avLst/>
+          </a:prstGeom>
+          <a:noFill/>
+        </p:spPr>
+        <p:txBody>
+          <a:bodyPr wrap="square" lIns="0" rIns="0" tIns="0" bIns="0">
+            <a:spAutoFit/>
+          </a:bodyPr>
+          <a:lstStyle/>
+          <a:p>
+            <a:pPr algn="l">
+              <a:lnSpc>
+                <a:spcPct val="125000"/>
+              </a:lnSpc>
+            </a:pPr>
+            <a:r>
+              <a:rPr sz="1900" b="1" i="0">
+                <a:solidFill>
+                  <a:srgbClr val="1E6B4F"/>
+                </a:solidFill>
+                <a:latin typeface="Calibri"/>
+              </a:rPr>
+              <a:t>M5</a:t>
+            </a:r>
+          </a:p>
+        </p:txBody>
+      </p:sp>
+      <p:sp>
+        <p:nvSpPr>
+          <p:cNvPr id="11" name="TextBox 10"/>
+          <p:cNvSpPr txBox="1"/>
+          <p:nvPr/>
+        </p:nvSpPr>
+        <p:spPr>
+          <a:xfrm>
+            <a:off x="2029968" y="2450592"/>
+            <a:ext cx="6035040" cy="292608"/>
+          </a:xfrm>
+          <a:prstGeom prst="rect">
+            <a:avLst/>
+          </a:prstGeom>
+          <a:noFill/>
+        </p:spPr>
+        <p:txBody>
+          <a:bodyPr wrap="square" lIns="0" rIns="0" tIns="0" bIns="0">
+            <a:spAutoFit/>
+          </a:bodyPr>
+          <a:lstStyle/>
+          <a:p>
+            <a:pPr algn="l">
+              <a:lnSpc>
+                <a:spcPct val="125000"/>
+              </a:lnSpc>
+            </a:pPr>
+            <a:r>
+              <a:rPr sz="1700" b="1" i="0">
+                <a:solidFill>
+                  <a:srgbClr val="1B2733"/>
+                </a:solidFill>
+                <a:latin typeface="Calibri"/>
+              </a:rPr>
+              <a:t>Runs the spoken interview</a:t>
+            </a:r>
+          </a:p>
+        </p:txBody>
+      </p:sp>
+      <p:sp>
+        <p:nvSpPr>
+          <p:cNvPr id="12" name="TextBox 11"/>
+          <p:cNvSpPr txBox="1"/>
+          <p:nvPr/>
+        </p:nvSpPr>
+        <p:spPr>
+          <a:xfrm>
+            <a:off x="2029968" y="2761488"/>
+            <a:ext cx="6035040" cy="566928"/>
+          </a:xfrm>
+          <a:prstGeom prst="rect">
+            <a:avLst/>
+          </a:prstGeom>
+          <a:noFill/>
+        </p:spPr>
+        <p:txBody>
+          <a:bodyPr wrap="square" lIns="0" rIns="0" tIns="0" bIns="0">
+            <a:spAutoFit/>
+          </a:bodyPr>
+          <a:lstStyle/>
+          <a:p>
+            <a:pPr algn="l">
+              <a:lnSpc>
+                <a:spcPct val="126000"/>
+              </a:lnSpc>
+            </a:pPr>
+            <a:r>
+              <a:rPr sz="1450" b="0" i="0">
+                <a:solidFill>
+                  <a:srgbClr val="5A6B7B"/>
+                </a:solidFill>
+                <a:latin typeface="Calibri"/>
+              </a:rPr>
+              <a:t>Shows each question, speaks it aloud, listens to the answer, decides whether to dig deeper, and saves the transcript.</a:t>
+            </a:r>
+          </a:p>
+        </p:txBody>
+      </p:sp>
+      <p:sp>
+        <p:nvSpPr>
+          <p:cNvPr id="13" name="TextBox 12"/>
+          <p:cNvSpPr txBox="1"/>
+          <p:nvPr/>
+        </p:nvSpPr>
+        <p:spPr>
+          <a:xfrm>
+            <a:off x="8339328" y="2468880"/>
+            <a:ext cx="3200400" cy="731520"/>
+          </a:xfrm>
+          <a:prstGeom prst="rect">
+            <a:avLst/>
+          </a:prstGeom>
+          <a:noFill/>
+        </p:spPr>
+        <p:txBody>
+          <a:bodyPr wrap="square" lIns="0" rIns="0" tIns="0" bIns="0">
+            <a:spAutoFit/>
+          </a:bodyPr>
+          <a:lstStyle/>
+          <a:p>
+            <a:pPr algn="l">
+              <a:lnSpc>
+                <a:spcPct val="126000"/>
+              </a:lnSpc>
+            </a:pPr>
+            <a:r>
+              <a:rPr sz="1450" b="1" i="0">
+                <a:solidFill>
+                  <a:srgbClr val="1E6B4F"/>
+                </a:solidFill>
+                <a:latin typeface="Calibri"/>
+              </a:rPr>
+              <a:t>LiveKit</a:t>
+            </a:r>
+          </a:p>
+          <a:p>
+            <a:pPr algn="l">
+              <a:lnSpc>
+                <a:spcPct val="126000"/>
+              </a:lnSpc>
+            </a:pPr>
+            <a:r>
+              <a:rPr sz="1450" b="1" i="0">
+                <a:solidFill>
+                  <a:srgbClr val="1E6B4F"/>
+                </a:solidFill>
+                <a:latin typeface="Calibri"/>
+              </a:rPr>
+              <a:t>+ Deepgram Nova-3</a:t>
+            </a:r>
+          </a:p>
+          <a:p>
+            <a:pPr algn="l">
+              <a:lnSpc>
+                <a:spcPct val="126000"/>
+              </a:lnSpc>
+            </a:pPr>
+            <a:r>
+              <a:rPr sz="1450" b="1" i="0">
+                <a:solidFill>
+                  <a:srgbClr val="1E6B4F"/>
+                </a:solidFill>
+                <a:latin typeface="Calibri"/>
+              </a:rPr>
+              <a:t>+ ElevenLabs</a:t>
+            </a:r>
+          </a:p>
+        </p:txBody>
+      </p:sp>
+      <p:sp>
+        <p:nvSpPr>
+          <p:cNvPr id="14" name="TextBox 13"/>
+          <p:cNvSpPr txBox="1"/>
+          <p:nvPr/>
+        </p:nvSpPr>
+        <p:spPr>
+          <a:xfrm>
+            <a:off x="658368" y="3419856"/>
+            <a:ext cx="1188720" cy="310896"/>
+          </a:xfrm>
+          <a:prstGeom prst="rect">
+            <a:avLst/>
+          </a:prstGeom>
+          <a:noFill/>
+        </p:spPr>
+        <p:txBody>
+          <a:bodyPr wrap="square" lIns="0" rIns="0" tIns="0" bIns="0">
+            <a:spAutoFit/>
+          </a:bodyPr>
+          <a:lstStyle/>
+          <a:p>
+            <a:pPr algn="l">
+              <a:lnSpc>
+                <a:spcPct val="125000"/>
+              </a:lnSpc>
+            </a:pPr>
+            <a:r>
+              <a:rPr sz="1900" b="1" i="0">
+                <a:solidFill>
+                  <a:srgbClr val="1E6B4F"/>
+                </a:solidFill>
+                <a:latin typeface="Calibri"/>
+              </a:rPr>
+              <a:t>M5t</a:t>
+            </a:r>
+          </a:p>
+        </p:txBody>
+      </p:sp>
+      <p:sp>
+        <p:nvSpPr>
+          <p:cNvPr id="15" name="TextBox 14"/>
+          <p:cNvSpPr txBox="1"/>
+          <p:nvPr/>
+        </p:nvSpPr>
+        <p:spPr>
+          <a:xfrm>
+            <a:off x="2029968" y="3419856"/>
+            <a:ext cx="6035040" cy="292608"/>
+          </a:xfrm>
+          <a:prstGeom prst="rect">
+            <a:avLst/>
+          </a:prstGeom>
+          <a:noFill/>
+        </p:spPr>
+        <p:txBody>
+          <a:bodyPr wrap="square" lIns="0" rIns="0" tIns="0" bIns="0">
+            <a:spAutoFit/>
+          </a:bodyPr>
+          <a:lstStyle/>
+          <a:p>
+            <a:pPr algn="l">
+              <a:lnSpc>
+                <a:spcPct val="125000"/>
+              </a:lnSpc>
+            </a:pPr>
+            <a:r>
+              <a:rPr sz="1700" b="1" i="0">
+                <a:solidFill>
+                  <a:srgbClr val="1B2733"/>
+                </a:solidFill>
+                <a:latin typeface="Calibri"/>
+              </a:rPr>
+              <a:t>Runs the typed interview</a:t>
+            </a:r>
+          </a:p>
+        </p:txBody>
+      </p:sp>
+      <p:sp>
+        <p:nvSpPr>
+          <p:cNvPr id="16" name="TextBox 15"/>
+          <p:cNvSpPr txBox="1"/>
+          <p:nvPr/>
+        </p:nvSpPr>
+        <p:spPr>
+          <a:xfrm>
+            <a:off x="2029968" y="3730752"/>
+            <a:ext cx="6035040" cy="566928"/>
+          </a:xfrm>
+          <a:prstGeom prst="rect">
+            <a:avLst/>
+          </a:prstGeom>
+          <a:noFill/>
+        </p:spPr>
+        <p:txBody>
+          <a:bodyPr wrap="square" lIns="0" rIns="0" tIns="0" bIns="0">
+            <a:spAutoFit/>
+          </a:bodyPr>
+          <a:lstStyle/>
+          <a:p>
+            <a:pPr algn="l">
+              <a:lnSpc>
+                <a:spcPct val="126000"/>
+              </a:lnSpc>
+            </a:pPr>
+            <a:r>
+              <a:rPr sz="1450" b="0" i="0">
+                <a:solidFill>
+                  <a:srgbClr val="5A6B7B"/>
+                </a:solidFill>
+                <a:latin typeface="Calibri"/>
+              </a:rPr>
+              <a:t>The same interview answered in a chat box. Produces an identical transcript, so nothing afterwards knows which mode ran.</a:t>
+            </a:r>
+          </a:p>
+        </p:txBody>
+      </p:sp>
+      <p:sp>
+        <p:nvSpPr>
+          <p:cNvPr id="17" name="TextBox 16"/>
+          <p:cNvSpPr txBox="1"/>
+          <p:nvPr/>
+        </p:nvSpPr>
+        <p:spPr>
+          <a:xfrm>
+            <a:off x="8339328" y="3438144"/>
+            <a:ext cx="3200400" cy="731520"/>
+          </a:xfrm>
+          <a:prstGeom prst="rect">
+            <a:avLst/>
+          </a:prstGeom>
+          <a:noFill/>
+        </p:spPr>
+        <p:txBody>
+          <a:bodyPr wrap="square" lIns="0" rIns="0" tIns="0" bIns="0">
+            <a:spAutoFit/>
+          </a:bodyPr>
+          <a:lstStyle/>
+          <a:p>
+            <a:pPr algn="l">
+              <a:lnSpc>
+                <a:spcPct val="126000"/>
+              </a:lnSpc>
+            </a:pPr>
+            <a:r>
+              <a:rPr sz="1450" b="1" i="0">
+                <a:solidFill>
+                  <a:srgbClr val="1E6B4F"/>
+                </a:solidFill>
+                <a:latin typeface="Calibri"/>
+              </a:rPr>
+              <a:t>FastAPI</a:t>
+            </a:r>
+          </a:p>
+        </p:txBody>
+      </p:sp>
+      <p:sp>
+        <p:nvSpPr>
+          <p:cNvPr id="18" name="TextBox 17"/>
+          <p:cNvSpPr txBox="1"/>
+          <p:nvPr/>
+        </p:nvSpPr>
+        <p:spPr>
+          <a:xfrm>
+            <a:off x="658368" y="4389120"/>
+            <a:ext cx="1188720" cy="310896"/>
+          </a:xfrm>
+          <a:prstGeom prst="rect">
+            <a:avLst/>
+          </a:prstGeom>
+          <a:noFill/>
+        </p:spPr>
+        <p:txBody>
+          <a:bodyPr wrap="square" lIns="0" rIns="0" tIns="0" bIns="0">
+            <a:spAutoFit/>
+          </a:bodyPr>
+          <a:lstStyle/>
+          <a:p>
+            <a:pPr algn="l">
+              <a:lnSpc>
+                <a:spcPct val="125000"/>
+              </a:lnSpc>
+            </a:pPr>
+            <a:r>
+              <a:rPr sz="1900" b="1" i="0">
+                <a:solidFill>
+                  <a:srgbClr val="1E6B4F"/>
+                </a:solidFill>
+                <a:latin typeface="Calibri"/>
+              </a:rPr>
+              <a:t>M6a</a:t>
+            </a:r>
+          </a:p>
+        </p:txBody>
+      </p:sp>
+      <p:sp>
+        <p:nvSpPr>
+          <p:cNvPr id="19" name="TextBox 18"/>
+          <p:cNvSpPr txBox="1"/>
+          <p:nvPr/>
+        </p:nvSpPr>
+        <p:spPr>
+          <a:xfrm>
+            <a:off x="2029968" y="4389120"/>
+            <a:ext cx="6035040" cy="292608"/>
+          </a:xfrm>
+          <a:prstGeom prst="rect">
+            <a:avLst/>
+          </a:prstGeom>
+          <a:noFill/>
+        </p:spPr>
+        <p:txBody>
+          <a:bodyPr wrap="square" lIns="0" rIns="0" tIns="0" bIns="0">
+            <a:spAutoFit/>
+          </a:bodyPr>
+          <a:lstStyle/>
+          <a:p>
+            <a:pPr algn="l">
+              <a:lnSpc>
+                <a:spcPct val="125000"/>
+              </a:lnSpc>
+            </a:pPr>
+            <a:r>
+              <a:rPr sz="1700" b="1" i="0">
+                <a:solidFill>
+                  <a:srgbClr val="1B2733"/>
+                </a:solidFill>
+                <a:latin typeface="Calibri"/>
+              </a:rPr>
+              <a:t>Tracks how each skill is going</a:t>
+            </a:r>
+          </a:p>
+        </p:txBody>
+      </p:sp>
+      <p:sp>
+        <p:nvSpPr>
+          <p:cNvPr id="20" name="TextBox 19"/>
+          <p:cNvSpPr txBox="1"/>
+          <p:nvPr/>
+        </p:nvSpPr>
+        <p:spPr>
+          <a:xfrm>
+            <a:off x="2029968" y="4700016"/>
+            <a:ext cx="6035040" cy="566928"/>
+          </a:xfrm>
+          <a:prstGeom prst="rect">
+            <a:avLst/>
+          </a:prstGeom>
+          <a:noFill/>
+        </p:spPr>
+        <p:txBody>
+          <a:bodyPr wrap="square" lIns="0" rIns="0" tIns="0" bIns="0">
+            <a:spAutoFit/>
+          </a:bodyPr>
+          <a:lstStyle/>
+          <a:p>
+            <a:pPr algn="l">
+              <a:lnSpc>
+                <a:spcPct val="126000"/>
+              </a:lnSpc>
+            </a:pPr>
+            <a:r>
+              <a:rPr sz="1450" b="0" i="0">
+                <a:solidFill>
+                  <a:srgbClr val="5A6B7B"/>
+                </a:solidFill>
+                <a:latin typeface="Calibri"/>
+              </a:rPr>
+              <a:t>Keeps a live note on every skill — not asked, asked, answered well, answered badly — which decides whether a follow-up is needed.</a:t>
+            </a:r>
+          </a:p>
+        </p:txBody>
+      </p:sp>
+      <p:sp>
+        <p:nvSpPr>
+          <p:cNvPr id="21" name="TextBox 20"/>
+          <p:cNvSpPr txBox="1"/>
+          <p:nvPr/>
+        </p:nvSpPr>
+        <p:spPr>
+          <a:xfrm>
+            <a:off x="8339328" y="4407408"/>
+            <a:ext cx="3200400" cy="731520"/>
+          </a:xfrm>
+          <a:prstGeom prst="rect">
+            <a:avLst/>
+          </a:prstGeom>
+          <a:noFill/>
+        </p:spPr>
+        <p:txBody>
+          <a:bodyPr wrap="square" lIns="0" rIns="0" tIns="0" bIns="0">
+            <a:spAutoFit/>
+          </a:bodyPr>
+          <a:lstStyle/>
+          <a:p>
+            <a:pPr algn="l">
+              <a:lnSpc>
+                <a:spcPct val="126000"/>
+              </a:lnSpc>
+            </a:pPr>
+            <a:r>
+              <a:rPr sz="1450" b="1" i="0">
+                <a:solidFill>
+                  <a:srgbClr val="1E6B4F"/>
+                </a:solidFill>
+                <a:latin typeface="Calibri"/>
+              </a:rPr>
+              <a:t>Plain Python</a:t>
+            </a:r>
+          </a:p>
+          <a:p>
+            <a:pPr algn="l">
+              <a:lnSpc>
+                <a:spcPct val="126000"/>
+              </a:lnSpc>
+            </a:pPr>
+            <a:r>
+              <a:rPr sz="1450" b="1" i="0">
+                <a:solidFill>
+                  <a:srgbClr val="1E6B4F"/>
+                </a:solidFill>
+                <a:latin typeface="Calibri"/>
+              </a:rPr>
+              <a:t>(state machine)</a:t>
+            </a:r>
+          </a:p>
+        </p:txBody>
+      </p:sp>
+      <p:sp>
+        <p:nvSpPr>
+          <p:cNvPr id="22" name="Rounded Rectangle 21"/>
+          <p:cNvSpPr/>
+          <p:nvPr/>
+        </p:nvSpPr>
+        <p:spPr>
+          <a:xfrm>
+            <a:off x="658368" y="5596128"/>
+            <a:ext cx="10874959" cy="640080"/>
+          </a:xfrm>
+          <a:prstGeom prst="roundRect">
+            <a:avLst>
+              <a:gd name="adj" fmla="val 6000"/>
+            </a:avLst>
+          </a:prstGeom>
+          <a:solidFill>
+            <a:srgbClr val="F4F7FA"/>
+          </a:solidFill>
+          <a:ln>
+            <a:noFill/>
+          </a:ln>
+          <a:effectLst/>
+        </p:spPr>
+        <p:style>
+          <a:lnRef idx="1">
+            <a:schemeClr val="accent1"/>
+          </a:lnRef>
+          <a:fillRef idx="3">
+            <a:schemeClr val="accent1"/>
+          </a:fillRef>
+          <a:effectRef idx="2">
+            <a:schemeClr val="accent1"/>
+          </a:effectRef>
+          <a:fontRef idx="minor">
+            <a:schemeClr val="lt1"/>
+          </a:fontRef>
+        </p:style>
+        <p:txBody>
+          <a:bodyPr rtlCol="0" anchor="ctr"/>
+          <a:lstStyle/>
+          <a:p>
+            <a:pPr algn="ctr"/>
+          </a:p>
+        </p:txBody>
+      </p:sp>
+      <p:sp>
+        <p:nvSpPr>
+          <p:cNvPr id="23" name="TextBox 22"/>
+          <p:cNvSpPr txBox="1"/>
+          <p:nvPr/>
+        </p:nvSpPr>
+        <p:spPr>
+          <a:xfrm>
+            <a:off x="1042416" y="5769864"/>
+            <a:ext cx="10106863" cy="402336"/>
           </a:xfrm>
           <a:prstGeom prst="rect">
             <a:avLst/>
@@ -9511,11 +9003,11 @@
             <a:r>
               <a:rPr sz="1200" b="1" i="0" spc="150">
                 <a:solidFill>
-                  <a:srgbClr val="1F4E79"/>
-                </a:solidFill>
-                <a:latin typeface="Calibri"/>
-              </a:rPr>
-              <a:t>TECHNOLOGY</a:t>
+                  <a:srgbClr val="1E6B4F"/>
+                </a:solidFill>
+                <a:latin typeface="Calibri"/>
+              </a:rPr>
+              <a:t>MODULES 7, 8 AND 10</a:t>
             </a:r>
           </a:p>
         </p:txBody>
@@ -9554,7 +9046,7 @@
                 </a:solidFill>
                 <a:latin typeface="Calibri"/>
               </a:rPr>
-              <a:t>What it is built with</a:t>
+              <a:t>Watching the interview</a:t>
             </a:r>
           </a:p>
         </p:txBody>
@@ -9574,7 +9066,7 @@
             <a:avLst/>
           </a:prstGeom>
           <a:solidFill>
-            <a:srgbClr val="1F4E79"/>
+            <a:srgbClr val="1E6B4F"/>
           </a:solidFill>
           <a:ln>
             <a:noFill/>
@@ -9644,20 +9136,137 @@
       </p:sp>
       <p:sp>
         <p:nvSpPr>
-          <p:cNvPr id="6" name="Rectangle 5"/>
+          <p:cNvPr id="6" name="TextBox 5"/>
+          <p:cNvSpPr txBox="1"/>
+          <p:nvPr/>
+        </p:nvSpPr>
+        <p:spPr>
+          <a:xfrm>
+            <a:off x="658368" y="2066544"/>
+            <a:ext cx="1097280" cy="237744"/>
+          </a:xfrm>
+          <a:prstGeom prst="rect">
+            <a:avLst/>
+          </a:prstGeom>
+          <a:noFill/>
+        </p:spPr>
+        <p:txBody>
+          <a:bodyPr wrap="square" lIns="0" rIns="0" tIns="0" bIns="0">
+            <a:spAutoFit/>
+          </a:bodyPr>
+          <a:lstStyle/>
+          <a:p>
+            <a:pPr algn="l">
+              <a:lnSpc>
+                <a:spcPct val="125000"/>
+              </a:lnSpc>
+            </a:pPr>
+            <a:r>
+              <a:rPr sz="1100" b="1" i="0" spc="120">
+                <a:solidFill>
+                  <a:srgbClr val="5A6B7B"/>
+                </a:solidFill>
+                <a:latin typeface="Calibri"/>
+              </a:rPr>
+              <a:t>MODULE</a:t>
+            </a:r>
+          </a:p>
+        </p:txBody>
+      </p:sp>
+      <p:sp>
+        <p:nvSpPr>
+          <p:cNvPr id="7" name="TextBox 6"/>
+          <p:cNvSpPr txBox="1"/>
+          <p:nvPr/>
+        </p:nvSpPr>
+        <p:spPr>
+          <a:xfrm>
+            <a:off x="2029968" y="2066544"/>
+            <a:ext cx="4572000" cy="237744"/>
+          </a:xfrm>
+          <a:prstGeom prst="rect">
+            <a:avLst/>
+          </a:prstGeom>
+          <a:noFill/>
+        </p:spPr>
+        <p:txBody>
+          <a:bodyPr wrap="square" lIns="0" rIns="0" tIns="0" bIns="0">
+            <a:spAutoFit/>
+          </a:bodyPr>
+          <a:lstStyle/>
+          <a:p>
+            <a:pPr algn="l">
+              <a:lnSpc>
+                <a:spcPct val="125000"/>
+              </a:lnSpc>
+            </a:pPr>
+            <a:r>
+              <a:rPr sz="1100" b="1" i="0" spc="120">
+                <a:solidFill>
+                  <a:srgbClr val="5A6B7B"/>
+                </a:solidFill>
+                <a:latin typeface="Calibri"/>
+              </a:rPr>
+              <a:t>WHAT IT DOES</a:t>
+            </a:r>
+          </a:p>
+        </p:txBody>
+      </p:sp>
+      <p:sp>
+        <p:nvSpPr>
+          <p:cNvPr id="8" name="TextBox 7"/>
+          <p:cNvSpPr txBox="1"/>
+          <p:nvPr/>
+        </p:nvSpPr>
+        <p:spPr>
+          <a:xfrm>
+            <a:off x="8339328" y="2066544"/>
+            <a:ext cx="3108960" cy="237744"/>
+          </a:xfrm>
+          <a:prstGeom prst="rect">
+            <a:avLst/>
+          </a:prstGeom>
+          <a:noFill/>
+        </p:spPr>
+        <p:txBody>
+          <a:bodyPr wrap="square" lIns="0" rIns="0" tIns="0" bIns="0">
+            <a:spAutoFit/>
+          </a:bodyPr>
+          <a:lstStyle/>
+          <a:p>
+            <a:pPr algn="l">
+              <a:lnSpc>
+                <a:spcPct val="125000"/>
+              </a:lnSpc>
+            </a:pPr>
+            <a:r>
+              <a:rPr sz="1100" b="1" i="0" spc="120">
+                <a:solidFill>
+                  <a:srgbClr val="5A6B7B"/>
+                </a:solidFill>
+                <a:latin typeface="Calibri"/>
+              </a:rPr>
+              <a:t>BUILT WITH</a:t>
+            </a:r>
+          </a:p>
+        </p:txBody>
+      </p:sp>
+      <p:sp>
+        <p:nvSpPr>
+          <p:cNvPr id="9" name="Rectangle 8"/>
           <p:cNvSpPr/>
           <p:nvPr/>
         </p:nvSpPr>
         <p:spPr>
           <a:xfrm>
-            <a:off x="658368" y="2139696"/>
-            <a:ext cx="146304" cy="50292"/>
+            <a:off x="658368" y="2377440"/>
+            <a:ext cx="10874959" cy="12801"/>
           </a:xfrm>
           <a:prstGeom prst="rect">
             <a:avLst/>
           </a:prstGeom>
           <a:solidFill>
-            <a:srgbClr val="1F4E79"/>
+            <a:srgbClr val="F4F7FA"/>
           </a:solidFill>
           <a:ln>
             <a:noFill/>
@@ -9688,14 +9297,14 @@
       </p:sp>
       <p:sp>
         <p:nvSpPr>
-          <p:cNvPr id="7" name="TextBox 6"/>
-          <p:cNvSpPr txBox="1"/>
-          <p:nvPr/>
-        </p:nvSpPr>
-        <p:spPr>
-          <a:xfrm>
-            <a:off x="969264" y="2011680"/>
-            <a:ext cx="5120640" cy="310896"/>
+          <p:cNvPr id="10" name="TextBox 9"/>
+          <p:cNvSpPr txBox="1"/>
+          <p:nvPr/>
+        </p:nvSpPr>
+        <p:spPr>
+          <a:xfrm>
+            <a:off x="658368" y="2450592"/>
+            <a:ext cx="1188720" cy="310896"/>
           </a:xfrm>
           <a:prstGeom prst="rect">
             <a:avLst/>
@@ -9714,27 +9323,160 @@
               </a:lnSpc>
             </a:pPr>
             <a:r>
-              <a:rPr sz="1600" b="0" i="0">
+              <a:rPr sz="1900" b="1" i="0">
+                <a:solidFill>
+                  <a:srgbClr val="1E6B4F"/>
+                </a:solidFill>
+                <a:latin typeface="Calibri"/>
+              </a:rPr>
+              <a:t>M7</a:t>
+            </a:r>
+          </a:p>
+        </p:txBody>
+      </p:sp>
+      <p:sp>
+        <p:nvSpPr>
+          <p:cNvPr id="11" name="TextBox 10"/>
+          <p:cNvSpPr txBox="1"/>
+          <p:nvPr/>
+        </p:nvSpPr>
+        <p:spPr>
+          <a:xfrm>
+            <a:off x="2029968" y="2450592"/>
+            <a:ext cx="6035040" cy="292608"/>
+          </a:xfrm>
+          <a:prstGeom prst="rect">
+            <a:avLst/>
+          </a:prstGeom>
+          <a:noFill/>
+        </p:spPr>
+        <p:txBody>
+          <a:bodyPr wrap="square" lIns="0" rIns="0" tIns="0" bIns="0">
+            <a:spAutoFit/>
+          </a:bodyPr>
+          <a:lstStyle/>
+          <a:p>
+            <a:pPr algn="l">
+              <a:lnSpc>
+                <a:spcPct val="125000"/>
+              </a:lnSpc>
+            </a:pPr>
+            <a:r>
+              <a:rPr sz="1700" b="1" i="0">
                 <a:solidFill>
                   <a:srgbClr val="1B2733"/>
                 </a:solidFill>
                 <a:latin typeface="Calibri"/>
               </a:rPr>
-              <a:t>Reading, writing questions, marking</a:t>
-            </a:r>
-          </a:p>
-        </p:txBody>
-      </p:sp>
-      <p:sp>
-        <p:nvSpPr>
-          <p:cNvPr id="8" name="TextBox 7"/>
-          <p:cNvSpPr txBox="1"/>
-          <p:nvPr/>
-        </p:nvSpPr>
-        <p:spPr>
-          <a:xfrm>
-            <a:off x="6327648" y="2011680"/>
-            <a:ext cx="5681167" cy="310896"/>
+              <a:t>Watches attention</a:t>
+            </a:r>
+          </a:p>
+        </p:txBody>
+      </p:sp>
+      <p:sp>
+        <p:nvSpPr>
+          <p:cNvPr id="12" name="TextBox 11"/>
+          <p:cNvSpPr txBox="1"/>
+          <p:nvPr/>
+        </p:nvSpPr>
+        <p:spPr>
+          <a:xfrm>
+            <a:off x="2029968" y="2761488"/>
+            <a:ext cx="6035040" cy="566928"/>
+          </a:xfrm>
+          <a:prstGeom prst="rect">
+            <a:avLst/>
+          </a:prstGeom>
+          <a:noFill/>
+        </p:spPr>
+        <p:txBody>
+          <a:bodyPr wrap="square" lIns="0" rIns="0" tIns="0" bIns="0">
+            <a:spAutoFit/>
+          </a:bodyPr>
+          <a:lstStyle/>
+          <a:p>
+            <a:pPr algn="l">
+              <a:lnSpc>
+                <a:spcPct val="126000"/>
+              </a:lnSpc>
+            </a:pPr>
+            <a:r>
+              <a:rPr sz="1450" b="0" i="0">
+                <a:solidFill>
+                  <a:srgbClr val="5A6B7B"/>
+                </a:solidFill>
+                <a:latin typeface="Calibri"/>
+              </a:rPr>
+              <a:t>Finds 478 points on the face to work out where the head is pointing and whether the eyes are on the screen.</a:t>
+            </a:r>
+          </a:p>
+        </p:txBody>
+      </p:sp>
+      <p:sp>
+        <p:nvSpPr>
+          <p:cNvPr id="13" name="TextBox 12"/>
+          <p:cNvSpPr txBox="1"/>
+          <p:nvPr/>
+        </p:nvSpPr>
+        <p:spPr>
+          <a:xfrm>
+            <a:off x="8339328" y="2468880"/>
+            <a:ext cx="3200400" cy="731520"/>
+          </a:xfrm>
+          <a:prstGeom prst="rect">
+            <a:avLst/>
+          </a:prstGeom>
+          <a:noFill/>
+        </p:spPr>
+        <p:txBody>
+          <a:bodyPr wrap="square" lIns="0" rIns="0" tIns="0" bIns="0">
+            <a:spAutoFit/>
+          </a:bodyPr>
+          <a:lstStyle/>
+          <a:p>
+            <a:pPr algn="l">
+              <a:lnSpc>
+                <a:spcPct val="126000"/>
+              </a:lnSpc>
+            </a:pPr>
+            <a:r>
+              <a:rPr sz="1450" b="1" i="0">
+                <a:solidFill>
+                  <a:srgbClr val="1E6B4F"/>
+                </a:solidFill>
+                <a:latin typeface="Calibri"/>
+              </a:rPr>
+              <a:t>MediaPipe</a:t>
+            </a:r>
+          </a:p>
+          <a:p>
+            <a:pPr algn="l">
+              <a:lnSpc>
+                <a:spcPct val="126000"/>
+              </a:lnSpc>
+            </a:pPr>
+            <a:r>
+              <a:rPr sz="1450" b="1" i="0">
+                <a:solidFill>
+                  <a:srgbClr val="1E6B4F"/>
+                </a:solidFill>
+                <a:latin typeface="Calibri"/>
+              </a:rPr>
+              <a:t>Face Landmarker</a:t>
+            </a:r>
+          </a:p>
+        </p:txBody>
+      </p:sp>
+      <p:sp>
+        <p:nvSpPr>
+          <p:cNvPr id="14" name="TextBox 13"/>
+          <p:cNvSpPr txBox="1"/>
+          <p:nvPr/>
+        </p:nvSpPr>
+        <p:spPr>
+          <a:xfrm>
+            <a:off x="658368" y="3419856"/>
+            <a:ext cx="1188720" cy="310896"/>
           </a:xfrm>
           <a:prstGeom prst="rect">
             <a:avLst/>
@@ -9753,33 +9495,324 @@
               </a:lnSpc>
             </a:pPr>
             <a:r>
-              <a:rPr sz="1600" b="1" i="0">
-                <a:solidFill>
-                  <a:srgbClr val="1F4E79"/>
-                </a:solidFill>
-                <a:latin typeface="Calibri"/>
-              </a:rPr>
-              <a:t>Google Gemini 3.6 Flash</a:t>
-            </a:r>
-          </a:p>
-        </p:txBody>
-      </p:sp>
-      <p:sp>
-        <p:nvSpPr>
-          <p:cNvPr id="9" name="Rectangle 8"/>
+              <a:rPr sz="1900" b="1" i="0">
+                <a:solidFill>
+                  <a:srgbClr val="1E6B4F"/>
+                </a:solidFill>
+                <a:latin typeface="Calibri"/>
+              </a:rPr>
+              <a:t>M8</a:t>
+            </a:r>
+          </a:p>
+        </p:txBody>
+      </p:sp>
+      <p:sp>
+        <p:nvSpPr>
+          <p:cNvPr id="15" name="TextBox 14"/>
+          <p:cNvSpPr txBox="1"/>
+          <p:nvPr/>
+        </p:nvSpPr>
+        <p:spPr>
+          <a:xfrm>
+            <a:off x="2029968" y="3419856"/>
+            <a:ext cx="6035040" cy="292608"/>
+          </a:xfrm>
+          <a:prstGeom prst="rect">
+            <a:avLst/>
+          </a:prstGeom>
+          <a:noFill/>
+        </p:spPr>
+        <p:txBody>
+          <a:bodyPr wrap="square" lIns="0" rIns="0" tIns="0" bIns="0">
+            <a:spAutoFit/>
+          </a:bodyPr>
+          <a:lstStyle/>
+          <a:p>
+            <a:pPr algn="l">
+              <a:lnSpc>
+                <a:spcPct val="125000"/>
+              </a:lnSpc>
+            </a:pPr>
+            <a:r>
+              <a:rPr sz="1700" b="1" i="0">
+                <a:solidFill>
+                  <a:srgbClr val="1B2733"/>
+                </a:solidFill>
+                <a:latin typeface="Calibri"/>
+              </a:rPr>
+              <a:t>Watches posture</a:t>
+            </a:r>
+          </a:p>
+        </p:txBody>
+      </p:sp>
+      <p:sp>
+        <p:nvSpPr>
+          <p:cNvPr id="16" name="TextBox 15"/>
+          <p:cNvSpPr txBox="1"/>
+          <p:nvPr/>
+        </p:nvSpPr>
+        <p:spPr>
+          <a:xfrm>
+            <a:off x="2029968" y="3730752"/>
+            <a:ext cx="6035040" cy="566928"/>
+          </a:xfrm>
+          <a:prstGeom prst="rect">
+            <a:avLst/>
+          </a:prstGeom>
+          <a:noFill/>
+        </p:spPr>
+        <p:txBody>
+          <a:bodyPr wrap="square" lIns="0" rIns="0" tIns="0" bIns="0">
+            <a:spAutoFit/>
+          </a:bodyPr>
+          <a:lstStyle/>
+          <a:p>
+            <a:pPr algn="l">
+              <a:lnSpc>
+                <a:spcPct val="126000"/>
+              </a:lnSpc>
+            </a:pPr>
+            <a:r>
+              <a:rPr sz="1450" b="0" i="0">
+                <a:solidFill>
+                  <a:srgbClr val="5A6B7B"/>
+                </a:solidFill>
+                <a:latin typeface="Calibri"/>
+              </a:rPr>
+              <a:t>Finds 33 points on the upper body to check whether the shoulders are level and the person is upright rather than slouched.</a:t>
+            </a:r>
+          </a:p>
+        </p:txBody>
+      </p:sp>
+      <p:sp>
+        <p:nvSpPr>
+          <p:cNvPr id="17" name="TextBox 16"/>
+          <p:cNvSpPr txBox="1"/>
+          <p:nvPr/>
+        </p:nvSpPr>
+        <p:spPr>
+          <a:xfrm>
+            <a:off x="8339328" y="3438144"/>
+            <a:ext cx="3200400" cy="731520"/>
+          </a:xfrm>
+          <a:prstGeom prst="rect">
+            <a:avLst/>
+          </a:prstGeom>
+          <a:noFill/>
+        </p:spPr>
+        <p:txBody>
+          <a:bodyPr wrap="square" lIns="0" rIns="0" tIns="0" bIns="0">
+            <a:spAutoFit/>
+          </a:bodyPr>
+          <a:lstStyle/>
+          <a:p>
+            <a:pPr algn="l">
+              <a:lnSpc>
+                <a:spcPct val="126000"/>
+              </a:lnSpc>
+            </a:pPr>
+            <a:r>
+              <a:rPr sz="1450" b="1" i="0">
+                <a:solidFill>
+                  <a:srgbClr val="1E6B4F"/>
+                </a:solidFill>
+                <a:latin typeface="Calibri"/>
+              </a:rPr>
+              <a:t>MediaPipe</a:t>
+            </a:r>
+          </a:p>
+          <a:p>
+            <a:pPr algn="l">
+              <a:lnSpc>
+                <a:spcPct val="126000"/>
+              </a:lnSpc>
+            </a:pPr>
+            <a:r>
+              <a:rPr sz="1450" b="1" i="0">
+                <a:solidFill>
+                  <a:srgbClr val="1E6B4F"/>
+                </a:solidFill>
+                <a:latin typeface="Calibri"/>
+              </a:rPr>
+              <a:t>Pose Landmarker</a:t>
+            </a:r>
+          </a:p>
+        </p:txBody>
+      </p:sp>
+      <p:sp>
+        <p:nvSpPr>
+          <p:cNvPr id="18" name="TextBox 17"/>
+          <p:cNvSpPr txBox="1"/>
+          <p:nvPr/>
+        </p:nvSpPr>
+        <p:spPr>
+          <a:xfrm>
+            <a:off x="658368" y="4389120"/>
+            <a:ext cx="1188720" cy="310896"/>
+          </a:xfrm>
+          <a:prstGeom prst="rect">
+            <a:avLst/>
+          </a:prstGeom>
+          <a:noFill/>
+        </p:spPr>
+        <p:txBody>
+          <a:bodyPr wrap="square" lIns="0" rIns="0" tIns="0" bIns="0">
+            <a:spAutoFit/>
+          </a:bodyPr>
+          <a:lstStyle/>
+          <a:p>
+            <a:pPr algn="l">
+              <a:lnSpc>
+                <a:spcPct val="125000"/>
+              </a:lnSpc>
+            </a:pPr>
+            <a:r>
+              <a:rPr sz="1900" b="1" i="0">
+                <a:solidFill>
+                  <a:srgbClr val="1E6B4F"/>
+                </a:solidFill>
+                <a:latin typeface="Calibri"/>
+              </a:rPr>
+              <a:t>M10</a:t>
+            </a:r>
+          </a:p>
+        </p:txBody>
+      </p:sp>
+      <p:sp>
+        <p:nvSpPr>
+          <p:cNvPr id="19" name="TextBox 18"/>
+          <p:cNvSpPr txBox="1"/>
+          <p:nvPr/>
+        </p:nvSpPr>
+        <p:spPr>
+          <a:xfrm>
+            <a:off x="2029968" y="4389120"/>
+            <a:ext cx="6035040" cy="292608"/>
+          </a:xfrm>
+          <a:prstGeom prst="rect">
+            <a:avLst/>
+          </a:prstGeom>
+          <a:noFill/>
+        </p:spPr>
+        <p:txBody>
+          <a:bodyPr wrap="square" lIns="0" rIns="0" tIns="0" bIns="0">
+            <a:spAutoFit/>
+          </a:bodyPr>
+          <a:lstStyle/>
+          <a:p>
+            <a:pPr algn="l">
+              <a:lnSpc>
+                <a:spcPct val="125000"/>
+              </a:lnSpc>
+            </a:pPr>
+            <a:r>
+              <a:rPr sz="1700" b="1" i="0">
+                <a:solidFill>
+                  <a:srgbClr val="1B2733"/>
+                </a:solidFill>
+                <a:latin typeface="Calibri"/>
+              </a:rPr>
+              <a:t>Listens to tone of voice</a:t>
+            </a:r>
+          </a:p>
+        </p:txBody>
+      </p:sp>
+      <p:sp>
+        <p:nvSpPr>
+          <p:cNvPr id="20" name="TextBox 19"/>
+          <p:cNvSpPr txBox="1"/>
+          <p:nvPr/>
+        </p:nvSpPr>
+        <p:spPr>
+          <a:xfrm>
+            <a:off x="2029968" y="4700016"/>
+            <a:ext cx="6035040" cy="566928"/>
+          </a:xfrm>
+          <a:prstGeom prst="rect">
+            <a:avLst/>
+          </a:prstGeom>
+          <a:noFill/>
+        </p:spPr>
+        <p:txBody>
+          <a:bodyPr wrap="square" lIns="0" rIns="0" tIns="0" bIns="0">
+            <a:spAutoFit/>
+          </a:bodyPr>
+          <a:lstStyle/>
+          <a:p>
+            <a:pPr algn="l">
+              <a:lnSpc>
+                <a:spcPct val="126000"/>
+              </a:lnSpc>
+            </a:pPr>
+            <a:r>
+              <a:rPr sz="1450" b="0" i="0">
+                <a:solidFill>
+                  <a:srgbClr val="5A6B7B"/>
+                </a:solidFill>
+                <a:latin typeface="Calibri"/>
+              </a:rPr>
+              <a:t>Measures the sound, not the words: how steady the pitch is, how loud, and how much is speech rather than pauses.</a:t>
+            </a:r>
+          </a:p>
+        </p:txBody>
+      </p:sp>
+      <p:sp>
+        <p:nvSpPr>
+          <p:cNvPr id="21" name="TextBox 20"/>
+          <p:cNvSpPr txBox="1"/>
+          <p:nvPr/>
+        </p:nvSpPr>
+        <p:spPr>
+          <a:xfrm>
+            <a:off x="8339328" y="4407408"/>
+            <a:ext cx="3200400" cy="731520"/>
+          </a:xfrm>
+          <a:prstGeom prst="rect">
+            <a:avLst/>
+          </a:prstGeom>
+          <a:noFill/>
+        </p:spPr>
+        <p:txBody>
+          <a:bodyPr wrap="square" lIns="0" rIns="0" tIns="0" bIns="0">
+            <a:spAutoFit/>
+          </a:bodyPr>
+          <a:lstStyle/>
+          <a:p>
+            <a:pPr algn="l">
+              <a:lnSpc>
+                <a:spcPct val="126000"/>
+              </a:lnSpc>
+            </a:pPr>
+            <a:r>
+              <a:rPr sz="1450" b="1" i="0">
+                <a:solidFill>
+                  <a:srgbClr val="1E6B4F"/>
+                </a:solidFill>
+                <a:latin typeface="Calibri"/>
+              </a:rPr>
+              <a:t>Web Audio API</a:t>
+            </a:r>
+          </a:p>
+        </p:txBody>
+      </p:sp>
+      <p:sp>
+        <p:nvSpPr>
+          <p:cNvPr id="22" name="Rounded Rectangle 21"/>
           <p:cNvSpPr/>
           <p:nvPr/>
         </p:nvSpPr>
         <p:spPr>
           <a:xfrm>
-            <a:off x="658368" y="2523744"/>
-            <a:ext cx="146304" cy="50292"/>
-          </a:xfrm>
-          <a:prstGeom prst="rect">
-            <a:avLst/>
+            <a:off x="658368" y="5596128"/>
+            <a:ext cx="10874959" cy="640080"/>
+          </a:xfrm>
+          <a:prstGeom prst="roundRect">
+            <a:avLst>
+              <a:gd name="adj" fmla="val 6000"/>
+            </a:avLst>
           </a:prstGeom>
           <a:solidFill>
-            <a:srgbClr val="1F4E79"/>
+            <a:srgbClr val="F4F7FA"/>
           </a:solidFill>
           <a:ln>
             <a:noFill/>
@@ -9810,14 +9843,14 @@
       </p:sp>
       <p:sp>
         <p:nvSpPr>
-          <p:cNvPr id="10" name="TextBox 9"/>
-          <p:cNvSpPr txBox="1"/>
-          <p:nvPr/>
-        </p:nvSpPr>
-        <p:spPr>
-          <a:xfrm>
-            <a:off x="969264" y="2395728"/>
-            <a:ext cx="5120640" cy="310896"/>
+          <p:cNvPr id="23" name="TextBox 22"/>
+          <p:cNvSpPr txBox="1"/>
+          <p:nvPr/>
+        </p:nvSpPr>
+        <p:spPr>
+          <a:xfrm>
+            <a:off x="1042416" y="5769864"/>
+            <a:ext cx="10106863" cy="402336"/>
           </a:xfrm>
           <a:prstGeom prst="rect">
             <a:avLst/>
@@ -9836,1113 +9869,13 @@
               </a:lnSpc>
             </a:pPr>
             <a:r>
-              <a:rPr sz="1600" b="0" i="0">
+              <a:rPr sz="1600" b="1" i="0">
                 <a:solidFill>
                   <a:srgbClr val="1B2733"/>
                 </a:solidFill>
                 <a:latin typeface="Calibri"/>
               </a:rPr>
-              <a:t>Matching skills to a real standard</a:t>
-            </a:r>
-          </a:p>
-        </p:txBody>
-      </p:sp>
-      <p:sp>
-        <p:nvSpPr>
-          <p:cNvPr id="11" name="TextBox 10"/>
-          <p:cNvSpPr txBox="1"/>
-          <p:nvPr/>
-        </p:nvSpPr>
-        <p:spPr>
-          <a:xfrm>
-            <a:off x="6327648" y="2395728"/>
-            <a:ext cx="5681167" cy="310896"/>
-          </a:xfrm>
-          <a:prstGeom prst="rect">
-            <a:avLst/>
-          </a:prstGeom>
-          <a:noFill/>
-        </p:spPr>
-        <p:txBody>
-          <a:bodyPr wrap="square" lIns="0" rIns="0" tIns="0" bIns="0">
-            <a:spAutoFit/>
-          </a:bodyPr>
-          <a:lstStyle/>
-          <a:p>
-            <a:pPr algn="l">
-              <a:lnSpc>
-                <a:spcPct val="125000"/>
-              </a:lnSpc>
-            </a:pPr>
-            <a:r>
-              <a:rPr sz="1600" b="1" i="0">
-                <a:solidFill>
-                  <a:srgbClr val="1F4E79"/>
-                </a:solidFill>
-                <a:latin typeface="Calibri"/>
-              </a:rPr>
-              <a:t>ESCO (EU skills list) + NetworkX</a:t>
-            </a:r>
-          </a:p>
-        </p:txBody>
-      </p:sp>
-      <p:sp>
-        <p:nvSpPr>
-          <p:cNvPr id="12" name="Rectangle 11"/>
-          <p:cNvSpPr/>
-          <p:nvPr/>
-        </p:nvSpPr>
-        <p:spPr>
-          <a:xfrm>
-            <a:off x="658368" y="2907792"/>
-            <a:ext cx="146304" cy="50292"/>
-          </a:xfrm>
-          <a:prstGeom prst="rect">
-            <a:avLst/>
-          </a:prstGeom>
-          <a:solidFill>
-            <a:srgbClr val="1E6B4F"/>
-          </a:solidFill>
-          <a:ln>
-            <a:noFill/>
-          </a:ln>
-          <a:effectLst/>
-        </p:spPr>
-        <p:style>
-          <a:lnRef idx="1">
-            <a:schemeClr val="accent1"/>
-          </a:lnRef>
-          <a:fillRef idx="3">
-            <a:schemeClr val="accent1"/>
-          </a:fillRef>
-          <a:effectRef idx="2">
-            <a:schemeClr val="accent1"/>
-          </a:effectRef>
-          <a:fontRef idx="minor">
-            <a:schemeClr val="lt1"/>
-          </a:fontRef>
-        </p:style>
-        <p:txBody>
-          <a:bodyPr rtlCol="0" anchor="ctr"/>
-          <a:lstStyle/>
-          <a:p>
-            <a:pPr algn="ctr"/>
-          </a:p>
-        </p:txBody>
-      </p:sp>
-      <p:sp>
-        <p:nvSpPr>
-          <p:cNvPr id="13" name="TextBox 12"/>
-          <p:cNvSpPr txBox="1"/>
-          <p:nvPr/>
-        </p:nvSpPr>
-        <p:spPr>
-          <a:xfrm>
-            <a:off x="969264" y="2779776"/>
-            <a:ext cx="5120640" cy="310896"/>
-          </a:xfrm>
-          <a:prstGeom prst="rect">
-            <a:avLst/>
-          </a:prstGeom>
-          <a:noFill/>
-        </p:spPr>
-        <p:txBody>
-          <a:bodyPr wrap="square" lIns="0" rIns="0" tIns="0" bIns="0">
-            <a:spAutoFit/>
-          </a:bodyPr>
-          <a:lstStyle/>
-          <a:p>
-            <a:pPr algn="l">
-              <a:lnSpc>
-                <a:spcPct val="125000"/>
-              </a:lnSpc>
-            </a:pPr>
-            <a:r>
-              <a:rPr sz="1600" b="0" i="0">
-                <a:solidFill>
-                  <a:srgbClr val="1B2733"/>
-                </a:solidFill>
-                <a:latin typeface="Calibri"/>
-              </a:rPr>
-              <a:t>Carrying the voice call</a:t>
-            </a:r>
-          </a:p>
-        </p:txBody>
-      </p:sp>
-      <p:sp>
-        <p:nvSpPr>
-          <p:cNvPr id="14" name="TextBox 13"/>
-          <p:cNvSpPr txBox="1"/>
-          <p:nvPr/>
-        </p:nvSpPr>
-        <p:spPr>
-          <a:xfrm>
-            <a:off x="6327648" y="2779776"/>
-            <a:ext cx="5681167" cy="310896"/>
-          </a:xfrm>
-          <a:prstGeom prst="rect">
-            <a:avLst/>
-          </a:prstGeom>
-          <a:noFill/>
-        </p:spPr>
-        <p:txBody>
-          <a:bodyPr wrap="square" lIns="0" rIns="0" tIns="0" bIns="0">
-            <a:spAutoFit/>
-          </a:bodyPr>
-          <a:lstStyle/>
-          <a:p>
-            <a:pPr algn="l">
-              <a:lnSpc>
-                <a:spcPct val="125000"/>
-              </a:lnSpc>
-            </a:pPr>
-            <a:r>
-              <a:rPr sz="1600" b="1" i="0">
-                <a:solidFill>
-                  <a:srgbClr val="1E6B4F"/>
-                </a:solidFill>
-                <a:latin typeface="Calibri"/>
-              </a:rPr>
-              <a:t>LiveKit</a:t>
-            </a:r>
-          </a:p>
-        </p:txBody>
-      </p:sp>
-      <p:sp>
-        <p:nvSpPr>
-          <p:cNvPr id="15" name="Rectangle 14"/>
-          <p:cNvSpPr/>
-          <p:nvPr/>
-        </p:nvSpPr>
-        <p:spPr>
-          <a:xfrm>
-            <a:off x="658368" y="3291840"/>
-            <a:ext cx="146304" cy="50292"/>
-          </a:xfrm>
-          <a:prstGeom prst="rect">
-            <a:avLst/>
-          </a:prstGeom>
-          <a:solidFill>
-            <a:srgbClr val="1E6B4F"/>
-          </a:solidFill>
-          <a:ln>
-            <a:noFill/>
-          </a:ln>
-          <a:effectLst/>
-        </p:spPr>
-        <p:style>
-          <a:lnRef idx="1">
-            <a:schemeClr val="accent1"/>
-          </a:lnRef>
-          <a:fillRef idx="3">
-            <a:schemeClr val="accent1"/>
-          </a:fillRef>
-          <a:effectRef idx="2">
-            <a:schemeClr val="accent1"/>
-          </a:effectRef>
-          <a:fontRef idx="minor">
-            <a:schemeClr val="lt1"/>
-          </a:fontRef>
-        </p:style>
-        <p:txBody>
-          <a:bodyPr rtlCol="0" anchor="ctr"/>
-          <a:lstStyle/>
-          <a:p>
-            <a:pPr algn="ctr"/>
-          </a:p>
-        </p:txBody>
-      </p:sp>
-      <p:sp>
-        <p:nvSpPr>
-          <p:cNvPr id="16" name="TextBox 15"/>
-          <p:cNvSpPr txBox="1"/>
-          <p:nvPr/>
-        </p:nvSpPr>
-        <p:spPr>
-          <a:xfrm>
-            <a:off x="969264" y="3163824"/>
-            <a:ext cx="5120640" cy="310896"/>
-          </a:xfrm>
-          <a:prstGeom prst="rect">
-            <a:avLst/>
-          </a:prstGeom>
-          <a:noFill/>
-        </p:spPr>
-        <p:txBody>
-          <a:bodyPr wrap="square" lIns="0" rIns="0" tIns="0" bIns="0">
-            <a:spAutoFit/>
-          </a:bodyPr>
-          <a:lstStyle/>
-          <a:p>
-            <a:pPr algn="l">
-              <a:lnSpc>
-                <a:spcPct val="125000"/>
-              </a:lnSpc>
-            </a:pPr>
-            <a:r>
-              <a:rPr sz="1600" b="0" i="0">
-                <a:solidFill>
-                  <a:srgbClr val="1B2733"/>
-                </a:solidFill>
-                <a:latin typeface="Calibri"/>
-              </a:rPr>
-              <a:t>Turning speech into text</a:t>
-            </a:r>
-          </a:p>
-        </p:txBody>
-      </p:sp>
-      <p:sp>
-        <p:nvSpPr>
-          <p:cNvPr id="17" name="TextBox 16"/>
-          <p:cNvSpPr txBox="1"/>
-          <p:nvPr/>
-        </p:nvSpPr>
-        <p:spPr>
-          <a:xfrm>
-            <a:off x="6327648" y="3163824"/>
-            <a:ext cx="5681167" cy="310896"/>
-          </a:xfrm>
-          <a:prstGeom prst="rect">
-            <a:avLst/>
-          </a:prstGeom>
-          <a:noFill/>
-        </p:spPr>
-        <p:txBody>
-          <a:bodyPr wrap="square" lIns="0" rIns="0" tIns="0" bIns="0">
-            <a:spAutoFit/>
-          </a:bodyPr>
-          <a:lstStyle/>
-          <a:p>
-            <a:pPr algn="l">
-              <a:lnSpc>
-                <a:spcPct val="125000"/>
-              </a:lnSpc>
-            </a:pPr>
-            <a:r>
-              <a:rPr sz="1600" b="1" i="0">
-                <a:solidFill>
-                  <a:srgbClr val="1E6B4F"/>
-                </a:solidFill>
-                <a:latin typeface="Calibri"/>
-              </a:rPr>
-              <a:t>Deepgram Nova-3</a:t>
-            </a:r>
-          </a:p>
-        </p:txBody>
-      </p:sp>
-      <p:sp>
-        <p:nvSpPr>
-          <p:cNvPr id="18" name="Rectangle 17"/>
-          <p:cNvSpPr/>
-          <p:nvPr/>
-        </p:nvSpPr>
-        <p:spPr>
-          <a:xfrm>
-            <a:off x="658368" y="3675888"/>
-            <a:ext cx="146304" cy="50292"/>
-          </a:xfrm>
-          <a:prstGeom prst="rect">
-            <a:avLst/>
-          </a:prstGeom>
-          <a:solidFill>
-            <a:srgbClr val="1E6B4F"/>
-          </a:solidFill>
-          <a:ln>
-            <a:noFill/>
-          </a:ln>
-          <a:effectLst/>
-        </p:spPr>
-        <p:style>
-          <a:lnRef idx="1">
-            <a:schemeClr val="accent1"/>
-          </a:lnRef>
-          <a:fillRef idx="3">
-            <a:schemeClr val="accent1"/>
-          </a:fillRef>
-          <a:effectRef idx="2">
-            <a:schemeClr val="accent1"/>
-          </a:effectRef>
-          <a:fontRef idx="minor">
-            <a:schemeClr val="lt1"/>
-          </a:fontRef>
-        </p:style>
-        <p:txBody>
-          <a:bodyPr rtlCol="0" anchor="ctr"/>
-          <a:lstStyle/>
-          <a:p>
-            <a:pPr algn="ctr"/>
-          </a:p>
-        </p:txBody>
-      </p:sp>
-      <p:sp>
-        <p:nvSpPr>
-          <p:cNvPr id="19" name="TextBox 18"/>
-          <p:cNvSpPr txBox="1"/>
-          <p:nvPr/>
-        </p:nvSpPr>
-        <p:spPr>
-          <a:xfrm>
-            <a:off x="969264" y="3547872"/>
-            <a:ext cx="5120640" cy="310896"/>
-          </a:xfrm>
-          <a:prstGeom prst="rect">
-            <a:avLst/>
-          </a:prstGeom>
-          <a:noFill/>
-        </p:spPr>
-        <p:txBody>
-          <a:bodyPr wrap="square" lIns="0" rIns="0" tIns="0" bIns="0">
-            <a:spAutoFit/>
-          </a:bodyPr>
-          <a:lstStyle/>
-          <a:p>
-            <a:pPr algn="l">
-              <a:lnSpc>
-                <a:spcPct val="125000"/>
-              </a:lnSpc>
-            </a:pPr>
-            <a:r>
-              <a:rPr sz="1600" b="0" i="0">
-                <a:solidFill>
-                  <a:srgbClr val="1B2733"/>
-                </a:solidFill>
-                <a:latin typeface="Calibri"/>
-              </a:rPr>
-              <a:t>The interviewer's voice</a:t>
-            </a:r>
-          </a:p>
-        </p:txBody>
-      </p:sp>
-      <p:sp>
-        <p:nvSpPr>
-          <p:cNvPr id="20" name="TextBox 19"/>
-          <p:cNvSpPr txBox="1"/>
-          <p:nvPr/>
-        </p:nvSpPr>
-        <p:spPr>
-          <a:xfrm>
-            <a:off x="6327648" y="3547872"/>
-            <a:ext cx="5681167" cy="310896"/>
-          </a:xfrm>
-          <a:prstGeom prst="rect">
-            <a:avLst/>
-          </a:prstGeom>
-          <a:noFill/>
-        </p:spPr>
-        <p:txBody>
-          <a:bodyPr wrap="square" lIns="0" rIns="0" tIns="0" bIns="0">
-            <a:spAutoFit/>
-          </a:bodyPr>
-          <a:lstStyle/>
-          <a:p>
-            <a:pPr algn="l">
-              <a:lnSpc>
-                <a:spcPct val="125000"/>
-              </a:lnSpc>
-            </a:pPr>
-            <a:r>
-              <a:rPr sz="1600" b="1" i="0">
-                <a:solidFill>
-                  <a:srgbClr val="1E6B4F"/>
-                </a:solidFill>
-                <a:latin typeface="Calibri"/>
-              </a:rPr>
-              <a:t>ElevenLabs (Deepgram as backup)</a:t>
-            </a:r>
-          </a:p>
-        </p:txBody>
-      </p:sp>
-      <p:sp>
-        <p:nvSpPr>
-          <p:cNvPr id="21" name="Rectangle 20"/>
-          <p:cNvSpPr/>
-          <p:nvPr/>
-        </p:nvSpPr>
-        <p:spPr>
-          <a:xfrm>
-            <a:off x="658368" y="4059936"/>
-            <a:ext cx="146304" cy="50292"/>
-          </a:xfrm>
-          <a:prstGeom prst="rect">
-            <a:avLst/>
-          </a:prstGeom>
-          <a:solidFill>
-            <a:srgbClr val="1E6B4F"/>
-          </a:solidFill>
-          <a:ln>
-            <a:noFill/>
-          </a:ln>
-          <a:effectLst/>
-        </p:spPr>
-        <p:style>
-          <a:lnRef idx="1">
-            <a:schemeClr val="accent1"/>
-          </a:lnRef>
-          <a:fillRef idx="3">
-            <a:schemeClr val="accent1"/>
-          </a:fillRef>
-          <a:effectRef idx="2">
-            <a:schemeClr val="accent1"/>
-          </a:effectRef>
-          <a:fontRef idx="minor">
-            <a:schemeClr val="lt1"/>
-          </a:fontRef>
-        </p:style>
-        <p:txBody>
-          <a:bodyPr rtlCol="0" anchor="ctr"/>
-          <a:lstStyle/>
-          <a:p>
-            <a:pPr algn="ctr"/>
-          </a:p>
-        </p:txBody>
-      </p:sp>
-      <p:sp>
-        <p:nvSpPr>
-          <p:cNvPr id="22" name="TextBox 21"/>
-          <p:cNvSpPr txBox="1"/>
-          <p:nvPr/>
-        </p:nvSpPr>
-        <p:spPr>
-          <a:xfrm>
-            <a:off x="969264" y="3931920"/>
-            <a:ext cx="5120640" cy="310896"/>
-          </a:xfrm>
-          <a:prstGeom prst="rect">
-            <a:avLst/>
-          </a:prstGeom>
-          <a:noFill/>
-        </p:spPr>
-        <p:txBody>
-          <a:bodyPr wrap="square" lIns="0" rIns="0" tIns="0" bIns="0">
-            <a:spAutoFit/>
-          </a:bodyPr>
-          <a:lstStyle/>
-          <a:p>
-            <a:pPr algn="l">
-              <a:lnSpc>
-                <a:spcPct val="125000"/>
-              </a:lnSpc>
-            </a:pPr>
-            <a:r>
-              <a:rPr sz="1600" b="0" i="0">
-                <a:solidFill>
-                  <a:srgbClr val="1B2733"/>
-                </a:solidFill>
-                <a:latin typeface="Calibri"/>
-              </a:rPr>
-              <a:t>Attention and posture, in the browser</a:t>
-            </a:r>
-          </a:p>
-        </p:txBody>
-      </p:sp>
-      <p:sp>
-        <p:nvSpPr>
-          <p:cNvPr id="23" name="TextBox 22"/>
-          <p:cNvSpPr txBox="1"/>
-          <p:nvPr/>
-        </p:nvSpPr>
-        <p:spPr>
-          <a:xfrm>
-            <a:off x="6327648" y="3931920"/>
-            <a:ext cx="5681167" cy="310896"/>
-          </a:xfrm>
-          <a:prstGeom prst="rect">
-            <a:avLst/>
-          </a:prstGeom>
-          <a:noFill/>
-        </p:spPr>
-        <p:txBody>
-          <a:bodyPr wrap="square" lIns="0" rIns="0" tIns="0" bIns="0">
-            <a:spAutoFit/>
-          </a:bodyPr>
-          <a:lstStyle/>
-          <a:p>
-            <a:pPr algn="l">
-              <a:lnSpc>
-                <a:spcPct val="125000"/>
-              </a:lnSpc>
-            </a:pPr>
-            <a:r>
-              <a:rPr sz="1600" b="1" i="0">
-                <a:solidFill>
-                  <a:srgbClr val="1E6B4F"/>
-                </a:solidFill>
-                <a:latin typeface="Calibri"/>
-              </a:rPr>
-              <a:t>Google MediaPipe</a:t>
-            </a:r>
-          </a:p>
-        </p:txBody>
-      </p:sp>
-      <p:sp>
-        <p:nvSpPr>
-          <p:cNvPr id="24" name="Rectangle 23"/>
-          <p:cNvSpPr/>
-          <p:nvPr/>
-        </p:nvSpPr>
-        <p:spPr>
-          <a:xfrm>
-            <a:off x="658368" y="4443984"/>
-            <a:ext cx="146304" cy="50292"/>
-          </a:xfrm>
-          <a:prstGeom prst="rect">
-            <a:avLst/>
-          </a:prstGeom>
-          <a:solidFill>
-            <a:srgbClr val="1E6B4F"/>
-          </a:solidFill>
-          <a:ln>
-            <a:noFill/>
-          </a:ln>
-          <a:effectLst/>
-        </p:spPr>
-        <p:style>
-          <a:lnRef idx="1">
-            <a:schemeClr val="accent1"/>
-          </a:lnRef>
-          <a:fillRef idx="3">
-            <a:schemeClr val="accent1"/>
-          </a:fillRef>
-          <a:effectRef idx="2">
-            <a:schemeClr val="accent1"/>
-          </a:effectRef>
-          <a:fontRef idx="minor">
-            <a:schemeClr val="lt1"/>
-          </a:fontRef>
-        </p:style>
-        <p:txBody>
-          <a:bodyPr rtlCol="0" anchor="ctr"/>
-          <a:lstStyle/>
-          <a:p>
-            <a:pPr algn="ctr"/>
-          </a:p>
-        </p:txBody>
-      </p:sp>
-      <p:sp>
-        <p:nvSpPr>
-          <p:cNvPr id="25" name="TextBox 24"/>
-          <p:cNvSpPr txBox="1"/>
-          <p:nvPr/>
-        </p:nvSpPr>
-        <p:spPr>
-          <a:xfrm>
-            <a:off x="969264" y="4315968"/>
-            <a:ext cx="5120640" cy="310896"/>
-          </a:xfrm>
-          <a:prstGeom prst="rect">
-            <a:avLst/>
-          </a:prstGeom>
-          <a:noFill/>
-        </p:spPr>
-        <p:txBody>
-          <a:bodyPr wrap="square" lIns="0" rIns="0" tIns="0" bIns="0">
-            <a:spAutoFit/>
-          </a:bodyPr>
-          <a:lstStyle/>
-          <a:p>
-            <a:pPr algn="l">
-              <a:lnSpc>
-                <a:spcPct val="125000"/>
-              </a:lnSpc>
-            </a:pPr>
-            <a:r>
-              <a:rPr sz="1600" b="0" i="0">
-                <a:solidFill>
-                  <a:srgbClr val="1B2733"/>
-                </a:solidFill>
-                <a:latin typeface="Calibri"/>
-              </a:rPr>
-              <a:t>Tone of voice, in the browser</a:t>
-            </a:r>
-          </a:p>
-        </p:txBody>
-      </p:sp>
-      <p:sp>
-        <p:nvSpPr>
-          <p:cNvPr id="26" name="TextBox 25"/>
-          <p:cNvSpPr txBox="1"/>
-          <p:nvPr/>
-        </p:nvSpPr>
-        <p:spPr>
-          <a:xfrm>
-            <a:off x="6327648" y="4315968"/>
-            <a:ext cx="5681167" cy="310896"/>
-          </a:xfrm>
-          <a:prstGeom prst="rect">
-            <a:avLst/>
-          </a:prstGeom>
-          <a:noFill/>
-        </p:spPr>
-        <p:txBody>
-          <a:bodyPr wrap="square" lIns="0" rIns="0" tIns="0" bIns="0">
-            <a:spAutoFit/>
-          </a:bodyPr>
-          <a:lstStyle/>
-          <a:p>
-            <a:pPr algn="l">
-              <a:lnSpc>
-                <a:spcPct val="125000"/>
-              </a:lnSpc>
-            </a:pPr>
-            <a:r>
-              <a:rPr sz="1600" b="1" i="0">
-                <a:solidFill>
-                  <a:srgbClr val="1E6B4F"/>
-                </a:solidFill>
-                <a:latin typeface="Calibri"/>
-              </a:rPr>
-              <a:t>Web Audio API</a:t>
-            </a:r>
-          </a:p>
-        </p:txBody>
-      </p:sp>
-      <p:sp>
-        <p:nvSpPr>
-          <p:cNvPr id="27" name="Rectangle 26"/>
-          <p:cNvSpPr/>
-          <p:nvPr/>
-        </p:nvSpPr>
-        <p:spPr>
-          <a:xfrm>
-            <a:off x="658368" y="4828032"/>
-            <a:ext cx="146304" cy="50292"/>
-          </a:xfrm>
-          <a:prstGeom prst="rect">
-            <a:avLst/>
-          </a:prstGeom>
-          <a:solidFill>
-            <a:srgbClr val="9A4415"/>
-          </a:solidFill>
-          <a:ln>
-            <a:noFill/>
-          </a:ln>
-          <a:effectLst/>
-        </p:spPr>
-        <p:style>
-          <a:lnRef idx="1">
-            <a:schemeClr val="accent1"/>
-          </a:lnRef>
-          <a:fillRef idx="3">
-            <a:schemeClr val="accent1"/>
-          </a:fillRef>
-          <a:effectRef idx="2">
-            <a:schemeClr val="accent1"/>
-          </a:effectRef>
-          <a:fontRef idx="minor">
-            <a:schemeClr val="lt1"/>
-          </a:fontRef>
-        </p:style>
-        <p:txBody>
-          <a:bodyPr rtlCol="0" anchor="ctr"/>
-          <a:lstStyle/>
-          <a:p>
-            <a:pPr algn="ctr"/>
-          </a:p>
-        </p:txBody>
-      </p:sp>
-      <p:sp>
-        <p:nvSpPr>
-          <p:cNvPr id="28" name="TextBox 27"/>
-          <p:cNvSpPr txBox="1"/>
-          <p:nvPr/>
-        </p:nvSpPr>
-        <p:spPr>
-          <a:xfrm>
-            <a:off x="969264" y="4700016"/>
-            <a:ext cx="5120640" cy="310896"/>
-          </a:xfrm>
-          <a:prstGeom prst="rect">
-            <a:avLst/>
-          </a:prstGeom>
-          <a:noFill/>
-        </p:spPr>
-        <p:txBody>
-          <a:bodyPr wrap="square" lIns="0" rIns="0" tIns="0" bIns="0">
-            <a:spAutoFit/>
-          </a:bodyPr>
-          <a:lstStyle/>
-          <a:p>
-            <a:pPr algn="l">
-              <a:lnSpc>
-                <a:spcPct val="125000"/>
-              </a:lnSpc>
-            </a:pPr>
-            <a:r>
-              <a:rPr sz="1600" b="0" i="0">
-                <a:solidFill>
-                  <a:srgbClr val="1B2733"/>
-                </a:solidFill>
-                <a:latin typeface="Calibri"/>
-              </a:rPr>
-              <a:t>Spotting unusual behaviour</a:t>
-            </a:r>
-          </a:p>
-        </p:txBody>
-      </p:sp>
-      <p:sp>
-        <p:nvSpPr>
-          <p:cNvPr id="29" name="TextBox 28"/>
-          <p:cNvSpPr txBox="1"/>
-          <p:nvPr/>
-        </p:nvSpPr>
-        <p:spPr>
-          <a:xfrm>
-            <a:off x="6327648" y="4700016"/>
-            <a:ext cx="5681167" cy="310896"/>
-          </a:xfrm>
-          <a:prstGeom prst="rect">
-            <a:avLst/>
-          </a:prstGeom>
-          <a:noFill/>
-        </p:spPr>
-        <p:txBody>
-          <a:bodyPr wrap="square" lIns="0" rIns="0" tIns="0" bIns="0">
-            <a:spAutoFit/>
-          </a:bodyPr>
-          <a:lstStyle/>
-          <a:p>
-            <a:pPr algn="l">
-              <a:lnSpc>
-                <a:spcPct val="125000"/>
-              </a:lnSpc>
-            </a:pPr>
-            <a:r>
-              <a:rPr sz="1600" b="1" i="0">
-                <a:solidFill>
-                  <a:srgbClr val="9A4415"/>
-                </a:solidFill>
-                <a:latin typeface="Calibri"/>
-              </a:rPr>
-              <a:t>scikit-learn, trains itself</a:t>
-            </a:r>
-          </a:p>
-        </p:txBody>
-      </p:sp>
-      <p:sp>
-        <p:nvSpPr>
-          <p:cNvPr id="30" name="Rectangle 29"/>
-          <p:cNvSpPr/>
-          <p:nvPr/>
-        </p:nvSpPr>
-        <p:spPr>
-          <a:xfrm>
-            <a:off x="658368" y="5212080"/>
-            <a:ext cx="146304" cy="50292"/>
-          </a:xfrm>
-          <a:prstGeom prst="rect">
-            <a:avLst/>
-          </a:prstGeom>
-          <a:solidFill>
-            <a:srgbClr val="4C3A8C"/>
-          </a:solidFill>
-          <a:ln>
-            <a:noFill/>
-          </a:ln>
-          <a:effectLst/>
-        </p:spPr>
-        <p:style>
-          <a:lnRef idx="1">
-            <a:schemeClr val="accent1"/>
-          </a:lnRef>
-          <a:fillRef idx="3">
-            <a:schemeClr val="accent1"/>
-          </a:fillRef>
-          <a:effectRef idx="2">
-            <a:schemeClr val="accent1"/>
-          </a:effectRef>
-          <a:fontRef idx="minor">
-            <a:schemeClr val="lt1"/>
-          </a:fontRef>
-        </p:style>
-        <p:txBody>
-          <a:bodyPr rtlCol="0" anchor="ctr"/>
-          <a:lstStyle/>
-          <a:p>
-            <a:pPr algn="ctr"/>
-          </a:p>
-        </p:txBody>
-      </p:sp>
-      <p:sp>
-        <p:nvSpPr>
-          <p:cNvPr id="31" name="TextBox 30"/>
-          <p:cNvSpPr txBox="1"/>
-          <p:nvPr/>
-        </p:nvSpPr>
-        <p:spPr>
-          <a:xfrm>
-            <a:off x="969264" y="5084064"/>
-            <a:ext cx="5120640" cy="310896"/>
-          </a:xfrm>
-          <a:prstGeom prst="rect">
-            <a:avLst/>
-          </a:prstGeom>
-          <a:noFill/>
-        </p:spPr>
-        <p:txBody>
-          <a:bodyPr wrap="square" lIns="0" rIns="0" tIns="0" bIns="0">
-            <a:spAutoFit/>
-          </a:bodyPr>
-          <a:lstStyle/>
-          <a:p>
-            <a:pPr algn="l">
-              <a:lnSpc>
-                <a:spcPct val="125000"/>
-              </a:lnSpc>
-            </a:pPr>
-            <a:r>
-              <a:rPr sz="1600" b="0" i="0">
-                <a:solidFill>
-                  <a:srgbClr val="1B2733"/>
-                </a:solidFill>
-                <a:latin typeface="Calibri"/>
-              </a:rPr>
-              <a:t>The app itself</a:t>
-            </a:r>
-          </a:p>
-        </p:txBody>
-      </p:sp>
-      <p:sp>
-        <p:nvSpPr>
-          <p:cNvPr id="32" name="TextBox 31"/>
-          <p:cNvSpPr txBox="1"/>
-          <p:nvPr/>
-        </p:nvSpPr>
-        <p:spPr>
-          <a:xfrm>
-            <a:off x="6327648" y="5084064"/>
-            <a:ext cx="5681167" cy="310896"/>
-          </a:xfrm>
-          <a:prstGeom prst="rect">
-            <a:avLst/>
-          </a:prstGeom>
-          <a:noFill/>
-        </p:spPr>
-        <p:txBody>
-          <a:bodyPr wrap="square" lIns="0" rIns="0" tIns="0" bIns="0">
-            <a:spAutoFit/>
-          </a:bodyPr>
-          <a:lstStyle/>
-          <a:p>
-            <a:pPr algn="l">
-              <a:lnSpc>
-                <a:spcPct val="125000"/>
-              </a:lnSpc>
-            </a:pPr>
-            <a:r>
-              <a:rPr sz="1600" b="1" i="0">
-                <a:solidFill>
-                  <a:srgbClr val="4C3A8C"/>
-                </a:solidFill>
-                <a:latin typeface="Calibri"/>
-              </a:rPr>
-              <a:t>Python + FastAPI, React front end</a:t>
-            </a:r>
-          </a:p>
-        </p:txBody>
-      </p:sp>
-      <p:sp>
-        <p:nvSpPr>
-          <p:cNvPr id="33" name="Rectangle 32"/>
-          <p:cNvSpPr/>
-          <p:nvPr/>
-        </p:nvSpPr>
-        <p:spPr>
-          <a:xfrm>
-            <a:off x="658368" y="5596128"/>
-            <a:ext cx="146304" cy="50292"/>
-          </a:xfrm>
-          <a:prstGeom prst="rect">
-            <a:avLst/>
-          </a:prstGeom>
-          <a:solidFill>
-            <a:srgbClr val="4C3A8C"/>
-          </a:solidFill>
-          <a:ln>
-            <a:noFill/>
-          </a:ln>
-          <a:effectLst/>
-        </p:spPr>
-        <p:style>
-          <a:lnRef idx="1">
-            <a:schemeClr val="accent1"/>
-          </a:lnRef>
-          <a:fillRef idx="3">
-            <a:schemeClr val="accent1"/>
-          </a:fillRef>
-          <a:effectRef idx="2">
-            <a:schemeClr val="accent1"/>
-          </a:effectRef>
-          <a:fontRef idx="minor">
-            <a:schemeClr val="lt1"/>
-          </a:fontRef>
-        </p:style>
-        <p:txBody>
-          <a:bodyPr rtlCol="0" anchor="ctr"/>
-          <a:lstStyle/>
-          <a:p>
-            <a:pPr algn="ctr"/>
-          </a:p>
-        </p:txBody>
-      </p:sp>
-      <p:sp>
-        <p:nvSpPr>
-          <p:cNvPr id="34" name="TextBox 33"/>
-          <p:cNvSpPr txBox="1"/>
-          <p:nvPr/>
-        </p:nvSpPr>
-        <p:spPr>
-          <a:xfrm>
-            <a:off x="969264" y="5468112"/>
-            <a:ext cx="5120640" cy="310896"/>
-          </a:xfrm>
-          <a:prstGeom prst="rect">
-            <a:avLst/>
-          </a:prstGeom>
-          <a:noFill/>
-        </p:spPr>
-        <p:txBody>
-          <a:bodyPr wrap="square" lIns="0" rIns="0" tIns="0" bIns="0">
-            <a:spAutoFit/>
-          </a:bodyPr>
-          <a:lstStyle/>
-          <a:p>
-            <a:pPr algn="l">
-              <a:lnSpc>
-                <a:spcPct val="125000"/>
-              </a:lnSpc>
-            </a:pPr>
-            <a:r>
-              <a:rPr sz="1600" b="0" i="0">
-                <a:solidFill>
-                  <a:srgbClr val="1B2733"/>
-                </a:solidFill>
-                <a:latin typeface="Calibri"/>
-              </a:rPr>
-              <a:t>Checking it still works</a:t>
-            </a:r>
-          </a:p>
-        </p:txBody>
-      </p:sp>
-      <p:sp>
-        <p:nvSpPr>
-          <p:cNvPr id="35" name="TextBox 34"/>
-          <p:cNvSpPr txBox="1"/>
-          <p:nvPr/>
-        </p:nvSpPr>
-        <p:spPr>
-          <a:xfrm>
-            <a:off x="6327648" y="5468112"/>
-            <a:ext cx="5681167" cy="310896"/>
-          </a:xfrm>
-          <a:prstGeom prst="rect">
-            <a:avLst/>
-          </a:prstGeom>
-          <a:noFill/>
-        </p:spPr>
-        <p:txBody>
-          <a:bodyPr wrap="square" lIns="0" rIns="0" tIns="0" bIns="0">
-            <a:spAutoFit/>
-          </a:bodyPr>
-          <a:lstStyle/>
-          <a:p>
-            <a:pPr algn="l">
-              <a:lnSpc>
-                <a:spcPct val="125000"/>
-              </a:lnSpc>
-            </a:pPr>
-            <a:r>
-              <a:rPr sz="1600" b="1" i="0">
-                <a:solidFill>
-                  <a:srgbClr val="4C3A8C"/>
-                </a:solidFill>
-                <a:latin typeface="Calibri"/>
-              </a:rPr>
-              <a:t>72 automated tests</a:t>
-            </a:r>
-          </a:p>
-        </p:txBody>
-      </p:sp>
-      <p:sp>
-        <p:nvSpPr>
-          <p:cNvPr id="36" name="Rounded Rectangle 35"/>
-          <p:cNvSpPr/>
-          <p:nvPr/>
-        </p:nvSpPr>
-        <p:spPr>
-          <a:xfrm>
-            <a:off x="658368" y="5925312"/>
-            <a:ext cx="10874959" cy="658368"/>
-          </a:xfrm>
-          <a:prstGeom prst="roundRect">
-            <a:avLst>
-              <a:gd name="adj" fmla="val 6000"/>
-            </a:avLst>
-          </a:prstGeom>
-          <a:solidFill>
-            <a:srgbClr val="F4F7FA"/>
-          </a:solidFill>
-          <a:ln>
-            <a:noFill/>
-          </a:ln>
-          <a:effectLst/>
-        </p:spPr>
-        <p:style>
-          <a:lnRef idx="1">
-            <a:schemeClr val="accent1"/>
-          </a:lnRef>
-          <a:fillRef idx="3">
-            <a:schemeClr val="accent1"/>
-          </a:fillRef>
-          <a:effectRef idx="2">
-            <a:schemeClr val="accent1"/>
-          </a:effectRef>
-          <a:fontRef idx="minor">
-            <a:schemeClr val="lt1"/>
-          </a:fontRef>
-        </p:style>
-        <p:txBody>
-          <a:bodyPr rtlCol="0" anchor="ctr"/>
-          <a:lstStyle/>
-          <a:p>
-            <a:pPr algn="ctr"/>
-          </a:p>
-        </p:txBody>
-      </p:sp>
-      <p:sp>
-        <p:nvSpPr>
-          <p:cNvPr id="37" name="TextBox 36"/>
-          <p:cNvSpPr txBox="1"/>
-          <p:nvPr/>
-        </p:nvSpPr>
-        <p:spPr>
-          <a:xfrm>
-            <a:off x="1042416" y="6108192"/>
-            <a:ext cx="10106863" cy="411480"/>
-          </a:xfrm>
-          <a:prstGeom prst="rect">
-            <a:avLst/>
-          </a:prstGeom>
-          <a:noFill/>
-        </p:spPr>
-        <p:txBody>
-          <a:bodyPr wrap="square" lIns="0" rIns="0" tIns="0" bIns="0">
-            <a:spAutoFit/>
-          </a:bodyPr>
-          <a:lstStyle/>
-          <a:p>
-            <a:pPr algn="l">
-              <a:lnSpc>
-                <a:spcPct val="125000"/>
-              </a:lnSpc>
-            </a:pPr>
-            <a:r>
-              <a:rPr sz="1600" b="1" i="0">
-                <a:solidFill>
-                  <a:srgbClr val="1B2733"/>
-                </a:solidFill>
-                <a:latin typeface="Calibri"/>
-              </a:rPr>
-              <a:t>The camera and microphone work happens on the candidate's own computer. Only the resulting numbers are sent.</a:t>
+              <a:t>All three run inside the candidate's own browser. Video and audio never leave their computer — only the resulting numbers are sent.</a:t>
             </a:r>
           </a:p>
         </p:txBody>
@@ -10995,11 +9928,11 @@
             <a:r>
               <a:rPr sz="1200" b="1" i="0" spc="150">
                 <a:solidFill>
-                  <a:srgbClr val="B4530F"/>
-                </a:solidFill>
-                <a:latin typeface="Calibri"/>
-              </a:rPr>
-              <a:t>WHAT MAKES THIS RESEARCH</a:t>
+                  <a:srgbClr val="9A4415"/>
+                </a:solidFill>
+                <a:latin typeface="Calibri"/>
+              </a:rPr>
+              <a:t>MODULES 6, 9, 11 AND 12</a:t>
             </a:r>
           </a:p>
         </p:txBody>
@@ -11038,7 +9971,7 @@
                 </a:solidFill>
                 <a:latin typeface="Calibri"/>
               </a:rPr>
-              <a:t>The main idea: mark it twice, and keep the disagreement</a:t>
+              <a:t>Marking and reporting</a:t>
             </a:r>
           </a:p>
         </p:txBody>
@@ -11058,7 +9991,7 @@
             <a:avLst/>
           </a:prstGeom>
           <a:solidFill>
-            <a:srgbClr val="B4530F"/>
+            <a:srgbClr val="9A4415"/>
           </a:solidFill>
           <a:ln>
             <a:noFill/>
@@ -11134,53 +10067,131 @@
         </p:nvSpPr>
         <p:spPr>
           <a:xfrm>
-            <a:off x="658368" y="2103120"/>
-            <a:ext cx="10874959" cy="457200"/>
-          </a:xfrm>
-          <a:prstGeom prst="rect">
-            <a:avLst/>
-          </a:prstGeom>
-          <a:noFill/>
-        </p:spPr>
-        <p:txBody>
-          <a:bodyPr wrap="square" lIns="0" rIns="0" tIns="0" bIns="0">
-            <a:spAutoFit/>
-          </a:bodyPr>
-          <a:lstStyle/>
-          <a:p>
-            <a:pPr algn="l">
-              <a:lnSpc>
-                <a:spcPct val="130000"/>
-              </a:lnSpc>
-            </a:pPr>
-            <a:r>
-              <a:rPr sz="2000" b="0" i="0">
-                <a:solidFill>
-                  <a:srgbClr val="1B2733"/>
-                </a:solidFill>
-                <a:latin typeface="Calibri"/>
-              </a:rPr>
-              <a:t>Every answer is marked twice, with the marking criteria shown in a different order each time.</a:t>
-            </a:r>
-          </a:p>
-        </p:txBody>
-      </p:sp>
-      <p:sp>
-        <p:nvSpPr>
-          <p:cNvPr id="7" name="Rectangle 6"/>
+            <a:off x="658368" y="2066544"/>
+            <a:ext cx="1097280" cy="237744"/>
+          </a:xfrm>
+          <a:prstGeom prst="rect">
+            <a:avLst/>
+          </a:prstGeom>
+          <a:noFill/>
+        </p:spPr>
+        <p:txBody>
+          <a:bodyPr wrap="square" lIns="0" rIns="0" tIns="0" bIns="0">
+            <a:spAutoFit/>
+          </a:bodyPr>
+          <a:lstStyle/>
+          <a:p>
+            <a:pPr algn="l">
+              <a:lnSpc>
+                <a:spcPct val="125000"/>
+              </a:lnSpc>
+            </a:pPr>
+            <a:r>
+              <a:rPr sz="1100" b="1" i="0" spc="120">
+                <a:solidFill>
+                  <a:srgbClr val="5A6B7B"/>
+                </a:solidFill>
+                <a:latin typeface="Calibri"/>
+              </a:rPr>
+              <a:t>MODULE</a:t>
+            </a:r>
+          </a:p>
+        </p:txBody>
+      </p:sp>
+      <p:sp>
+        <p:nvSpPr>
+          <p:cNvPr id="7" name="TextBox 6"/>
+          <p:cNvSpPr txBox="1"/>
+          <p:nvPr/>
+        </p:nvSpPr>
+        <p:spPr>
+          <a:xfrm>
+            <a:off x="2029968" y="2066544"/>
+            <a:ext cx="4572000" cy="237744"/>
+          </a:xfrm>
+          <a:prstGeom prst="rect">
+            <a:avLst/>
+          </a:prstGeom>
+          <a:noFill/>
+        </p:spPr>
+        <p:txBody>
+          <a:bodyPr wrap="square" lIns="0" rIns="0" tIns="0" bIns="0">
+            <a:spAutoFit/>
+          </a:bodyPr>
+          <a:lstStyle/>
+          <a:p>
+            <a:pPr algn="l">
+              <a:lnSpc>
+                <a:spcPct val="125000"/>
+              </a:lnSpc>
+            </a:pPr>
+            <a:r>
+              <a:rPr sz="1100" b="1" i="0" spc="120">
+                <a:solidFill>
+                  <a:srgbClr val="5A6B7B"/>
+                </a:solidFill>
+                <a:latin typeface="Calibri"/>
+              </a:rPr>
+              <a:t>WHAT IT DOES</a:t>
+            </a:r>
+          </a:p>
+        </p:txBody>
+      </p:sp>
+      <p:sp>
+        <p:nvSpPr>
+          <p:cNvPr id="8" name="TextBox 7"/>
+          <p:cNvSpPr txBox="1"/>
+          <p:nvPr/>
+        </p:nvSpPr>
+        <p:spPr>
+          <a:xfrm>
+            <a:off x="8339328" y="2066544"/>
+            <a:ext cx="3108960" cy="237744"/>
+          </a:xfrm>
+          <a:prstGeom prst="rect">
+            <a:avLst/>
+          </a:prstGeom>
+          <a:noFill/>
+        </p:spPr>
+        <p:txBody>
+          <a:bodyPr wrap="square" lIns="0" rIns="0" tIns="0" bIns="0">
+            <a:spAutoFit/>
+          </a:bodyPr>
+          <a:lstStyle/>
+          <a:p>
+            <a:pPr algn="l">
+              <a:lnSpc>
+                <a:spcPct val="125000"/>
+              </a:lnSpc>
+            </a:pPr>
+            <a:r>
+              <a:rPr sz="1100" b="1" i="0" spc="120">
+                <a:solidFill>
+                  <a:srgbClr val="5A6B7B"/>
+                </a:solidFill>
+                <a:latin typeface="Calibri"/>
+              </a:rPr>
+              <a:t>BUILT WITH</a:t>
+            </a:r>
+          </a:p>
+        </p:txBody>
+      </p:sp>
+      <p:sp>
+        <p:nvSpPr>
+          <p:cNvPr id="9" name="Rectangle 8"/>
           <p:cNvSpPr/>
           <p:nvPr/>
         </p:nvSpPr>
         <p:spPr>
           <a:xfrm>
-            <a:off x="658368" y="3081528"/>
-            <a:ext cx="182880" cy="54864"/>
+            <a:off x="658368" y="2377440"/>
+            <a:ext cx="10874959" cy="12801"/>
           </a:xfrm>
           <a:prstGeom prst="rect">
             <a:avLst/>
           </a:prstGeom>
           <a:solidFill>
-            <a:srgbClr val="5A6B7B"/>
+            <a:srgbClr val="F4F7FA"/>
           </a:solidFill>
           <a:ln>
             <a:noFill/>
@@ -11211,14 +10222,14 @@
       </p:sp>
       <p:sp>
         <p:nvSpPr>
-          <p:cNvPr id="8" name="TextBox 7"/>
-          <p:cNvSpPr txBox="1"/>
-          <p:nvPr/>
-        </p:nvSpPr>
-        <p:spPr>
-          <a:xfrm>
-            <a:off x="1042416" y="2926080"/>
-            <a:ext cx="2377440" cy="365760"/>
+          <p:cNvPr id="10" name="TextBox 9"/>
+          <p:cNvSpPr txBox="1"/>
+          <p:nvPr/>
+        </p:nvSpPr>
+        <p:spPr>
+          <a:xfrm>
+            <a:off x="658368" y="2450592"/>
+            <a:ext cx="1188720" cy="310896"/>
           </a:xfrm>
           <a:prstGeom prst="rect">
             <a:avLst/>
@@ -11237,72 +10248,684 @@
               </a:lnSpc>
             </a:pPr>
             <a:r>
-              <a:rPr sz="1800" b="1" i="0">
+              <a:rPr sz="1900" b="1" i="0">
+                <a:solidFill>
+                  <a:srgbClr val="9A4415"/>
+                </a:solidFill>
+                <a:latin typeface="Calibri"/>
+              </a:rPr>
+              <a:t>M6</a:t>
+            </a:r>
+          </a:p>
+        </p:txBody>
+      </p:sp>
+      <p:sp>
+        <p:nvSpPr>
+          <p:cNvPr id="11" name="TextBox 10"/>
+          <p:cNvSpPr txBox="1"/>
+          <p:nvPr/>
+        </p:nvSpPr>
+        <p:spPr>
+          <a:xfrm>
+            <a:off x="2029968" y="2450592"/>
+            <a:ext cx="6035040" cy="292608"/>
+          </a:xfrm>
+          <a:prstGeom prst="rect">
+            <a:avLst/>
+          </a:prstGeom>
+          <a:noFill/>
+        </p:spPr>
+        <p:txBody>
+          <a:bodyPr wrap="square" lIns="0" rIns="0" tIns="0" bIns="0">
+            <a:spAutoFit/>
+          </a:bodyPr>
+          <a:lstStyle/>
+          <a:p>
+            <a:pPr algn="l">
+              <a:lnSpc>
+                <a:spcPct val="125000"/>
+              </a:lnSpc>
+            </a:pPr>
+            <a:r>
+              <a:rPr sz="1700" b="1" i="0">
+                <a:solidFill>
+                  <a:srgbClr val="1B2733"/>
+                </a:solidFill>
+                <a:latin typeface="Calibri"/>
+              </a:rPr>
+              <a:t>Marks every answer — twice</a:t>
+            </a:r>
+          </a:p>
+        </p:txBody>
+      </p:sp>
+      <p:sp>
+        <p:nvSpPr>
+          <p:cNvPr id="12" name="TextBox 11"/>
+          <p:cNvSpPr txBox="1"/>
+          <p:nvPr/>
+        </p:nvSpPr>
+        <p:spPr>
+          <a:xfrm>
+            <a:off x="2029968" y="2761488"/>
+            <a:ext cx="6035040" cy="566928"/>
+          </a:xfrm>
+          <a:prstGeom prst="rect">
+            <a:avLst/>
+          </a:prstGeom>
+          <a:noFill/>
+        </p:spPr>
+        <p:txBody>
+          <a:bodyPr wrap="square" lIns="0" rIns="0" tIns="0" bIns="0">
+            <a:spAutoFit/>
+          </a:bodyPr>
+          <a:lstStyle/>
+          <a:p>
+            <a:pPr algn="l">
+              <a:lnSpc>
+                <a:spcPct val="126000"/>
+              </a:lnSpc>
+            </a:pPr>
+            <a:r>
+              <a:rPr sz="1450" b="0" i="0">
                 <a:solidFill>
                   <a:srgbClr val="5A6B7B"/>
                 </a:solidFill>
                 <a:latin typeface="Calibri"/>
               </a:rPr>
-              <a:t>The average</a:t>
-            </a:r>
-          </a:p>
-        </p:txBody>
-      </p:sp>
-      <p:sp>
-        <p:nvSpPr>
-          <p:cNvPr id="9" name="TextBox 8"/>
-          <p:cNvSpPr txBox="1"/>
-          <p:nvPr/>
-        </p:nvSpPr>
-        <p:spPr>
-          <a:xfrm>
-            <a:off x="3538728" y="2926080"/>
-            <a:ext cx="7857439" cy="822960"/>
-          </a:xfrm>
-          <a:prstGeom prst="rect">
-            <a:avLst/>
-          </a:prstGeom>
-          <a:noFill/>
-        </p:spPr>
-        <p:txBody>
-          <a:bodyPr wrap="square" lIns="0" rIns="0" tIns="0" bIns="0">
-            <a:spAutoFit/>
-          </a:bodyPr>
-          <a:lstStyle/>
-          <a:p>
-            <a:pPr algn="l">
-              <a:lnSpc>
-                <a:spcPct val="130000"/>
-              </a:lnSpc>
-            </a:pPr>
-            <a:r>
-              <a:rPr sz="1800" b="0" i="0">
+              <a:t>Scores each answer on accuracy, completeness, clarity and relevance, with the criteria in a different order each time. The gap between the two marks says how far to trust it.</a:t>
+            </a:r>
+          </a:p>
+        </p:txBody>
+      </p:sp>
+      <p:sp>
+        <p:nvSpPr>
+          <p:cNvPr id="13" name="TextBox 12"/>
+          <p:cNvSpPr txBox="1"/>
+          <p:nvPr/>
+        </p:nvSpPr>
+        <p:spPr>
+          <a:xfrm>
+            <a:off x="8339328" y="2468880"/>
+            <a:ext cx="3200400" cy="731520"/>
+          </a:xfrm>
+          <a:prstGeom prst="rect">
+            <a:avLst/>
+          </a:prstGeom>
+          <a:noFill/>
+        </p:spPr>
+        <p:txBody>
+          <a:bodyPr wrap="square" lIns="0" rIns="0" tIns="0" bIns="0">
+            <a:spAutoFit/>
+          </a:bodyPr>
+          <a:lstStyle/>
+          <a:p>
+            <a:pPr algn="l">
+              <a:lnSpc>
+                <a:spcPct val="126000"/>
+              </a:lnSpc>
+            </a:pPr>
+            <a:r>
+              <a:rPr sz="1450" b="1" i="0">
+                <a:solidFill>
+                  <a:srgbClr val="9A4415"/>
+                </a:solidFill>
+                <a:latin typeface="Calibri"/>
+              </a:rPr>
+              <a:t>Gemini as judge</a:t>
+            </a:r>
+          </a:p>
+          <a:p>
+            <a:pPr algn="l">
+              <a:lnSpc>
+                <a:spcPct val="126000"/>
+              </a:lnSpc>
+            </a:pPr>
+            <a:r>
+              <a:rPr sz="1450" b="1" i="0">
+                <a:solidFill>
+                  <a:srgbClr val="9A4415"/>
+                </a:solidFill>
+                <a:latin typeface="Calibri"/>
+              </a:rPr>
+              <a:t>(permuted order)</a:t>
+            </a:r>
+          </a:p>
+        </p:txBody>
+      </p:sp>
+      <p:sp>
+        <p:nvSpPr>
+          <p:cNvPr id="14" name="TextBox 13"/>
+          <p:cNvSpPr txBox="1"/>
+          <p:nvPr/>
+        </p:nvSpPr>
+        <p:spPr>
+          <a:xfrm>
+            <a:off x="658368" y="3419856"/>
+            <a:ext cx="1188720" cy="310896"/>
+          </a:xfrm>
+          <a:prstGeom prst="rect">
+            <a:avLst/>
+          </a:prstGeom>
+          <a:noFill/>
+        </p:spPr>
+        <p:txBody>
+          <a:bodyPr wrap="square" lIns="0" rIns="0" tIns="0" bIns="0">
+            <a:spAutoFit/>
+          </a:bodyPr>
+          <a:lstStyle/>
+          <a:p>
+            <a:pPr algn="l">
+              <a:lnSpc>
+                <a:spcPct val="125000"/>
+              </a:lnSpc>
+            </a:pPr>
+            <a:r>
+              <a:rPr sz="1900" b="1" i="0">
+                <a:solidFill>
+                  <a:srgbClr val="9A4415"/>
+                </a:solidFill>
+                <a:latin typeface="Calibri"/>
+              </a:rPr>
+              <a:t>M9</a:t>
+            </a:r>
+          </a:p>
+        </p:txBody>
+      </p:sp>
+      <p:sp>
+        <p:nvSpPr>
+          <p:cNvPr id="15" name="TextBox 14"/>
+          <p:cNvSpPr txBox="1"/>
+          <p:nvPr/>
+        </p:nvSpPr>
+        <p:spPr>
+          <a:xfrm>
+            <a:off x="2029968" y="3419856"/>
+            <a:ext cx="6035040" cy="292608"/>
+          </a:xfrm>
+          <a:prstGeom prst="rect">
+            <a:avLst/>
+          </a:prstGeom>
+          <a:noFill/>
+        </p:spPr>
+        <p:txBody>
+          <a:bodyPr wrap="square" lIns="0" rIns="0" tIns="0" bIns="0">
+            <a:spAutoFit/>
+          </a:bodyPr>
+          <a:lstStyle/>
+          <a:p>
+            <a:pPr algn="l">
+              <a:lnSpc>
+                <a:spcPct val="125000"/>
+              </a:lnSpc>
+            </a:pPr>
+            <a:r>
+              <a:rPr sz="1700" b="1" i="0">
                 <a:solidFill>
                   <a:srgbClr val="1B2733"/>
                 </a:solidFill>
                 <a:latin typeface="Calibri"/>
               </a:rPr>
-              <a:t>cancels out the effect of the order.</a:t>
-            </a:r>
-          </a:p>
-        </p:txBody>
-      </p:sp>
-      <p:sp>
-        <p:nvSpPr>
-          <p:cNvPr id="10" name="Rectangle 9"/>
+              <a:t>Checks for cheating</a:t>
+            </a:r>
+          </a:p>
+        </p:txBody>
+      </p:sp>
+      <p:sp>
+        <p:nvSpPr>
+          <p:cNvPr id="16" name="TextBox 15"/>
+          <p:cNvSpPr txBox="1"/>
+          <p:nvPr/>
+        </p:nvSpPr>
+        <p:spPr>
+          <a:xfrm>
+            <a:off x="2029968" y="3730752"/>
+            <a:ext cx="6035040" cy="566928"/>
+          </a:xfrm>
+          <a:prstGeom prst="rect">
+            <a:avLst/>
+          </a:prstGeom>
+          <a:noFill/>
+        </p:spPr>
+        <p:txBody>
+          <a:bodyPr wrap="square" lIns="0" rIns="0" tIns="0" bIns="0">
+            <a:spAutoFit/>
+          </a:bodyPr>
+          <a:lstStyle/>
+          <a:p>
+            <a:pPr algn="l">
+              <a:lnSpc>
+                <a:spcPct val="126000"/>
+              </a:lnSpc>
+            </a:pPr>
+            <a:r>
+              <a:rPr sz="1450" b="0" i="0">
+                <a:solidFill>
+                  <a:srgbClr val="5A6B7B"/>
+                </a:solidFill>
+                <a:latin typeface="Calibri"/>
+              </a:rPr>
+              <a:t>Looks at tab switches, answers arriving too fast or too slow, and answers that are suspiciously uniform in length.</a:t>
+            </a:r>
+          </a:p>
+        </p:txBody>
+      </p:sp>
+      <p:sp>
+        <p:nvSpPr>
+          <p:cNvPr id="17" name="TextBox 16"/>
+          <p:cNvSpPr txBox="1"/>
+          <p:nvPr/>
+        </p:nvSpPr>
+        <p:spPr>
+          <a:xfrm>
+            <a:off x="8339328" y="3438144"/>
+            <a:ext cx="3200400" cy="731520"/>
+          </a:xfrm>
+          <a:prstGeom prst="rect">
+            <a:avLst/>
+          </a:prstGeom>
+          <a:noFill/>
+        </p:spPr>
+        <p:txBody>
+          <a:bodyPr wrap="square" lIns="0" rIns="0" tIns="0" bIns="0">
+            <a:spAutoFit/>
+          </a:bodyPr>
+          <a:lstStyle/>
+          <a:p>
+            <a:pPr algn="l">
+              <a:lnSpc>
+                <a:spcPct val="126000"/>
+              </a:lnSpc>
+            </a:pPr>
+            <a:r>
+              <a:rPr sz="1450" b="1" i="0">
+                <a:solidFill>
+                  <a:srgbClr val="9A4415"/>
+                </a:solidFill>
+                <a:latin typeface="Calibri"/>
+              </a:rPr>
+              <a:t>scikit-learn</a:t>
+            </a:r>
+          </a:p>
+          <a:p>
+            <a:pPr algn="l">
+              <a:lnSpc>
+                <a:spcPct val="126000"/>
+              </a:lnSpc>
+            </a:pPr>
+            <a:r>
+              <a:rPr sz="1450" b="1" i="0">
+                <a:solidFill>
+                  <a:srgbClr val="9A4415"/>
+                </a:solidFill>
+                <a:latin typeface="Calibri"/>
+              </a:rPr>
+              <a:t>Isolation Forest</a:t>
+            </a:r>
+          </a:p>
+          <a:p>
+            <a:pPr algn="l">
+              <a:lnSpc>
+                <a:spcPct val="126000"/>
+              </a:lnSpc>
+            </a:pPr>
+            <a:r>
+              <a:rPr sz="1450" b="1" i="0">
+                <a:solidFill>
+                  <a:srgbClr val="9A4415"/>
+                </a:solidFill>
+                <a:latin typeface="Calibri"/>
+              </a:rPr>
+              <a:t>(trains itself)</a:t>
+            </a:r>
+          </a:p>
+        </p:txBody>
+      </p:sp>
+      <p:sp>
+        <p:nvSpPr>
+          <p:cNvPr id="18" name="TextBox 17"/>
+          <p:cNvSpPr txBox="1"/>
+          <p:nvPr/>
+        </p:nvSpPr>
+        <p:spPr>
+          <a:xfrm>
+            <a:off x="658368" y="4389120"/>
+            <a:ext cx="1188720" cy="310896"/>
+          </a:xfrm>
+          <a:prstGeom prst="rect">
+            <a:avLst/>
+          </a:prstGeom>
+          <a:noFill/>
+        </p:spPr>
+        <p:txBody>
+          <a:bodyPr wrap="square" lIns="0" rIns="0" tIns="0" bIns="0">
+            <a:spAutoFit/>
+          </a:bodyPr>
+          <a:lstStyle/>
+          <a:p>
+            <a:pPr algn="l">
+              <a:lnSpc>
+                <a:spcPct val="125000"/>
+              </a:lnSpc>
+            </a:pPr>
+            <a:r>
+              <a:rPr sz="1900" b="1" i="0">
+                <a:solidFill>
+                  <a:srgbClr val="4C3A8C"/>
+                </a:solidFill>
+                <a:latin typeface="Calibri"/>
+              </a:rPr>
+              <a:t>M11</a:t>
+            </a:r>
+          </a:p>
+        </p:txBody>
+      </p:sp>
+      <p:sp>
+        <p:nvSpPr>
+          <p:cNvPr id="19" name="TextBox 18"/>
+          <p:cNvSpPr txBox="1"/>
+          <p:nvPr/>
+        </p:nvSpPr>
+        <p:spPr>
+          <a:xfrm>
+            <a:off x="2029968" y="4389120"/>
+            <a:ext cx="6035040" cy="292608"/>
+          </a:xfrm>
+          <a:prstGeom prst="rect">
+            <a:avLst/>
+          </a:prstGeom>
+          <a:noFill/>
+        </p:spPr>
+        <p:txBody>
+          <a:bodyPr wrap="square" lIns="0" rIns="0" tIns="0" bIns="0">
+            <a:spAutoFit/>
+          </a:bodyPr>
+          <a:lstStyle/>
+          <a:p>
+            <a:pPr algn="l">
+              <a:lnSpc>
+                <a:spcPct val="125000"/>
+              </a:lnSpc>
+            </a:pPr>
+            <a:r>
+              <a:rPr sz="1700" b="1" i="0">
+                <a:solidFill>
+                  <a:srgbClr val="1B2733"/>
+                </a:solidFill>
+                <a:latin typeface="Calibri"/>
+              </a:rPr>
+              <a:t>Adds everything up</a:t>
+            </a:r>
+          </a:p>
+        </p:txBody>
+      </p:sp>
+      <p:sp>
+        <p:nvSpPr>
+          <p:cNvPr id="20" name="TextBox 19"/>
+          <p:cNvSpPr txBox="1"/>
+          <p:nvPr/>
+        </p:nvSpPr>
+        <p:spPr>
+          <a:xfrm>
+            <a:off x="2029968" y="4700016"/>
+            <a:ext cx="6035040" cy="566928"/>
+          </a:xfrm>
+          <a:prstGeom prst="rect">
+            <a:avLst/>
+          </a:prstGeom>
+          <a:noFill/>
+        </p:spPr>
+        <p:txBody>
+          <a:bodyPr wrap="square" lIns="0" rIns="0" tIns="0" bIns="0">
+            <a:spAutoFit/>
+          </a:bodyPr>
+          <a:lstStyle/>
+          <a:p>
+            <a:pPr algn="l">
+              <a:lnSpc>
+                <a:spcPct val="126000"/>
+              </a:lnSpc>
+            </a:pPr>
+            <a:r>
+              <a:rPr sz="1450" b="0" i="0">
+                <a:solidFill>
+                  <a:srgbClr val="5A6B7B"/>
+                </a:solidFill>
+                <a:latin typeface="Calibri"/>
+              </a:rPr>
+              <a:t>Answers 50%, skills covered 20%, session integrity 15%, delivery 15% — with every contribution shown, not hidden.</a:t>
+            </a:r>
+          </a:p>
+        </p:txBody>
+      </p:sp>
+      <p:sp>
+        <p:nvSpPr>
+          <p:cNvPr id="21" name="TextBox 20"/>
+          <p:cNvSpPr txBox="1"/>
+          <p:nvPr/>
+        </p:nvSpPr>
+        <p:spPr>
+          <a:xfrm>
+            <a:off x="8339328" y="4407408"/>
+            <a:ext cx="3200400" cy="731520"/>
+          </a:xfrm>
+          <a:prstGeom prst="rect">
+            <a:avLst/>
+          </a:prstGeom>
+          <a:noFill/>
+        </p:spPr>
+        <p:txBody>
+          <a:bodyPr wrap="square" lIns="0" rIns="0" tIns="0" bIns="0">
+            <a:spAutoFit/>
+          </a:bodyPr>
+          <a:lstStyle/>
+          <a:p>
+            <a:pPr algn="l">
+              <a:lnSpc>
+                <a:spcPct val="126000"/>
+              </a:lnSpc>
+            </a:pPr>
+            <a:r>
+              <a:rPr sz="1450" b="1" i="0">
+                <a:solidFill>
+                  <a:srgbClr val="4C3A8C"/>
+                </a:solidFill>
+                <a:latin typeface="Calibri"/>
+              </a:rPr>
+              <a:t>Plain Python</a:t>
+            </a:r>
+          </a:p>
+          <a:p>
+            <a:pPr algn="l">
+              <a:lnSpc>
+                <a:spcPct val="126000"/>
+              </a:lnSpc>
+            </a:pPr>
+            <a:r>
+              <a:rPr sz="1450" b="1" i="0">
+                <a:solidFill>
+                  <a:srgbClr val="4C3A8C"/>
+                </a:solidFill>
+                <a:latin typeface="Calibri"/>
+              </a:rPr>
+              <a:t>(fixed weights)</a:t>
+            </a:r>
+          </a:p>
+        </p:txBody>
+      </p:sp>
+      <p:sp>
+        <p:nvSpPr>
+          <p:cNvPr id="22" name="TextBox 21"/>
+          <p:cNvSpPr txBox="1"/>
+          <p:nvPr/>
+        </p:nvSpPr>
+        <p:spPr>
+          <a:xfrm>
+            <a:off x="658368" y="5358384"/>
+            <a:ext cx="1188720" cy="310896"/>
+          </a:xfrm>
+          <a:prstGeom prst="rect">
+            <a:avLst/>
+          </a:prstGeom>
+          <a:noFill/>
+        </p:spPr>
+        <p:txBody>
+          <a:bodyPr wrap="square" lIns="0" rIns="0" tIns="0" bIns="0">
+            <a:spAutoFit/>
+          </a:bodyPr>
+          <a:lstStyle/>
+          <a:p>
+            <a:pPr algn="l">
+              <a:lnSpc>
+                <a:spcPct val="125000"/>
+              </a:lnSpc>
+            </a:pPr>
+            <a:r>
+              <a:rPr sz="1900" b="1" i="0">
+                <a:solidFill>
+                  <a:srgbClr val="4C3A8C"/>
+                </a:solidFill>
+                <a:latin typeface="Calibri"/>
+              </a:rPr>
+              <a:t>M12</a:t>
+            </a:r>
+          </a:p>
+        </p:txBody>
+      </p:sp>
+      <p:sp>
+        <p:nvSpPr>
+          <p:cNvPr id="23" name="TextBox 22"/>
+          <p:cNvSpPr txBox="1"/>
+          <p:nvPr/>
+        </p:nvSpPr>
+        <p:spPr>
+          <a:xfrm>
+            <a:off x="2029968" y="5358384"/>
+            <a:ext cx="6035040" cy="292608"/>
+          </a:xfrm>
+          <a:prstGeom prst="rect">
+            <a:avLst/>
+          </a:prstGeom>
+          <a:noFill/>
+        </p:spPr>
+        <p:txBody>
+          <a:bodyPr wrap="square" lIns="0" rIns="0" tIns="0" bIns="0">
+            <a:spAutoFit/>
+          </a:bodyPr>
+          <a:lstStyle/>
+          <a:p>
+            <a:pPr algn="l">
+              <a:lnSpc>
+                <a:spcPct val="125000"/>
+              </a:lnSpc>
+            </a:pPr>
+            <a:r>
+              <a:rPr sz="1700" b="1" i="0">
+                <a:solidFill>
+                  <a:srgbClr val="1B2733"/>
+                </a:solidFill>
+                <a:latin typeface="Calibri"/>
+              </a:rPr>
+              <a:t>Writes the report</a:t>
+            </a:r>
+          </a:p>
+        </p:txBody>
+      </p:sp>
+      <p:sp>
+        <p:nvSpPr>
+          <p:cNvPr id="24" name="TextBox 23"/>
+          <p:cNvSpPr txBox="1"/>
+          <p:nvPr/>
+        </p:nvSpPr>
+        <p:spPr>
+          <a:xfrm>
+            <a:off x="2029968" y="5669280"/>
+            <a:ext cx="6035040" cy="566928"/>
+          </a:xfrm>
+          <a:prstGeom prst="rect">
+            <a:avLst/>
+          </a:prstGeom>
+          <a:noFill/>
+        </p:spPr>
+        <p:txBody>
+          <a:bodyPr wrap="square" lIns="0" rIns="0" tIns="0" bIns="0">
+            <a:spAutoFit/>
+          </a:bodyPr>
+          <a:lstStyle/>
+          <a:p>
+            <a:pPr algn="l">
+              <a:lnSpc>
+                <a:spcPct val="126000"/>
+              </a:lnSpc>
+            </a:pPr>
+            <a:r>
+              <a:rPr sz="1450" b="0" i="0">
+                <a:solidFill>
+                  <a:srgbClr val="5A6B7B"/>
+                </a:solidFill>
+                <a:latin typeface="Calibri"/>
+              </a:rPr>
+              <a:t>Each answer and mark, how consistent the marking was, the integrity verdict and the recommendation.</a:t>
+            </a:r>
+          </a:p>
+        </p:txBody>
+      </p:sp>
+      <p:sp>
+        <p:nvSpPr>
+          <p:cNvPr id="25" name="TextBox 24"/>
+          <p:cNvSpPr txBox="1"/>
+          <p:nvPr/>
+        </p:nvSpPr>
+        <p:spPr>
+          <a:xfrm>
+            <a:off x="8339328" y="5376672"/>
+            <a:ext cx="3200400" cy="731520"/>
+          </a:xfrm>
+          <a:prstGeom prst="rect">
+            <a:avLst/>
+          </a:prstGeom>
+          <a:noFill/>
+        </p:spPr>
+        <p:txBody>
+          <a:bodyPr wrap="square" lIns="0" rIns="0" tIns="0" bIns="0">
+            <a:spAutoFit/>
+          </a:bodyPr>
+          <a:lstStyle/>
+          <a:p>
+            <a:pPr algn="l">
+              <a:lnSpc>
+                <a:spcPct val="126000"/>
+              </a:lnSpc>
+            </a:pPr>
+            <a:r>
+              <a:rPr sz="1450" b="1" i="0">
+                <a:solidFill>
+                  <a:srgbClr val="4C3A8C"/>
+                </a:solidFill>
+                <a:latin typeface="Calibri"/>
+              </a:rPr>
+              <a:t>Plain Python</a:t>
+            </a:r>
+          </a:p>
+        </p:txBody>
+      </p:sp>
+      <p:sp>
+        <p:nvSpPr>
+          <p:cNvPr id="26" name="Rounded Rectangle 25"/>
           <p:cNvSpPr/>
           <p:nvPr/>
         </p:nvSpPr>
         <p:spPr>
           <a:xfrm>
-            <a:off x="658368" y="4041648"/>
-            <a:ext cx="182880" cy="54864"/>
-          </a:xfrm>
-          <a:prstGeom prst="rect">
-            <a:avLst/>
+            <a:off x="658368" y="5596128"/>
+            <a:ext cx="10874959" cy="640080"/>
+          </a:xfrm>
+          <a:prstGeom prst="roundRect">
+            <a:avLst>
+              <a:gd name="adj" fmla="val 6000"/>
+            </a:avLst>
           </a:prstGeom>
           <a:solidFill>
-            <a:srgbClr val="B4530F"/>
+            <a:srgbClr val="F4F7FA"/>
           </a:solidFill>
           <a:ln>
             <a:noFill/>
@@ -11333,14 +10956,14 @@
       </p:sp>
       <p:sp>
         <p:nvSpPr>
-          <p:cNvPr id="11" name="TextBox 10"/>
-          <p:cNvSpPr txBox="1"/>
-          <p:nvPr/>
-        </p:nvSpPr>
-        <p:spPr>
-          <a:xfrm>
-            <a:off x="1042416" y="3886200"/>
-            <a:ext cx="2377440" cy="365760"/>
+          <p:cNvPr id="27" name="TextBox 26"/>
+          <p:cNvSpPr txBox="1"/>
+          <p:nvPr/>
+        </p:nvSpPr>
+        <p:spPr>
+          <a:xfrm>
+            <a:off x="1042416" y="5769864"/>
+            <a:ext cx="10106863" cy="402336"/>
           </a:xfrm>
           <a:prstGeom prst="rect">
             <a:avLst/>
@@ -11359,259 +10982,13 @@
               </a:lnSpc>
             </a:pPr>
             <a:r>
-              <a:rPr sz="1800" b="1" i="0">
-                <a:solidFill>
-                  <a:srgbClr val="B4530F"/>
-                </a:solidFill>
-                <a:latin typeface="Calibri"/>
-              </a:rPr>
-              <a:t>The gap</a:t>
-            </a:r>
-          </a:p>
-        </p:txBody>
-      </p:sp>
-      <p:sp>
-        <p:nvSpPr>
-          <p:cNvPr id="12" name="TextBox 11"/>
-          <p:cNvSpPr txBox="1"/>
-          <p:nvPr/>
-        </p:nvSpPr>
-        <p:spPr>
-          <a:xfrm>
-            <a:off x="3538728" y="3886200"/>
-            <a:ext cx="7857439" cy="822960"/>
-          </a:xfrm>
-          <a:prstGeom prst="rect">
-            <a:avLst/>
-          </a:prstGeom>
-          <a:noFill/>
-        </p:spPr>
-        <p:txBody>
-          <a:bodyPr wrap="square" lIns="0" rIns="0" tIns="0" bIns="0">
-            <a:spAutoFit/>
-          </a:bodyPr>
-          <a:lstStyle/>
-          <a:p>
-            <a:pPr algn="l">
-              <a:lnSpc>
-                <a:spcPct val="130000"/>
-              </a:lnSpc>
-            </a:pPr>
-            <a:r>
-              <a:rPr sz="1800" b="0" i="0">
+              <a:rPr sz="1600" b="1" i="0">
                 <a:solidFill>
                   <a:srgbClr val="1B2733"/>
                 </a:solidFill>
                 <a:latin typeface="Calibri"/>
               </a:rPr>
-              <a:t>is the useful part. 82 then 81 means it is sure. 71 then 45 means it is not — and the average of 58 hides that.</a:t>
-            </a:r>
-          </a:p>
-        </p:txBody>
-      </p:sp>
-      <p:sp>
-        <p:nvSpPr>
-          <p:cNvPr id="13" name="Rectangle 12"/>
-          <p:cNvSpPr/>
-          <p:nvPr/>
-        </p:nvSpPr>
-        <p:spPr>
-          <a:xfrm>
-            <a:off x="658368" y="5001768"/>
-            <a:ext cx="182880" cy="54864"/>
-          </a:xfrm>
-          <a:prstGeom prst="rect">
-            <a:avLst/>
-          </a:prstGeom>
-          <a:solidFill>
-            <a:srgbClr val="1F4E79"/>
-          </a:solidFill>
-          <a:ln>
-            <a:noFill/>
-          </a:ln>
-          <a:effectLst/>
-        </p:spPr>
-        <p:style>
-          <a:lnRef idx="1">
-            <a:schemeClr val="accent1"/>
-          </a:lnRef>
-          <a:fillRef idx="3">
-            <a:schemeClr val="accent1"/>
-          </a:fillRef>
-          <a:effectRef idx="2">
-            <a:schemeClr val="accent1"/>
-          </a:effectRef>
-          <a:fontRef idx="minor">
-            <a:schemeClr val="lt1"/>
-          </a:fontRef>
-        </p:style>
-        <p:txBody>
-          <a:bodyPr rtlCol="0" anchor="ctr"/>
-          <a:lstStyle/>
-          <a:p>
-            <a:pPr algn="ctr"/>
-          </a:p>
-        </p:txBody>
-      </p:sp>
-      <p:sp>
-        <p:nvSpPr>
-          <p:cNvPr id="14" name="TextBox 13"/>
-          <p:cNvSpPr txBox="1"/>
-          <p:nvPr/>
-        </p:nvSpPr>
-        <p:spPr>
-          <a:xfrm>
-            <a:off x="1042416" y="4846320"/>
-            <a:ext cx="2377440" cy="365760"/>
-          </a:xfrm>
-          <a:prstGeom prst="rect">
-            <a:avLst/>
-          </a:prstGeom>
-          <a:noFill/>
-        </p:spPr>
-        <p:txBody>
-          <a:bodyPr wrap="square" lIns="0" rIns="0" tIns="0" bIns="0">
-            <a:spAutoFit/>
-          </a:bodyPr>
-          <a:lstStyle/>
-          <a:p>
-            <a:pPr algn="l">
-              <a:lnSpc>
-                <a:spcPct val="125000"/>
-              </a:lnSpc>
-            </a:pPr>
-            <a:r>
-              <a:rPr sz="1800" b="1" i="0">
-                <a:solidFill>
-                  <a:srgbClr val="1F4E79"/>
-                </a:solidFill>
-                <a:latin typeface="Calibri"/>
-              </a:rPr>
-              <a:t>What happens next</a:t>
-            </a:r>
-          </a:p>
-        </p:txBody>
-      </p:sp>
-      <p:sp>
-        <p:nvSpPr>
-          <p:cNvPr id="15" name="TextBox 14"/>
-          <p:cNvSpPr txBox="1"/>
-          <p:nvPr/>
-        </p:nvSpPr>
-        <p:spPr>
-          <a:xfrm>
-            <a:off x="3538728" y="4846320"/>
-            <a:ext cx="7857439" cy="822960"/>
-          </a:xfrm>
-          <a:prstGeom prst="rect">
-            <a:avLst/>
-          </a:prstGeom>
-          <a:noFill/>
-        </p:spPr>
-        <p:txBody>
-          <a:bodyPr wrap="square" lIns="0" rIns="0" tIns="0" bIns="0">
-            <a:spAutoFit/>
-          </a:bodyPr>
-          <a:lstStyle/>
-          <a:p>
-            <a:pPr algn="l">
-              <a:lnSpc>
-                <a:spcPct val="130000"/>
-              </a:lnSpc>
-            </a:pPr>
-            <a:r>
-              <a:rPr sz="1800" b="0" i="0">
-                <a:solidFill>
-                  <a:srgbClr val="1B2733"/>
-                </a:solidFill>
-                <a:latin typeface="Calibri"/>
-              </a:rPr>
-              <a:t>a big gap sends that answer to a human, instead of reporting a confident score.</a:t>
-            </a:r>
-          </a:p>
-        </p:txBody>
-      </p:sp>
-      <p:sp>
-        <p:nvSpPr>
-          <p:cNvPr id="16" name="Rounded Rectangle 15"/>
-          <p:cNvSpPr/>
-          <p:nvPr/>
-        </p:nvSpPr>
-        <p:spPr>
-          <a:xfrm>
-            <a:off x="658368" y="5349240"/>
-            <a:ext cx="10874959" cy="822960"/>
-          </a:xfrm>
-          <a:prstGeom prst="roundRect">
-            <a:avLst>
-              <a:gd name="adj" fmla="val 6000"/>
-            </a:avLst>
-          </a:prstGeom>
-          <a:solidFill>
-            <a:srgbClr val="F4F7FA"/>
-          </a:solidFill>
-          <a:ln>
-            <a:noFill/>
-          </a:ln>
-          <a:effectLst/>
-        </p:spPr>
-        <p:style>
-          <a:lnRef idx="1">
-            <a:schemeClr val="accent1"/>
-          </a:lnRef>
-          <a:fillRef idx="3">
-            <a:schemeClr val="accent1"/>
-          </a:fillRef>
-          <a:effectRef idx="2">
-            <a:schemeClr val="accent1"/>
-          </a:effectRef>
-          <a:fontRef idx="minor">
-            <a:schemeClr val="lt1"/>
-          </a:fontRef>
-        </p:style>
-        <p:txBody>
-          <a:bodyPr rtlCol="0" anchor="ctr"/>
-          <a:lstStyle/>
-          <a:p>
-            <a:pPr algn="ctr"/>
-          </a:p>
-        </p:txBody>
-      </p:sp>
-      <p:sp>
-        <p:nvSpPr>
-          <p:cNvPr id="17" name="TextBox 16"/>
-          <p:cNvSpPr txBox="1"/>
-          <p:nvPr/>
-        </p:nvSpPr>
-        <p:spPr>
-          <a:xfrm>
-            <a:off x="1069848" y="5577840"/>
-            <a:ext cx="10051999" cy="457200"/>
-          </a:xfrm>
-          <a:prstGeom prst="rect">
-            <a:avLst/>
-          </a:prstGeom>
-          <a:noFill/>
-        </p:spPr>
-        <p:txBody>
-          <a:bodyPr wrap="square" lIns="0" rIns="0" tIns="0" bIns="0">
-            <a:spAutoFit/>
-          </a:bodyPr>
-          <a:lstStyle/>
-          <a:p>
-            <a:pPr algn="l">
-              <a:lnSpc>
-                <a:spcPct val="125000"/>
-              </a:lnSpc>
-            </a:pPr>
-            <a:r>
-              <a:rPr sz="1900" b="1" i="0">
-                <a:solidFill>
-                  <a:srgbClr val="1B2733"/>
-                </a:solidFill>
-                <a:latin typeface="Calibri"/>
-              </a:rPr>
-              <a:t>I am not claiming the AI is unbiased. I am claiming that when it is unsure, the system says so.</a:t>
+              <a:t>M6 is the research contribution: mark twice, and keep the disagreement as a measure of how far to trust the mark.</a:t>
             </a:r>
           </a:p>
         </p:txBody>
@@ -11668,7 +11045,7 @@
                 </a:solidFill>
                 <a:latin typeface="Calibri"/>
               </a:rPr>
-              <a:t>RESULTS</a:t>
+              <a:t>RESULTS AND IMPACT</a:t>
             </a:r>
           </a:p>
         </p:txBody>
@@ -11707,7 +11084,7 @@
                 </a:solidFill>
                 <a:latin typeface="Calibri"/>
               </a:rPr>
-              <a:t>What I found when I tested it — two faults in my own system</a:t>
+              <a:t>What testing found — two faults in my own system</a:t>
             </a:r>
           </a:p>
         </p:txBody>
@@ -11803,7 +11180,7 @@
         </p:nvSpPr>
         <p:spPr>
           <a:xfrm>
-            <a:off x="658368" y="1993392"/>
+            <a:off x="658368" y="2011680"/>
             <a:ext cx="2514600" cy="1280160"/>
           </a:xfrm>
           <a:prstGeom prst="roundRect">
@@ -11849,7 +11226,7 @@
         </p:nvSpPr>
         <p:spPr>
           <a:xfrm>
-            <a:off x="658368" y="2194560"/>
+            <a:off x="658368" y="2212848"/>
             <a:ext cx="2514600" cy="640080"/>
           </a:xfrm>
           <a:prstGeom prst="rect">
@@ -11888,7 +11265,7 @@
         </p:nvSpPr>
         <p:spPr>
           <a:xfrm>
-            <a:off x="804672" y="2834640"/>
+            <a:off x="804672" y="2852928"/>
             <a:ext cx="2221992" cy="457200"/>
           </a:xfrm>
           <a:prstGeom prst="rect">
@@ -11943,7 +11320,7 @@
         </p:nvSpPr>
         <p:spPr>
           <a:xfrm>
-            <a:off x="3401568" y="1993392"/>
+            <a:off x="3401568" y="2011680"/>
             <a:ext cx="2514600" cy="1280160"/>
           </a:xfrm>
           <a:prstGeom prst="roundRect">
@@ -11989,7 +11366,7 @@
         </p:nvSpPr>
         <p:spPr>
           <a:xfrm>
-            <a:off x="3401568" y="2194560"/>
+            <a:off x="3401568" y="2212848"/>
             <a:ext cx="2514600" cy="640080"/>
           </a:xfrm>
           <a:prstGeom prst="rect">
@@ -12028,7 +11405,7 @@
         </p:nvSpPr>
         <p:spPr>
           <a:xfrm>
-            <a:off x="3547872" y="2834640"/>
+            <a:off x="3547872" y="2852928"/>
             <a:ext cx="2221992" cy="457200"/>
           </a:xfrm>
           <a:prstGeom prst="rect">
@@ -12083,7 +11460,7 @@
         </p:nvSpPr>
         <p:spPr>
           <a:xfrm>
-            <a:off x="6144768" y="1993392"/>
+            <a:off x="6144768" y="2011680"/>
             <a:ext cx="2514600" cy="1280160"/>
           </a:xfrm>
           <a:prstGeom prst="roundRect">
@@ -12129,7 +11506,7 @@
         </p:nvSpPr>
         <p:spPr>
           <a:xfrm>
-            <a:off x="6144768" y="2194560"/>
+            <a:off x="6144768" y="2212848"/>
             <a:ext cx="2514600" cy="640080"/>
           </a:xfrm>
           <a:prstGeom prst="rect">
@@ -12168,7 +11545,7 @@
         </p:nvSpPr>
         <p:spPr>
           <a:xfrm>
-            <a:off x="6291072" y="2834640"/>
+            <a:off x="6291072" y="2852928"/>
             <a:ext cx="2221992" cy="457200"/>
           </a:xfrm>
           <a:prstGeom prst="rect">
@@ -12194,7 +11571,7 @@
                 </a:solidFill>
                 <a:latin typeface="Calibri"/>
               </a:rPr>
-              <a:t>how closely the four marking</a:t>
+              <a:t>how closely the four</a:t>
             </a:r>
           </a:p>
           <a:p>
@@ -12223,7 +11600,7 @@
         </p:nvSpPr>
         <p:spPr>
           <a:xfrm>
-            <a:off x="8887968" y="1993392"/>
+            <a:off x="8887968" y="2011680"/>
             <a:ext cx="2606040" cy="1280160"/>
           </a:xfrm>
           <a:prstGeom prst="roundRect">
@@ -12269,7 +11646,7 @@
         </p:nvSpPr>
         <p:spPr>
           <a:xfrm>
-            <a:off x="8887968" y="2194560"/>
+            <a:off x="8887968" y="2212848"/>
             <a:ext cx="2606040" cy="640080"/>
           </a:xfrm>
           <a:prstGeom prst="rect">
@@ -12308,7 +11685,7 @@
         </p:nvSpPr>
         <p:spPr>
           <a:xfrm>
-            <a:off x="9034272" y="2834640"/>
+            <a:off x="9034272" y="2852928"/>
             <a:ext cx="2313432" cy="457200"/>
           </a:xfrm>
           <a:prstGeom prst="rect">
@@ -12363,7 +11740,7 @@
         </p:nvSpPr>
         <p:spPr>
           <a:xfrm>
-            <a:off x="658368" y="3666744"/>
+            <a:off x="658368" y="3703320"/>
             <a:ext cx="164592" cy="54864"/>
           </a:xfrm>
           <a:prstGeom prst="rect">
@@ -12407,7 +11784,7 @@
         </p:nvSpPr>
         <p:spPr>
           <a:xfrm>
-            <a:off x="1024128" y="3529584"/>
+            <a:off x="1024128" y="3566160"/>
             <a:ext cx="10417759" cy="731520"/>
           </a:xfrm>
           <a:prstGeom prst="rect">
@@ -12446,7 +11823,7 @@
         </p:nvSpPr>
         <p:spPr>
           <a:xfrm>
-            <a:off x="658368" y="4453128"/>
+            <a:off x="658368" y="4489704"/>
             <a:ext cx="164592" cy="54864"/>
           </a:xfrm>
           <a:prstGeom prst="rect">
@@ -12490,7 +11867,7 @@
         </p:nvSpPr>
         <p:spPr>
           <a:xfrm>
-            <a:off x="1024128" y="4315968"/>
+            <a:off x="1024128" y="4352544"/>
             <a:ext cx="10417759" cy="731520"/>
           </a:xfrm>
           <a:prstGeom prst="rect">
@@ -12516,7 +11893,7 @@
                 </a:solidFill>
                 <a:latin typeface="Calibri"/>
               </a:rPr>
-              <a:t>Fault 1 — it is too generous.  The pass mark for a “strong” answer is 70. Deliberately average answers scored 92.8 — so average and excellent get the same verdict.</a:t>
+              <a:t>Fault 1 — too generous.  The pass mark for “strong” is 70. Deliberately average answers scored 92.8, so average and excellent get the same verdict.</a:t>
             </a:r>
           </a:p>
         </p:txBody>
@@ -12529,7 +11906,7 @@
         </p:nvSpPr>
         <p:spPr>
           <a:xfrm>
-            <a:off x="658368" y="5239512"/>
+            <a:off x="658368" y="5276088"/>
             <a:ext cx="164592" cy="54864"/>
           </a:xfrm>
           <a:prstGeom prst="rect">
@@ -12573,7 +11950,7 @@
         </p:nvSpPr>
         <p:spPr>
           <a:xfrm>
-            <a:off x="1024128" y="5102352"/>
+            <a:off x="1024128" y="5138928"/>
             <a:ext cx="10417759" cy="731520"/>
           </a:xfrm>
           <a:prstGeom prst="rect">
@@ -13024,7 +12401,7 @@
                 </a:solidFill>
                 <a:latin typeface="Calibri"/>
               </a:rPr>
-              <a:t>Removed the second marker. Its training answers came from the same AI it was meant to check, so agreement proved nothing. A test showed it was really measuring length.</a:t>
+              <a:t>Removed the second marker. Its training answers came from the same AI it was meant to check, so agreement proved nothing. A test showed it measuring length.</a:t>
             </a:r>
           </a:p>
         </p:txBody>
@@ -13107,7 +12484,7 @@
                 </a:solidFill>
                 <a:latin typeface="Calibri"/>
               </a:rPr>
-              <a:t>Replaced the emotion detector. Now measures how someone speaks — loudness, steadiness, pauses. Every part can be inspected; an emotion label cannot.</a:t>
+              <a:t>Replaced the emotion detector. Now measures how someone speaks. Every part can be inspected; an emotion label cannot.</a:t>
             </a:r>
           </a:p>
         </p:txBody>
@@ -13273,7 +12650,7 @@
                 </a:solidFill>
                 <a:latin typeface="Calibri"/>
               </a:rPr>
-              <a:t>18 answers, and written not spoken. A small test set.</a:t>
+              <a:t>18 answers, written not spoken. A small test set.</a:t>
             </a:r>
           </a:p>
         </p:txBody>
